--- a/docs/slides/toyota_novelty_progress.pptx
+++ b/docs/slides/toyota_novelty_progress.pptx
@@ -6445,701 +6445,714 @@
             <a:tbl>
               <a:tblPr/>
               <a:tblGrid>
-                <a:gridCol w="2194560"/>
-                <a:gridCol w="7114032"/>
-                <a:gridCol w="1783080"/>
+                <a:gridCol w="2194560">
+                  <a:extLst>
+                    <a:ext uri="{9D8B030D-6E8A-4147-A177-3AD203B41FA5}">
+                      <a16:colId xmlns:a16="http://schemas.microsoft.com/office/drawing/2014/main" val="20000"/>
+                    </a:ext>
+                  </a:extLst>
+                </a:gridCol>
+                <a:gridCol w="7114032">
+                  <a:extLst>
+                    <a:ext uri="{9D8B030D-6E8A-4147-A177-3AD203B41FA5}">
+                      <a16:colId xmlns:a16="http://schemas.microsoft.com/office/drawing/2014/main" val="20001"/>
+                    </a:ext>
+                  </a:extLst>
+                </a:gridCol>
+                <a:gridCol w="1783080">
+                  <a:extLst>
+                    <a:ext uri="{9D8B030D-6E8A-4147-A177-3AD203B41FA5}">
+                      <a16:colId xmlns:a16="http://schemas.microsoft.com/office/drawing/2014/main" val="20002"/>
+                    </a:ext>
+                  </a:extLst>
+                </a:gridCol>
               </a:tblGrid>
               <a:tr h="475488">
+                <a:tc>
+                  <a:txBody>
+                    <a:bodyPr/>
+                    <a:lstStyle/>
+                    <a:p>
+                      <a:pPr marL="0" indent="0" algn="l">
+                        <a:buNone/>
+                      </a:pPr>
+                      <a:r>
+                        <a:rPr lang="ja-JP" altLang="en-US" sz="1800" b="1" dirty="0">
+                          <a:solidFill>
+                            <a:srgbClr val="262626"/>
+                          </a:solidFill>
+                          <a:latin typeface="Meiryo" pitchFamily="34" charset="0"/>
+                          <a:ea typeface="Meiryo" pitchFamily="34" charset="-122"/>
+                          <a:cs typeface="Meiryo" pitchFamily="34" charset="-120"/>
+                        </a:rPr>
+                        <a:t>変数</a:t>
+                      </a:r>
+                      <a:endParaRPr lang="ja-JP" sz="1800" dirty="0">
+                        <a:latin typeface="Meiryo" charset="0"/>
+                        <a:ea typeface="Meiryo" charset="0"/>
+                        <a:cs typeface="Meiryo" charset="0"/>
+                      </a:endParaRPr>
+                    </a:p>
+                  </a:txBody>
+                  <a:tcPr marL="109728" marR="109728" marT="54864" marB="54864" anchor="ctr">
+                    <a:lnL w="0" cap="flat" cmpd="sng" algn="ctr">
+                      <a:noFill/>
+                    </a:lnL>
+                    <a:lnR w="0" cap="flat" cmpd="sng" algn="ctr">
+                      <a:noFill/>
+                    </a:lnR>
+                    <a:lnT w="19050" cap="flat" cmpd="sng" algn="ctr">
+                      <a:solidFill>
+                        <a:srgbClr val="404040"/>
+                      </a:solidFill>
+                      <a:prstDash val="solid"/>
+                      <a:round/>
+                      <a:headEnd type="none" w="med" len="med"/>
+                      <a:tailEnd type="none" w="med" len="med"/>
+                    </a:lnT>
+                    <a:lnB w="12700" cap="flat" cmpd="sng" algn="ctr">
+                      <a:solidFill>
+                        <a:srgbClr val="404040"/>
+                      </a:solidFill>
+                      <a:prstDash val="solid"/>
+                      <a:round/>
+                      <a:headEnd type="none" w="med" len="med"/>
+                      <a:tailEnd type="none" w="med" len="med"/>
+                    </a:lnB>
+                  </a:tcPr>
+                </a:tc>
+                <a:tc>
+                  <a:txBody>
+                    <a:bodyPr/>
+                    <a:lstStyle/>
+                    <a:p>
+                      <a:pPr marL="0" indent="0" algn="l">
+                        <a:buNone/>
+                      </a:pPr>
+                      <a:r>
+                        <a:rPr lang="ja-JP" altLang="en-US" sz="1800" b="1" dirty="0">
+                          <a:solidFill>
+                            <a:srgbClr val="262626"/>
+                          </a:solidFill>
+                          <a:latin typeface="Meiryo" pitchFamily="34" charset="0"/>
+                          <a:ea typeface="Meiryo" pitchFamily="34" charset="-122"/>
+                          <a:cs typeface="Meiryo" pitchFamily="34" charset="-120"/>
+                        </a:rPr>
+                        <a:t>定義</a:t>
+                      </a:r>
+                      <a:endParaRPr lang="ja-JP" sz="1800" dirty="0">
+                        <a:latin typeface="Meiryo" charset="0"/>
+                        <a:ea typeface="Meiryo" charset="0"/>
+                        <a:cs typeface="Meiryo" charset="0"/>
+                      </a:endParaRPr>
+                    </a:p>
+                  </a:txBody>
+                  <a:tcPr marL="109728" marR="109728" marT="54864" marB="54864" anchor="ctr">
+                    <a:lnL w="0" cap="flat" cmpd="sng" algn="ctr">
+                      <a:noFill/>
+                    </a:lnL>
+                    <a:lnR w="0" cap="flat" cmpd="sng" algn="ctr">
+                      <a:noFill/>
+                    </a:lnR>
+                    <a:lnT w="19050" cap="flat" cmpd="sng" algn="ctr">
+                      <a:solidFill>
+                        <a:srgbClr val="404040"/>
+                      </a:solidFill>
+                      <a:prstDash val="solid"/>
+                      <a:round/>
+                      <a:headEnd type="none" w="med" len="med"/>
+                      <a:tailEnd type="none" w="med" len="med"/>
+                    </a:lnT>
+                    <a:lnB w="12700" cap="flat" cmpd="sng" algn="ctr">
+                      <a:solidFill>
+                        <a:srgbClr val="404040"/>
+                      </a:solidFill>
+                      <a:prstDash val="solid"/>
+                      <a:round/>
+                      <a:headEnd type="none" w="med" len="med"/>
+                      <a:tailEnd type="none" w="med" len="med"/>
+                    </a:lnB>
+                  </a:tcPr>
+                </a:tc>
+                <a:tc>
+                  <a:txBody>
+                    <a:bodyPr/>
+                    <a:lstStyle/>
+                    <a:p>
+                      <a:pPr marL="0" indent="0" algn="l">
+                        <a:buNone/>
+                      </a:pPr>
+                      <a:r>
+                        <a:rPr lang="ja-JP" altLang="en-US" sz="1800" b="1" dirty="0">
+                          <a:solidFill>
+                            <a:srgbClr val="262626"/>
+                          </a:solidFill>
+                          <a:latin typeface="Meiryo" pitchFamily="34" charset="0"/>
+                          <a:ea typeface="Meiryo" pitchFamily="34" charset="-122"/>
+                          <a:cs typeface="Meiryo" pitchFamily="34" charset="-120"/>
+                        </a:rPr>
+                        <a:t>出典</a:t>
+                      </a:r>
+                      <a:endParaRPr lang="ja-JP" sz="1800" dirty="0">
+                        <a:latin typeface="Meiryo" charset="0"/>
+                        <a:ea typeface="Meiryo" charset="0"/>
+                        <a:cs typeface="Meiryo" charset="0"/>
+                      </a:endParaRPr>
+                    </a:p>
+                  </a:txBody>
+                  <a:tcPr marL="109728" marR="109728" marT="54864" marB="54864" anchor="ctr">
+                    <a:lnL w="0" cap="flat" cmpd="sng" algn="ctr">
+                      <a:noFill/>
+                    </a:lnL>
+                    <a:lnR w="0" cap="flat" cmpd="sng" algn="ctr">
+                      <a:noFill/>
+                    </a:lnR>
+                    <a:lnT w="19050" cap="flat" cmpd="sng" algn="ctr">
+                      <a:solidFill>
+                        <a:srgbClr val="404040"/>
+                      </a:solidFill>
+                      <a:prstDash val="solid"/>
+                      <a:round/>
+                      <a:headEnd type="none" w="med" len="med"/>
+                      <a:tailEnd type="none" w="med" len="med"/>
+                    </a:lnT>
+                    <a:lnB w="12700" cap="flat" cmpd="sng" algn="ctr">
+                      <a:solidFill>
+                        <a:srgbClr val="404040"/>
+                      </a:solidFill>
+                      <a:prstDash val="solid"/>
+                      <a:round/>
+                      <a:headEnd type="none" w="med" len="med"/>
+                      <a:tailEnd type="none" w="med" len="med"/>
+                    </a:lnB>
+                  </a:tcPr>
+                </a:tc>
                 <a:extLst>
                   <a:ext uri="{0D108BD9-81ED-4DB2-BD59-A6C34878D82A}">
                     <a16:rowId xmlns:a16="http://schemas.microsoft.com/office/drawing/2014/main" val="10000"/>
                   </a:ext>
                 </a:extLst>
-                <a:tc>
-                  <a:txBody>
-                    <a:bodyPr/>
-                    <a:lstStyle/>
-                    <a:p>
-                      <a:pPr marL="0" indent="0" algn="l">
-                        <a:buNone/>
-                      </a:pPr>
-                      <a:r>
-                        <a:rPr lang="ja-JP" altLang="en-US" sz="1800" b="1" dirty="0">
-                          <a:solidFill>
-                            <a:srgbClr val="262626"/>
-                          </a:solidFill>
-                          <a:latin typeface="Meiryo" pitchFamily="34" charset="0"/>
-                          <a:ea typeface="Meiryo" pitchFamily="34" charset="-122"/>
-                          <a:cs typeface="Meiryo" pitchFamily="34" charset="-120"/>
-                        </a:rPr>
-                        <a:t>変数</a:t>
-                      </a:r>
-                      <a:endParaRPr lang="ja-JP" sz="1800" dirty="0">
-                        <a:latin typeface="Meiryo" charset="0"/>
-                        <a:ea typeface="Meiryo" charset="0"/>
-                        <a:cs typeface="Meiryo" charset="0"/>
-                      </a:endParaRPr>
-                    </a:p>
-                  </a:txBody>
-                  <a:tcPr marL="109728" marR="109728" marT="54864" marB="54864" anchor="ctr">
-                    <a:lnL w="0" cap="flat" cmpd="sng" algn="ctr">
-                      <a:noFill/>
-                    </a:lnL>
-                    <a:lnR w="0" cap="flat" cmpd="sng" algn="ctr">
-                      <a:noFill/>
-                    </a:lnR>
-                    <a:lnT w="19050" cap="flat" cmpd="sng" algn="ctr">
-                      <a:solidFill>
-                        <a:srgbClr val="404040"/>
-                      </a:solidFill>
-                      <a:prstDash val="solid"/>
-                      <a:round/>
-                      <a:headEnd type="none" w="med" len="med"/>
-                      <a:tailEnd type="none" w="med" len="med"/>
-                    </a:lnT>
-                    <a:lnB w="12700" cap="flat" cmpd="sng" algn="ctr">
-                      <a:solidFill>
-                        <a:srgbClr val="404040"/>
-                      </a:solidFill>
-                      <a:prstDash val="solid"/>
-                      <a:round/>
-                      <a:headEnd type="none" w="med" len="med"/>
-                      <a:tailEnd type="none" w="med" len="med"/>
-                    </a:lnB>
-                  </a:tcPr>
-                </a:tc>
-                <a:tc>
-                  <a:txBody>
-                    <a:bodyPr/>
-                    <a:lstStyle/>
-                    <a:p>
-                      <a:pPr marL="0" indent="0" algn="l">
-                        <a:buNone/>
-                      </a:pPr>
-                      <a:r>
-                        <a:rPr lang="ja-JP" altLang="en-US" sz="1800" b="1" dirty="0">
-                          <a:solidFill>
-                            <a:srgbClr val="262626"/>
-                          </a:solidFill>
-                          <a:latin typeface="Meiryo" pitchFamily="34" charset="0"/>
-                          <a:ea typeface="Meiryo" pitchFamily="34" charset="-122"/>
-                          <a:cs typeface="Meiryo" pitchFamily="34" charset="-120"/>
-                        </a:rPr>
-                        <a:t>定義</a:t>
-                      </a:r>
-                      <a:endParaRPr lang="ja-JP" sz="1800" dirty="0">
-                        <a:latin typeface="Meiryo" charset="0"/>
-                        <a:ea typeface="Meiryo" charset="0"/>
-                        <a:cs typeface="Meiryo" charset="0"/>
-                      </a:endParaRPr>
-                    </a:p>
-                  </a:txBody>
-                  <a:tcPr marL="109728" marR="109728" marT="54864" marB="54864" anchor="ctr">
-                    <a:lnL w="0" cap="flat" cmpd="sng" algn="ctr">
-                      <a:noFill/>
-                    </a:lnL>
-                    <a:lnR w="0" cap="flat" cmpd="sng" algn="ctr">
-                      <a:noFill/>
-                    </a:lnR>
-                    <a:lnT w="19050" cap="flat" cmpd="sng" algn="ctr">
-                      <a:solidFill>
-                        <a:srgbClr val="404040"/>
-                      </a:solidFill>
-                      <a:prstDash val="solid"/>
-                      <a:round/>
-                      <a:headEnd type="none" w="med" len="med"/>
-                      <a:tailEnd type="none" w="med" len="med"/>
-                    </a:lnT>
-                    <a:lnB w="12700" cap="flat" cmpd="sng" algn="ctr">
-                      <a:solidFill>
-                        <a:srgbClr val="404040"/>
-                      </a:solidFill>
-                      <a:prstDash val="solid"/>
-                      <a:round/>
-                      <a:headEnd type="none" w="med" len="med"/>
-                      <a:tailEnd type="none" w="med" len="med"/>
-                    </a:lnB>
-                  </a:tcPr>
-                </a:tc>
-                <a:tc>
-                  <a:txBody>
-                    <a:bodyPr/>
-                    <a:lstStyle/>
-                    <a:p>
-                      <a:pPr marL="0" indent="0" algn="l">
-                        <a:buNone/>
-                      </a:pPr>
-                      <a:r>
-                        <a:rPr lang="ja-JP" altLang="en-US" sz="1800" b="1" dirty="0">
-                          <a:solidFill>
-                            <a:srgbClr val="262626"/>
-                          </a:solidFill>
-                          <a:latin typeface="Meiryo" pitchFamily="34" charset="0"/>
-                          <a:ea typeface="Meiryo" pitchFamily="34" charset="-122"/>
-                          <a:cs typeface="Meiryo" pitchFamily="34" charset="-120"/>
-                        </a:rPr>
-                        <a:t>出典</a:t>
-                      </a:r>
-                      <a:endParaRPr lang="ja-JP" sz="1800" dirty="0">
-                        <a:latin typeface="Meiryo" charset="0"/>
-                        <a:ea typeface="Meiryo" charset="0"/>
-                        <a:cs typeface="Meiryo" charset="0"/>
-                      </a:endParaRPr>
-                    </a:p>
-                  </a:txBody>
-                  <a:tcPr marL="109728" marR="109728" marT="54864" marB="54864" anchor="ctr">
-                    <a:lnL w="0" cap="flat" cmpd="sng" algn="ctr">
-                      <a:noFill/>
-                    </a:lnL>
-                    <a:lnR w="0" cap="flat" cmpd="sng" algn="ctr">
-                      <a:noFill/>
-                    </a:lnR>
-                    <a:lnT w="19050" cap="flat" cmpd="sng" algn="ctr">
-                      <a:solidFill>
-                        <a:srgbClr val="404040"/>
-                      </a:solidFill>
-                      <a:prstDash val="solid"/>
-                      <a:round/>
-                      <a:headEnd type="none" w="med" len="med"/>
-                      <a:tailEnd type="none" w="med" len="med"/>
-                    </a:lnT>
-                    <a:lnB w="12700" cap="flat" cmpd="sng" algn="ctr">
-                      <a:solidFill>
-                        <a:srgbClr val="404040"/>
-                      </a:solidFill>
-                      <a:prstDash val="solid"/>
-                      <a:round/>
-                      <a:headEnd type="none" w="med" len="med"/>
-                      <a:tailEnd type="none" w="med" len="med"/>
-                    </a:lnB>
-                  </a:tcPr>
-                </a:tc>
               </a:tr>
               <a:tr h="1161288">
+                <a:tc>
+                  <a:txBody>
+                    <a:bodyPr/>
+                    <a:lstStyle/>
+                    <a:p>
+                      <a:pPr marL="0" indent="0" algn="l">
+                        <a:buNone/>
+                      </a:pPr>
+                      <a:r>
+                        <a:rPr lang="ja-JP" altLang="en-US" sz="1800" dirty="0">
+                          <a:solidFill>
+                            <a:srgbClr val="262626"/>
+                          </a:solidFill>
+                          <a:latin typeface="Meiryo" pitchFamily="34" charset="0"/>
+                          <a:ea typeface="Meiryo" pitchFamily="34" charset="-122"/>
+                          <a:cs typeface="Meiryo" pitchFamily="34" charset="-120"/>
+                        </a:rPr>
+                        <a:t>非慣習性の順位</a:t>
+                      </a:r>
+                      <a:endParaRPr lang="ja-JP" sz="1800" dirty="0">
+                        <a:latin typeface="Meiryo" charset="0"/>
+                        <a:ea typeface="Meiryo" charset="0"/>
+                        <a:cs typeface="Meiryo" charset="0"/>
+                      </a:endParaRPr>
+                    </a:p>
+                    <a:p>
+                      <a:pPr marL="0" indent="0" algn="l">
+                        <a:buNone/>
+                      </a:pPr>
+                      <a:r>
+                        <a:rPr lang="ja-JP" altLang="en-US" sz="1800" dirty="0">
+                          <a:solidFill>
+                            <a:srgbClr val="262626"/>
+                          </a:solidFill>
+                          <a:latin typeface="Meiryo" pitchFamily="34" charset="0"/>
+                          <a:ea typeface="Meiryo" pitchFamily="34" charset="-122"/>
+                          <a:cs typeface="Meiryo" pitchFamily="34" charset="-120"/>
+                        </a:rPr>
+                        <a:t>（調べる値）</a:t>
+                      </a:r>
+                      <a:endParaRPr lang="ja-JP" sz="1800" dirty="0">
+                        <a:latin typeface="Meiryo" charset="0"/>
+                        <a:ea typeface="Meiryo" charset="0"/>
+                        <a:cs typeface="Meiryo" charset="0"/>
+                      </a:endParaRPr>
+                    </a:p>
+                  </a:txBody>
+                  <a:tcPr marL="109728" marR="109728" marT="54864" marB="54864" anchor="ctr">
+                    <a:lnL w="0" cap="flat" cmpd="sng" algn="ctr">
+                      <a:noFill/>
+                    </a:lnL>
+                    <a:lnR w="0" cap="flat" cmpd="sng" algn="ctr">
+                      <a:noFill/>
+                    </a:lnR>
+                    <a:lnT w="12700" cap="flat" cmpd="sng" algn="ctr">
+                      <a:solidFill>
+                        <a:srgbClr val="404040"/>
+                      </a:solidFill>
+                      <a:prstDash val="solid"/>
+                      <a:round/>
+                      <a:headEnd type="none" w="med" len="med"/>
+                      <a:tailEnd type="none" w="med" len="med"/>
+                    </a:lnT>
+                    <a:lnB w="6350" cap="flat" cmpd="sng" algn="ctr">
+                      <a:solidFill>
+                        <a:srgbClr val="BFBFBF"/>
+                      </a:solidFill>
+                      <a:prstDash val="solid"/>
+                      <a:round/>
+                      <a:headEnd type="none" w="med" len="med"/>
+                      <a:tailEnd type="none" w="med" len="med"/>
+                    </a:lnB>
+                  </a:tcPr>
+                </a:tc>
+                <a:tc>
+                  <a:txBody>
+                    <a:bodyPr/>
+                    <a:lstStyle/>
+                    <a:p>
+                      <a:pPr marL="0" indent="0" algn="l">
+                        <a:buNone/>
+                      </a:pPr>
+                      <a:r>
+                        <a:rPr lang="ja-JP" altLang="en-US" sz="1800" dirty="0">
+                          <a:solidFill>
+                            <a:srgbClr val="262626"/>
+                          </a:solidFill>
+                          <a:latin typeface="Meiryo" pitchFamily="34" charset="0"/>
+                          <a:ea typeface="Meiryo" pitchFamily="34" charset="-122"/>
+                          <a:cs typeface="Meiryo" pitchFamily="34" charset="-120"/>
+                        </a:rPr>
+                        <a:t>zスコアの下位10パーセンタイル値の、同じ分野（OpenAlex の26分野）・同じ年の一般論文（無作為に最大3,000件）の中での順位（0〜100）を100から引いた値。高いほど珍しい組み合わせ</a:t>
+                      </a:r>
+                      <a:endParaRPr lang="ja-JP" sz="1800" dirty="0">
+                        <a:latin typeface="Meiryo" charset="0"/>
+                        <a:ea typeface="Meiryo" charset="0"/>
+                        <a:cs typeface="Meiryo" charset="0"/>
+                      </a:endParaRPr>
+                    </a:p>
+                  </a:txBody>
+                  <a:tcPr marL="109728" marR="109728" marT="54864" marB="54864" anchor="ctr">
+                    <a:lnL w="0" cap="flat" cmpd="sng" algn="ctr">
+                      <a:noFill/>
+                    </a:lnL>
+                    <a:lnR w="0" cap="flat" cmpd="sng" algn="ctr">
+                      <a:noFill/>
+                    </a:lnR>
+                    <a:lnT w="12700" cap="flat" cmpd="sng" algn="ctr">
+                      <a:solidFill>
+                        <a:srgbClr val="404040"/>
+                      </a:solidFill>
+                      <a:prstDash val="solid"/>
+                      <a:round/>
+                      <a:headEnd type="none" w="med" len="med"/>
+                      <a:tailEnd type="none" w="med" len="med"/>
+                    </a:lnT>
+                    <a:lnB w="6350" cap="flat" cmpd="sng" algn="ctr">
+                      <a:solidFill>
+                        <a:srgbClr val="BFBFBF"/>
+                      </a:solidFill>
+                      <a:prstDash val="solid"/>
+                      <a:round/>
+                      <a:headEnd type="none" w="med" len="med"/>
+                      <a:tailEnd type="none" w="med" len="med"/>
+                    </a:lnB>
+                  </a:tcPr>
+                </a:tc>
+                <a:tc>
+                  <a:txBody>
+                    <a:bodyPr/>
+                    <a:lstStyle/>
+                    <a:p>
+                      <a:pPr marL="0" indent="0" algn="l">
+                        <a:buNone/>
+                      </a:pPr>
+                      <a:r>
+                        <a:rPr lang="ja-JP" altLang="en-US" sz="1800" dirty="0">
+                          <a:solidFill>
+                            <a:srgbClr val="262626"/>
+                          </a:solidFill>
+                          <a:latin typeface="Meiryo" pitchFamily="34" charset="0"/>
+                          <a:ea typeface="Meiryo" pitchFamily="34" charset="-122"/>
+                          <a:cs typeface="Meiryo" pitchFamily="34" charset="-120"/>
+                        </a:rPr>
+                        <a:t>SciSciNet</a:t>
+                      </a:r>
+                      <a:endParaRPr lang="ja-JP" sz="1800" dirty="0">
+                        <a:latin typeface="Meiryo" charset="0"/>
+                        <a:ea typeface="Meiryo" charset="0"/>
+                        <a:cs typeface="Meiryo" charset="0"/>
+                      </a:endParaRPr>
+                    </a:p>
+                  </a:txBody>
+                  <a:tcPr marL="109728" marR="109728" marT="54864" marB="54864" anchor="ctr">
+                    <a:lnL w="0" cap="flat" cmpd="sng" algn="ctr">
+                      <a:noFill/>
+                    </a:lnL>
+                    <a:lnR w="0" cap="flat" cmpd="sng" algn="ctr">
+                      <a:noFill/>
+                    </a:lnR>
+                    <a:lnT w="12700" cap="flat" cmpd="sng" algn="ctr">
+                      <a:solidFill>
+                        <a:srgbClr val="404040"/>
+                      </a:solidFill>
+                      <a:prstDash val="solid"/>
+                      <a:round/>
+                      <a:headEnd type="none" w="med" len="med"/>
+                      <a:tailEnd type="none" w="med" len="med"/>
+                    </a:lnT>
+                    <a:lnB w="6350" cap="flat" cmpd="sng" algn="ctr">
+                      <a:solidFill>
+                        <a:srgbClr val="BFBFBF"/>
+                      </a:solidFill>
+                      <a:prstDash val="solid"/>
+                      <a:round/>
+                      <a:headEnd type="none" w="med" len="med"/>
+                      <a:tailEnd type="none" w="med" len="med"/>
+                    </a:lnB>
+                  </a:tcPr>
+                </a:tc>
                 <a:extLst>
                   <a:ext uri="{0D108BD9-81ED-4DB2-BD59-A6C34878D82A}">
                     <a16:rowId xmlns:a16="http://schemas.microsoft.com/office/drawing/2014/main" val="10001"/>
                   </a:ext>
                 </a:extLst>
-                <a:tc>
-                  <a:txBody>
-                    <a:bodyPr/>
-                    <a:lstStyle/>
-                    <a:p>
-                      <a:pPr marL="0" indent="0" algn="l">
-                        <a:buNone/>
-                      </a:pPr>
-                      <a:r>
-                        <a:rPr lang="ja-JP" altLang="en-US" sz="1800" dirty="0">
-                          <a:solidFill>
-                            <a:srgbClr val="262626"/>
-                          </a:solidFill>
-                          <a:latin typeface="Meiryo" pitchFamily="34" charset="0"/>
-                          <a:ea typeface="Meiryo" pitchFamily="34" charset="-122"/>
-                          <a:cs typeface="Meiryo" pitchFamily="34" charset="-120"/>
-                        </a:rPr>
-                        <a:t>非慣習性の順位</a:t>
-                      </a:r>
-                      <a:endParaRPr lang="ja-JP" sz="1800" dirty="0">
-                        <a:latin typeface="Meiryo" charset="0"/>
-                        <a:ea typeface="Meiryo" charset="0"/>
-                        <a:cs typeface="Meiryo" charset="0"/>
-                      </a:endParaRPr>
-                    </a:p>
-                    <a:p>
-                      <a:pPr marL="0" indent="0" algn="l">
-                        <a:buNone/>
-                      </a:pPr>
-                      <a:r>
-                        <a:rPr lang="ja-JP" altLang="en-US" sz="1800" dirty="0">
-                          <a:solidFill>
-                            <a:srgbClr val="262626"/>
-                          </a:solidFill>
-                          <a:latin typeface="Meiryo" pitchFamily="34" charset="0"/>
-                          <a:ea typeface="Meiryo" pitchFamily="34" charset="-122"/>
-                          <a:cs typeface="Meiryo" pitchFamily="34" charset="-120"/>
-                        </a:rPr>
-                        <a:t>（調べる値）</a:t>
-                      </a:r>
-                      <a:endParaRPr lang="ja-JP" sz="1800" dirty="0">
-                        <a:latin typeface="Meiryo" charset="0"/>
-                        <a:ea typeface="Meiryo" charset="0"/>
-                        <a:cs typeface="Meiryo" charset="0"/>
-                      </a:endParaRPr>
-                    </a:p>
-                  </a:txBody>
-                  <a:tcPr marL="109728" marR="109728" marT="54864" marB="54864" anchor="ctr">
-                    <a:lnL w="0" cap="flat" cmpd="sng" algn="ctr">
-                      <a:noFill/>
-                    </a:lnL>
-                    <a:lnR w="0" cap="flat" cmpd="sng" algn="ctr">
-                      <a:noFill/>
-                    </a:lnR>
-                    <a:lnT w="12700" cap="flat" cmpd="sng" algn="ctr">
-                      <a:solidFill>
-                        <a:srgbClr val="404040"/>
-                      </a:solidFill>
-                      <a:prstDash val="solid"/>
-                      <a:round/>
-                      <a:headEnd type="none" w="med" len="med"/>
-                      <a:tailEnd type="none" w="med" len="med"/>
-                    </a:lnT>
-                    <a:lnB w="6350" cap="flat" cmpd="sng" algn="ctr">
-                      <a:solidFill>
-                        <a:srgbClr val="BFBFBF"/>
-                      </a:solidFill>
-                      <a:prstDash val="solid"/>
-                      <a:round/>
-                      <a:headEnd type="none" w="med" len="med"/>
-                      <a:tailEnd type="none" w="med" len="med"/>
-                    </a:lnB>
-                  </a:tcPr>
-                </a:tc>
-                <a:tc>
-                  <a:txBody>
-                    <a:bodyPr/>
-                    <a:lstStyle/>
-                    <a:p>
-                      <a:pPr marL="0" indent="0" algn="l">
-                        <a:buNone/>
-                      </a:pPr>
-                      <a:r>
-                        <a:rPr lang="ja-JP" altLang="en-US" sz="1800" dirty="0">
-                          <a:solidFill>
-                            <a:srgbClr val="262626"/>
-                          </a:solidFill>
-                          <a:latin typeface="Meiryo" pitchFamily="34" charset="0"/>
-                          <a:ea typeface="Meiryo" pitchFamily="34" charset="-122"/>
-                          <a:cs typeface="Meiryo" pitchFamily="34" charset="-120"/>
-                        </a:rPr>
-                        <a:t>zスコアの下位10パーセンタイル値の、同じ分野（OpenAlex の26分野）・同じ年の一般論文（無作為に最大3,000件）の中での順位（0〜100）を100から引いた値。高いほど珍しい組み合わせ</a:t>
-                      </a:r>
-                      <a:endParaRPr lang="ja-JP" sz="1800" dirty="0">
-                        <a:latin typeface="Meiryo" charset="0"/>
-                        <a:ea typeface="Meiryo" charset="0"/>
-                        <a:cs typeface="Meiryo" charset="0"/>
-                      </a:endParaRPr>
-                    </a:p>
-                  </a:txBody>
-                  <a:tcPr marL="109728" marR="109728" marT="54864" marB="54864" anchor="ctr">
-                    <a:lnL w="0" cap="flat" cmpd="sng" algn="ctr">
-                      <a:noFill/>
-                    </a:lnL>
-                    <a:lnR w="0" cap="flat" cmpd="sng" algn="ctr">
-                      <a:noFill/>
-                    </a:lnR>
-                    <a:lnT w="12700" cap="flat" cmpd="sng" algn="ctr">
-                      <a:solidFill>
-                        <a:srgbClr val="404040"/>
-                      </a:solidFill>
-                      <a:prstDash val="solid"/>
-                      <a:round/>
-                      <a:headEnd type="none" w="med" len="med"/>
-                      <a:tailEnd type="none" w="med" len="med"/>
-                    </a:lnT>
-                    <a:lnB w="6350" cap="flat" cmpd="sng" algn="ctr">
-                      <a:solidFill>
-                        <a:srgbClr val="BFBFBF"/>
-                      </a:solidFill>
-                      <a:prstDash val="solid"/>
-                      <a:round/>
-                      <a:headEnd type="none" w="med" len="med"/>
-                      <a:tailEnd type="none" w="med" len="med"/>
-                    </a:lnB>
-                  </a:tcPr>
-                </a:tc>
-                <a:tc>
-                  <a:txBody>
-                    <a:bodyPr/>
-                    <a:lstStyle/>
-                    <a:p>
-                      <a:pPr marL="0" indent="0" algn="l">
-                        <a:buNone/>
-                      </a:pPr>
-                      <a:r>
-                        <a:rPr lang="ja-JP" altLang="en-US" sz="1800" dirty="0">
-                          <a:solidFill>
-                            <a:srgbClr val="262626"/>
-                          </a:solidFill>
-                          <a:latin typeface="Meiryo" pitchFamily="34" charset="0"/>
-                          <a:ea typeface="Meiryo" pitchFamily="34" charset="-122"/>
-                          <a:cs typeface="Meiryo" pitchFamily="34" charset="-120"/>
-                        </a:rPr>
-                        <a:t>SciSciNet</a:t>
-                      </a:r>
-                      <a:endParaRPr lang="ja-JP" sz="1800" dirty="0">
-                        <a:latin typeface="Meiryo" charset="0"/>
-                        <a:ea typeface="Meiryo" charset="0"/>
-                        <a:cs typeface="Meiryo" charset="0"/>
-                      </a:endParaRPr>
-                    </a:p>
-                  </a:txBody>
-                  <a:tcPr marL="109728" marR="109728" marT="54864" marB="54864" anchor="ctr">
-                    <a:lnL w="0" cap="flat" cmpd="sng" algn="ctr">
-                      <a:noFill/>
-                    </a:lnL>
-                    <a:lnR w="0" cap="flat" cmpd="sng" algn="ctr">
-                      <a:noFill/>
-                    </a:lnR>
-                    <a:lnT w="12700" cap="flat" cmpd="sng" algn="ctr">
-                      <a:solidFill>
-                        <a:srgbClr val="404040"/>
-                      </a:solidFill>
-                      <a:prstDash val="solid"/>
-                      <a:round/>
-                      <a:headEnd type="none" w="med" len="med"/>
-                      <a:tailEnd type="none" w="med" len="med"/>
-                    </a:lnT>
-                    <a:lnB w="6350" cap="flat" cmpd="sng" algn="ctr">
-                      <a:solidFill>
-                        <a:srgbClr val="BFBFBF"/>
-                      </a:solidFill>
-                      <a:prstDash val="solid"/>
-                      <a:round/>
-                      <a:headEnd type="none" w="med" len="med"/>
-                      <a:tailEnd type="none" w="med" len="med"/>
-                    </a:lnB>
-                  </a:tcPr>
-                </a:tc>
               </a:tr>
               <a:tr h="475488">
+                <a:tc>
+                  <a:txBody>
+                    <a:bodyPr/>
+                    <a:lstStyle/>
+                    <a:p>
+                      <a:pPr marL="0" indent="0" algn="l">
+                        <a:buNone/>
+                      </a:pPr>
+                      <a:r>
+                        <a:rPr lang="ja-JP" altLang="en-US" sz="1800" dirty="0">
+                          <a:solidFill>
+                            <a:srgbClr val="262626"/>
+                          </a:solidFill>
+                          <a:latin typeface="Meiryo" pitchFamily="34" charset="0"/>
+                          <a:ea typeface="Meiryo" pitchFamily="34" charset="-122"/>
+                          <a:cs typeface="Meiryo" pitchFamily="34" charset="-120"/>
+                        </a:rPr>
+                        <a:t>著者数</a:t>
+                      </a:r>
+                      <a:endParaRPr lang="ja-JP" sz="1800" dirty="0">
+                        <a:latin typeface="Meiryo" charset="0"/>
+                        <a:ea typeface="Meiryo" charset="0"/>
+                        <a:cs typeface="Meiryo" charset="0"/>
+                      </a:endParaRPr>
+                    </a:p>
+                  </a:txBody>
+                  <a:tcPr marL="109728" marR="109728" marT="54864" marB="54864" anchor="ctr">
+                    <a:lnL w="0" cap="flat" cmpd="sng" algn="ctr">
+                      <a:noFill/>
+                    </a:lnL>
+                    <a:lnR w="0" cap="flat" cmpd="sng" algn="ctr">
+                      <a:noFill/>
+                    </a:lnR>
+                    <a:lnT w="6350" cap="flat" cmpd="sng" algn="ctr">
+                      <a:solidFill>
+                        <a:srgbClr val="BFBFBF"/>
+                      </a:solidFill>
+                      <a:prstDash val="solid"/>
+                      <a:round/>
+                      <a:headEnd type="none" w="med" len="med"/>
+                      <a:tailEnd type="none" w="med" len="med"/>
+                    </a:lnT>
+                    <a:lnB w="6350" cap="flat" cmpd="sng" algn="ctr">
+                      <a:solidFill>
+                        <a:srgbClr val="BFBFBF"/>
+                      </a:solidFill>
+                      <a:prstDash val="solid"/>
+                      <a:round/>
+                      <a:headEnd type="none" w="med" len="med"/>
+                      <a:tailEnd type="none" w="med" len="med"/>
+                    </a:lnB>
+                  </a:tcPr>
+                </a:tc>
+                <a:tc>
+                  <a:txBody>
+                    <a:bodyPr/>
+                    <a:lstStyle/>
+                    <a:p>
+                      <a:pPr marL="0" indent="0" algn="l">
+                        <a:buNone/>
+                      </a:pPr>
+                      <a:r>
+                        <a:rPr lang="ja-JP" altLang="en-US" sz="1800" dirty="0">
+                          <a:solidFill>
+                            <a:srgbClr val="262626"/>
+                          </a:solidFill>
+                          <a:latin typeface="Meiryo" pitchFamily="34" charset="0"/>
+                          <a:ea typeface="Meiryo" pitchFamily="34" charset="-122"/>
+                          <a:cs typeface="Meiryo" pitchFamily="34" charset="-120"/>
+                        </a:rPr>
+                        <a:t>論文の著者の人数</a:t>
+                      </a:r>
+                      <a:endParaRPr lang="ja-JP" sz="1800" dirty="0">
+                        <a:latin typeface="Meiryo" charset="0"/>
+                        <a:ea typeface="Meiryo" charset="0"/>
+                        <a:cs typeface="Meiryo" charset="0"/>
+                      </a:endParaRPr>
+                    </a:p>
+                  </a:txBody>
+                  <a:tcPr marL="109728" marR="109728" marT="54864" marB="54864" anchor="ctr">
+                    <a:lnL w="0" cap="flat" cmpd="sng" algn="ctr">
+                      <a:noFill/>
+                    </a:lnL>
+                    <a:lnR w="0" cap="flat" cmpd="sng" algn="ctr">
+                      <a:noFill/>
+                    </a:lnR>
+                    <a:lnT w="6350" cap="flat" cmpd="sng" algn="ctr">
+                      <a:solidFill>
+                        <a:srgbClr val="BFBFBF"/>
+                      </a:solidFill>
+                      <a:prstDash val="solid"/>
+                      <a:round/>
+                      <a:headEnd type="none" w="med" len="med"/>
+                      <a:tailEnd type="none" w="med" len="med"/>
+                    </a:lnT>
+                    <a:lnB w="6350" cap="flat" cmpd="sng" algn="ctr">
+                      <a:solidFill>
+                        <a:srgbClr val="BFBFBF"/>
+                      </a:solidFill>
+                      <a:prstDash val="solid"/>
+                      <a:round/>
+                      <a:headEnd type="none" w="med" len="med"/>
+                      <a:tailEnd type="none" w="med" len="med"/>
+                    </a:lnB>
+                  </a:tcPr>
+                </a:tc>
+                <a:tc>
+                  <a:txBody>
+                    <a:bodyPr/>
+                    <a:lstStyle/>
+                    <a:p>
+                      <a:pPr marL="0" indent="0" algn="l">
+                        <a:buNone/>
+                      </a:pPr>
+                      <a:r>
+                        <a:rPr lang="ja-JP" altLang="en-US" sz="1800" dirty="0">
+                          <a:solidFill>
+                            <a:srgbClr val="262626"/>
+                          </a:solidFill>
+                          <a:latin typeface="Meiryo" pitchFamily="34" charset="0"/>
+                          <a:ea typeface="Meiryo" pitchFamily="34" charset="-122"/>
+                          <a:cs typeface="Meiryo" pitchFamily="34" charset="-120"/>
+                        </a:rPr>
+                        <a:t>SciSciNet</a:t>
+                      </a:r>
+                      <a:endParaRPr lang="ja-JP" sz="1800" dirty="0">
+                        <a:latin typeface="Meiryo" charset="0"/>
+                        <a:ea typeface="Meiryo" charset="0"/>
+                        <a:cs typeface="Meiryo" charset="0"/>
+                      </a:endParaRPr>
+                    </a:p>
+                  </a:txBody>
+                  <a:tcPr marL="109728" marR="109728" marT="54864" marB="54864" anchor="ctr">
+                    <a:lnL w="0" cap="flat" cmpd="sng" algn="ctr">
+                      <a:noFill/>
+                    </a:lnL>
+                    <a:lnR w="0" cap="flat" cmpd="sng" algn="ctr">
+                      <a:noFill/>
+                    </a:lnR>
+                    <a:lnT w="6350" cap="flat" cmpd="sng" algn="ctr">
+                      <a:solidFill>
+                        <a:srgbClr val="BFBFBF"/>
+                      </a:solidFill>
+                      <a:prstDash val="solid"/>
+                      <a:round/>
+                      <a:headEnd type="none" w="med" len="med"/>
+                      <a:tailEnd type="none" w="med" len="med"/>
+                    </a:lnT>
+                    <a:lnB w="6350" cap="flat" cmpd="sng" algn="ctr">
+                      <a:solidFill>
+                        <a:srgbClr val="BFBFBF"/>
+                      </a:solidFill>
+                      <a:prstDash val="solid"/>
+                      <a:round/>
+                      <a:headEnd type="none" w="med" len="med"/>
+                      <a:tailEnd type="none" w="med" len="med"/>
+                    </a:lnB>
+                  </a:tcPr>
+                </a:tc>
                 <a:extLst>
                   <a:ext uri="{0D108BD9-81ED-4DB2-BD59-A6C34878D82A}">
                     <a16:rowId xmlns:a16="http://schemas.microsoft.com/office/drawing/2014/main" val="10002"/>
                   </a:ext>
                 </a:extLst>
-                <a:tc>
-                  <a:txBody>
-                    <a:bodyPr/>
-                    <a:lstStyle/>
-                    <a:p>
-                      <a:pPr marL="0" indent="0" algn="l">
-                        <a:buNone/>
-                      </a:pPr>
-                      <a:r>
-                        <a:rPr lang="ja-JP" altLang="en-US" sz="1800" dirty="0">
-                          <a:solidFill>
-                            <a:srgbClr val="262626"/>
-                          </a:solidFill>
-                          <a:latin typeface="Meiryo" pitchFamily="34" charset="0"/>
-                          <a:ea typeface="Meiryo" pitchFamily="34" charset="-122"/>
-                          <a:cs typeface="Meiryo" pitchFamily="34" charset="-120"/>
-                        </a:rPr>
-                        <a:t>著者数</a:t>
-                      </a:r>
-                      <a:endParaRPr lang="ja-JP" sz="1800" dirty="0">
-                        <a:latin typeface="Meiryo" charset="0"/>
-                        <a:ea typeface="Meiryo" charset="0"/>
-                        <a:cs typeface="Meiryo" charset="0"/>
-                      </a:endParaRPr>
-                    </a:p>
-                  </a:txBody>
-                  <a:tcPr marL="109728" marR="109728" marT="54864" marB="54864" anchor="ctr">
-                    <a:lnL w="0" cap="flat" cmpd="sng" algn="ctr">
-                      <a:noFill/>
-                    </a:lnL>
-                    <a:lnR w="0" cap="flat" cmpd="sng" algn="ctr">
-                      <a:noFill/>
-                    </a:lnR>
-                    <a:lnT w="6350" cap="flat" cmpd="sng" algn="ctr">
-                      <a:solidFill>
-                        <a:srgbClr val="BFBFBF"/>
-                      </a:solidFill>
-                      <a:prstDash val="solid"/>
-                      <a:round/>
-                      <a:headEnd type="none" w="med" len="med"/>
-                      <a:tailEnd type="none" w="med" len="med"/>
-                    </a:lnT>
-                    <a:lnB w="6350" cap="flat" cmpd="sng" algn="ctr">
-                      <a:solidFill>
-                        <a:srgbClr val="BFBFBF"/>
-                      </a:solidFill>
-                      <a:prstDash val="solid"/>
-                      <a:round/>
-                      <a:headEnd type="none" w="med" len="med"/>
-                      <a:tailEnd type="none" w="med" len="med"/>
-                    </a:lnB>
-                  </a:tcPr>
-                </a:tc>
-                <a:tc>
-                  <a:txBody>
-                    <a:bodyPr/>
-                    <a:lstStyle/>
-                    <a:p>
-                      <a:pPr marL="0" indent="0" algn="l">
-                        <a:buNone/>
-                      </a:pPr>
-                      <a:r>
-                        <a:rPr lang="ja-JP" altLang="en-US" sz="1800" dirty="0">
-                          <a:solidFill>
-                            <a:srgbClr val="262626"/>
-                          </a:solidFill>
-                          <a:latin typeface="Meiryo" pitchFamily="34" charset="0"/>
-                          <a:ea typeface="Meiryo" pitchFamily="34" charset="-122"/>
-                          <a:cs typeface="Meiryo" pitchFamily="34" charset="-120"/>
-                        </a:rPr>
-                        <a:t>論文の著者の人数</a:t>
-                      </a:r>
-                      <a:endParaRPr lang="ja-JP" sz="1800" dirty="0">
-                        <a:latin typeface="Meiryo" charset="0"/>
-                        <a:ea typeface="Meiryo" charset="0"/>
-                        <a:cs typeface="Meiryo" charset="0"/>
-                      </a:endParaRPr>
-                    </a:p>
-                  </a:txBody>
-                  <a:tcPr marL="109728" marR="109728" marT="54864" marB="54864" anchor="ctr">
-                    <a:lnL w="0" cap="flat" cmpd="sng" algn="ctr">
-                      <a:noFill/>
-                    </a:lnL>
-                    <a:lnR w="0" cap="flat" cmpd="sng" algn="ctr">
-                      <a:noFill/>
-                    </a:lnR>
-                    <a:lnT w="6350" cap="flat" cmpd="sng" algn="ctr">
-                      <a:solidFill>
-                        <a:srgbClr val="BFBFBF"/>
-                      </a:solidFill>
-                      <a:prstDash val="solid"/>
-                      <a:round/>
-                      <a:headEnd type="none" w="med" len="med"/>
-                      <a:tailEnd type="none" w="med" len="med"/>
-                    </a:lnT>
-                    <a:lnB w="6350" cap="flat" cmpd="sng" algn="ctr">
-                      <a:solidFill>
-                        <a:srgbClr val="BFBFBF"/>
-                      </a:solidFill>
-                      <a:prstDash val="solid"/>
-                      <a:round/>
-                      <a:headEnd type="none" w="med" len="med"/>
-                      <a:tailEnd type="none" w="med" len="med"/>
-                    </a:lnB>
-                  </a:tcPr>
-                </a:tc>
-                <a:tc>
-                  <a:txBody>
-                    <a:bodyPr/>
-                    <a:lstStyle/>
-                    <a:p>
-                      <a:pPr marL="0" indent="0" algn="l">
-                        <a:buNone/>
-                      </a:pPr>
-                      <a:r>
-                        <a:rPr lang="ja-JP" altLang="en-US" sz="1800" dirty="0">
-                          <a:solidFill>
-                            <a:srgbClr val="262626"/>
-                          </a:solidFill>
-                          <a:latin typeface="Meiryo" pitchFamily="34" charset="0"/>
-                          <a:ea typeface="Meiryo" pitchFamily="34" charset="-122"/>
-                          <a:cs typeface="Meiryo" pitchFamily="34" charset="-120"/>
-                        </a:rPr>
-                        <a:t>SciSciNet</a:t>
-                      </a:r>
-                      <a:endParaRPr lang="ja-JP" sz="1800" dirty="0">
-                        <a:latin typeface="Meiryo" charset="0"/>
-                        <a:ea typeface="Meiryo" charset="0"/>
-                        <a:cs typeface="Meiryo" charset="0"/>
-                      </a:endParaRPr>
-                    </a:p>
-                  </a:txBody>
-                  <a:tcPr marL="109728" marR="109728" marT="54864" marB="54864" anchor="ctr">
-                    <a:lnL w="0" cap="flat" cmpd="sng" algn="ctr">
-                      <a:noFill/>
-                    </a:lnL>
-                    <a:lnR w="0" cap="flat" cmpd="sng" algn="ctr">
-                      <a:noFill/>
-                    </a:lnR>
-                    <a:lnT w="6350" cap="flat" cmpd="sng" algn="ctr">
-                      <a:solidFill>
-                        <a:srgbClr val="BFBFBF"/>
-                      </a:solidFill>
-                      <a:prstDash val="solid"/>
-                      <a:round/>
-                      <a:headEnd type="none" w="med" len="med"/>
-                      <a:tailEnd type="none" w="med" len="med"/>
-                    </a:lnT>
-                    <a:lnB w="6350" cap="flat" cmpd="sng" algn="ctr">
-                      <a:solidFill>
-                        <a:srgbClr val="BFBFBF"/>
-                      </a:solidFill>
-                      <a:prstDash val="solid"/>
-                      <a:round/>
-                      <a:headEnd type="none" w="med" len="med"/>
-                      <a:tailEnd type="none" w="med" len="med"/>
-                    </a:lnB>
-                  </a:tcPr>
-                </a:tc>
               </a:tr>
               <a:tr h="475488">
+                <a:tc>
+                  <a:txBody>
+                    <a:bodyPr/>
+                    <a:lstStyle/>
+                    <a:p>
+                      <a:pPr marL="0" indent="0" algn="l">
+                        <a:buNone/>
+                      </a:pPr>
+                      <a:r>
+                        <a:rPr lang="ja-JP" altLang="en-US" sz="1800" dirty="0">
+                          <a:solidFill>
+                            <a:srgbClr val="262626"/>
+                          </a:solidFill>
+                          <a:latin typeface="Meiryo" pitchFamily="34" charset="0"/>
+                          <a:ea typeface="Meiryo" pitchFamily="34" charset="-122"/>
+                          <a:cs typeface="Meiryo" pitchFamily="34" charset="-120"/>
+                        </a:rPr>
+                        <a:t>参考文献数</a:t>
+                      </a:r>
+                      <a:endParaRPr lang="ja-JP" sz="1800" dirty="0">
+                        <a:latin typeface="Meiryo" charset="0"/>
+                        <a:ea typeface="Meiryo" charset="0"/>
+                        <a:cs typeface="Meiryo" charset="0"/>
+                      </a:endParaRPr>
+                    </a:p>
+                  </a:txBody>
+                  <a:tcPr marL="109728" marR="109728" marT="54864" marB="54864" anchor="ctr">
+                    <a:lnL w="0" cap="flat" cmpd="sng" algn="ctr">
+                      <a:noFill/>
+                    </a:lnL>
+                    <a:lnR w="0" cap="flat" cmpd="sng" algn="ctr">
+                      <a:noFill/>
+                    </a:lnR>
+                    <a:lnT w="6350" cap="flat" cmpd="sng" algn="ctr">
+                      <a:solidFill>
+                        <a:srgbClr val="BFBFBF"/>
+                      </a:solidFill>
+                      <a:prstDash val="solid"/>
+                      <a:round/>
+                      <a:headEnd type="none" w="med" len="med"/>
+                      <a:tailEnd type="none" w="med" len="med"/>
+                    </a:lnT>
+                    <a:lnB w="6350" cap="flat" cmpd="sng" algn="ctr">
+                      <a:solidFill>
+                        <a:srgbClr val="BFBFBF"/>
+                      </a:solidFill>
+                      <a:prstDash val="solid"/>
+                      <a:round/>
+                      <a:headEnd type="none" w="med" len="med"/>
+                      <a:tailEnd type="none" w="med" len="med"/>
+                    </a:lnB>
+                  </a:tcPr>
+                </a:tc>
+                <a:tc>
+                  <a:txBody>
+                    <a:bodyPr/>
+                    <a:lstStyle/>
+                    <a:p>
+                      <a:pPr marL="0" indent="0" algn="l">
+                        <a:buNone/>
+                      </a:pPr>
+                      <a:r>
+                        <a:rPr lang="ja-JP" altLang="en-US" sz="1800" dirty="0">
+                          <a:solidFill>
+                            <a:srgbClr val="262626"/>
+                          </a:solidFill>
+                          <a:latin typeface="Meiryo" pitchFamily="34" charset="0"/>
+                          <a:ea typeface="Meiryo" pitchFamily="34" charset="-122"/>
+                          <a:cs typeface="Meiryo" pitchFamily="34" charset="-120"/>
+                        </a:rPr>
+                        <a:t>参考文献の本数</a:t>
+                      </a:r>
+                      <a:endParaRPr lang="ja-JP" sz="1800" dirty="0">
+                        <a:latin typeface="Meiryo" charset="0"/>
+                        <a:ea typeface="Meiryo" charset="0"/>
+                        <a:cs typeface="Meiryo" charset="0"/>
+                      </a:endParaRPr>
+                    </a:p>
+                  </a:txBody>
+                  <a:tcPr marL="109728" marR="109728" marT="54864" marB="54864" anchor="ctr">
+                    <a:lnL w="0" cap="flat" cmpd="sng" algn="ctr">
+                      <a:noFill/>
+                    </a:lnL>
+                    <a:lnR w="0" cap="flat" cmpd="sng" algn="ctr">
+                      <a:noFill/>
+                    </a:lnR>
+                    <a:lnT w="6350" cap="flat" cmpd="sng" algn="ctr">
+                      <a:solidFill>
+                        <a:srgbClr val="BFBFBF"/>
+                      </a:solidFill>
+                      <a:prstDash val="solid"/>
+                      <a:round/>
+                      <a:headEnd type="none" w="med" len="med"/>
+                      <a:tailEnd type="none" w="med" len="med"/>
+                    </a:lnT>
+                    <a:lnB w="6350" cap="flat" cmpd="sng" algn="ctr">
+                      <a:solidFill>
+                        <a:srgbClr val="BFBFBF"/>
+                      </a:solidFill>
+                      <a:prstDash val="solid"/>
+                      <a:round/>
+                      <a:headEnd type="none" w="med" len="med"/>
+                      <a:tailEnd type="none" w="med" len="med"/>
+                    </a:lnB>
+                  </a:tcPr>
+                </a:tc>
+                <a:tc>
+                  <a:txBody>
+                    <a:bodyPr/>
+                    <a:lstStyle/>
+                    <a:p>
+                      <a:pPr marL="0" indent="0" algn="l">
+                        <a:buNone/>
+                      </a:pPr>
+                      <a:r>
+                        <a:rPr lang="ja-JP" altLang="en-US" sz="1800" dirty="0">
+                          <a:solidFill>
+                            <a:srgbClr val="262626"/>
+                          </a:solidFill>
+                          <a:latin typeface="Meiryo" pitchFamily="34" charset="0"/>
+                          <a:ea typeface="Meiryo" pitchFamily="34" charset="-122"/>
+                          <a:cs typeface="Meiryo" pitchFamily="34" charset="-120"/>
+                        </a:rPr>
+                        <a:t>OpenAlex</a:t>
+                      </a:r>
+                      <a:endParaRPr lang="ja-JP" sz="1800" dirty="0">
+                        <a:latin typeface="Meiryo" charset="0"/>
+                        <a:ea typeface="Meiryo" charset="0"/>
+                        <a:cs typeface="Meiryo" charset="0"/>
+                      </a:endParaRPr>
+                    </a:p>
+                  </a:txBody>
+                  <a:tcPr marL="109728" marR="109728" marT="54864" marB="54864" anchor="ctr">
+                    <a:lnL w="0" cap="flat" cmpd="sng" algn="ctr">
+                      <a:noFill/>
+                    </a:lnL>
+                    <a:lnR w="0" cap="flat" cmpd="sng" algn="ctr">
+                      <a:noFill/>
+                    </a:lnR>
+                    <a:lnT w="6350" cap="flat" cmpd="sng" algn="ctr">
+                      <a:solidFill>
+                        <a:srgbClr val="BFBFBF"/>
+                      </a:solidFill>
+                      <a:prstDash val="solid"/>
+                      <a:round/>
+                      <a:headEnd type="none" w="med" len="med"/>
+                      <a:tailEnd type="none" w="med" len="med"/>
+                    </a:lnT>
+                    <a:lnB w="6350" cap="flat" cmpd="sng" algn="ctr">
+                      <a:solidFill>
+                        <a:srgbClr val="BFBFBF"/>
+                      </a:solidFill>
+                      <a:prstDash val="solid"/>
+                      <a:round/>
+                      <a:headEnd type="none" w="med" len="med"/>
+                      <a:tailEnd type="none" w="med" len="med"/>
+                    </a:lnB>
+                  </a:tcPr>
+                </a:tc>
                 <a:extLst>
                   <a:ext uri="{0D108BD9-81ED-4DB2-BD59-A6C34878D82A}">
-                    <a16:rowId xmlns:a16="http://schemas.microsoft.com/office/drawing/2014/main" val="10002"/>
+                    <a16:rowId xmlns:a16="http://schemas.microsoft.com/office/drawing/2014/main" val="10003"/>
                   </a:ext>
                 </a:extLst>
-                <a:tc>
-                  <a:txBody>
-                    <a:bodyPr/>
-                    <a:lstStyle/>
-                    <a:p>
-                      <a:pPr marL="0" indent="0" algn="l">
-                        <a:buNone/>
-                      </a:pPr>
-                      <a:r>
-                        <a:rPr lang="ja-JP" altLang="en-US" sz="1800" dirty="0">
-                          <a:solidFill>
-                            <a:srgbClr val="262626"/>
-                          </a:solidFill>
-                          <a:latin typeface="Meiryo" pitchFamily="34" charset="0"/>
-                          <a:ea typeface="Meiryo" pitchFamily="34" charset="-122"/>
-                          <a:cs typeface="Meiryo" pitchFamily="34" charset="-120"/>
-                        </a:rPr>
-                        <a:t>参考文献数</a:t>
-                      </a:r>
-                      <a:endParaRPr lang="ja-JP" sz="1800" dirty="0">
-                        <a:latin typeface="Meiryo" charset="0"/>
-                        <a:ea typeface="Meiryo" charset="0"/>
-                        <a:cs typeface="Meiryo" charset="0"/>
-                      </a:endParaRPr>
-                    </a:p>
-                  </a:txBody>
-                  <a:tcPr marL="109728" marR="109728" marT="54864" marB="54864" anchor="ctr">
-                    <a:lnL w="0" cap="flat" cmpd="sng" algn="ctr">
-                      <a:noFill/>
-                    </a:lnL>
-                    <a:lnR w="0" cap="flat" cmpd="sng" algn="ctr">
-                      <a:noFill/>
-                    </a:lnR>
-                    <a:lnT w="6350" cap="flat" cmpd="sng" algn="ctr">
-                      <a:solidFill>
-                        <a:srgbClr val="BFBFBF"/>
-                      </a:solidFill>
-                      <a:prstDash val="solid"/>
-                      <a:round/>
-                      <a:headEnd type="none" w="med" len="med"/>
-                      <a:tailEnd type="none" w="med" len="med"/>
-                    </a:lnT>
-                    <a:lnB w="6350" cap="flat" cmpd="sng" algn="ctr">
-                      <a:solidFill>
-                        <a:srgbClr val="BFBFBF"/>
-                      </a:solidFill>
-                      <a:prstDash val="solid"/>
-                      <a:round/>
-                      <a:headEnd type="none" w="med" len="med"/>
-                      <a:tailEnd type="none" w="med" len="med"/>
-                    </a:lnB>
-                  </a:tcPr>
-                </a:tc>
-                <a:tc>
-                  <a:txBody>
-                    <a:bodyPr/>
-                    <a:lstStyle/>
-                    <a:p>
-                      <a:pPr marL="0" indent="0" algn="l">
-                        <a:buNone/>
-                      </a:pPr>
-                      <a:r>
-                        <a:rPr lang="ja-JP" altLang="en-US" sz="1800" dirty="0">
-                          <a:solidFill>
-                            <a:srgbClr val="262626"/>
-                          </a:solidFill>
-                          <a:latin typeface="Meiryo" pitchFamily="34" charset="0"/>
-                          <a:ea typeface="Meiryo" pitchFamily="34" charset="-122"/>
-                          <a:cs typeface="Meiryo" pitchFamily="34" charset="-120"/>
-                        </a:rPr>
-                        <a:t>参考文献の本数</a:t>
-                      </a:r>
-                      <a:endParaRPr lang="ja-JP" sz="1800" dirty="0">
-                        <a:latin typeface="Meiryo" charset="0"/>
-                        <a:ea typeface="Meiryo" charset="0"/>
-                        <a:cs typeface="Meiryo" charset="0"/>
-                      </a:endParaRPr>
-                    </a:p>
-                  </a:txBody>
-                  <a:tcPr marL="109728" marR="109728" marT="54864" marB="54864" anchor="ctr">
-                    <a:lnL w="0" cap="flat" cmpd="sng" algn="ctr">
-                      <a:noFill/>
-                    </a:lnL>
-                    <a:lnR w="0" cap="flat" cmpd="sng" algn="ctr">
-                      <a:noFill/>
-                    </a:lnR>
-                    <a:lnT w="6350" cap="flat" cmpd="sng" algn="ctr">
-                      <a:solidFill>
-                        <a:srgbClr val="BFBFBF"/>
-                      </a:solidFill>
-                      <a:prstDash val="solid"/>
-                      <a:round/>
-                      <a:headEnd type="none" w="med" len="med"/>
-                      <a:tailEnd type="none" w="med" len="med"/>
-                    </a:lnT>
-                    <a:lnB w="6350" cap="flat" cmpd="sng" algn="ctr">
-                      <a:solidFill>
-                        <a:srgbClr val="BFBFBF"/>
-                      </a:solidFill>
-                      <a:prstDash val="solid"/>
-                      <a:round/>
-                      <a:headEnd type="none" w="med" len="med"/>
-                      <a:tailEnd type="none" w="med" len="med"/>
-                    </a:lnB>
-                  </a:tcPr>
-                </a:tc>
-                <a:tc>
-                  <a:txBody>
-                    <a:bodyPr/>
-                    <a:lstStyle/>
-                    <a:p>
-                      <a:pPr marL="0" indent="0" algn="l">
-                        <a:buNone/>
-                      </a:pPr>
-                      <a:r>
-                        <a:rPr lang="ja-JP" altLang="en-US" sz="1800" dirty="0">
-                          <a:solidFill>
-                            <a:srgbClr val="262626"/>
-                          </a:solidFill>
-                          <a:latin typeface="Meiryo" pitchFamily="34" charset="0"/>
-                          <a:ea typeface="Meiryo" pitchFamily="34" charset="-122"/>
-                          <a:cs typeface="Meiryo" pitchFamily="34" charset="-120"/>
-                        </a:rPr>
-                        <a:t>OpenAlex</a:t>
-                      </a:r>
-                      <a:endParaRPr lang="ja-JP" sz="1800" dirty="0">
-                        <a:latin typeface="Meiryo" charset="0"/>
-                        <a:ea typeface="Meiryo" charset="0"/>
-                        <a:cs typeface="Meiryo" charset="0"/>
-                      </a:endParaRPr>
-                    </a:p>
-                  </a:txBody>
-                  <a:tcPr marL="109728" marR="109728" marT="54864" marB="54864" anchor="ctr">
-                    <a:lnL w="0" cap="flat" cmpd="sng" algn="ctr">
-                      <a:noFill/>
-                    </a:lnL>
-                    <a:lnR w="0" cap="flat" cmpd="sng" algn="ctr">
-                      <a:noFill/>
-                    </a:lnR>
-                    <a:lnT w="6350" cap="flat" cmpd="sng" algn="ctr">
-                      <a:solidFill>
-                        <a:srgbClr val="BFBFBF"/>
-                      </a:solidFill>
-                      <a:prstDash val="solid"/>
-                      <a:round/>
-                      <a:headEnd type="none" w="med" len="med"/>
-                      <a:tailEnd type="none" w="med" len="med"/>
-                    </a:lnT>
-                    <a:lnB w="6350" cap="flat" cmpd="sng" algn="ctr">
-                      <a:solidFill>
-                        <a:srgbClr val="BFBFBF"/>
-                      </a:solidFill>
-                      <a:prstDash val="solid"/>
-                      <a:round/>
-                      <a:headEnd type="none" w="med" len="med"/>
-                      <a:tailEnd type="none" w="med" len="med"/>
-                    </a:lnB>
-                  </a:tcPr>
-                </a:tc>
               </a:tr>
               <a:tr h="475488">
-                <a:extLst>
-                  <a:ext uri="{0D108BD9-81ED-4DB2-BD59-A6C34878D82A}">
-                    <a16:rowId xmlns:a16="http://schemas.microsoft.com/office/drawing/2014/main" val="10002"/>
-                  </a:ext>
-                </a:extLst>
                 <a:tc>
                   <a:txBody>
                     <a:bodyPr/>
@@ -7299,345 +7312,13 @@
                     </a:lnB>
                   </a:tcPr>
                 </a:tc>
-              </a:tr>
-              <a:tr h="475488">
-                <a:extLst>
-                  <a:ext uri="{0D108BD9-81ED-4DB2-BD59-A6C34878D82A}">
-                    <a16:rowId xmlns:a16="http://schemas.microsoft.com/office/drawing/2014/main" val="10002"/>
-                  </a:ext>
-                </a:extLst>
-                <a:tc>
-                  <a:txBody>
-                    <a:bodyPr/>
-                    <a:lstStyle/>
-                    <a:p>
-                      <a:pPr marL="0" indent="0" algn="l">
-                        <a:buNone/>
-                      </a:pPr>
-                      <a:r>
-                        <a:rPr lang="ja-JP" altLang="en-US" sz="1800" dirty="0">
-                          <a:solidFill>
-                            <a:srgbClr val="262626"/>
-                          </a:solidFill>
-                          <a:latin typeface="Meiryo" pitchFamily="34" charset="0"/>
-                          <a:ea typeface="Meiryo" pitchFamily="34" charset="-122"/>
-                          <a:cs typeface="Meiryo" pitchFamily="34" charset="-120"/>
-                        </a:rPr>
-                        <a:t>国際共同</a:t>
-                      </a:r>
-                      <a:endParaRPr lang="ja-JP" sz="1800" dirty="0">
-                        <a:latin typeface="Meiryo" charset="0"/>
-                        <a:ea typeface="Meiryo" charset="0"/>
-                        <a:cs typeface="Meiryo" charset="0"/>
-                      </a:endParaRPr>
-                    </a:p>
-                  </a:txBody>
-                  <a:tcPr marL="109728" marR="109728" marT="54864" marB="54864" anchor="ctr">
-                    <a:lnL w="0" cap="flat" cmpd="sng" algn="ctr">
-                      <a:noFill/>
-                    </a:lnL>
-                    <a:lnR w="0" cap="flat" cmpd="sng" algn="ctr">
-                      <a:noFill/>
-                    </a:lnR>
-                    <a:lnT w="6350" cap="flat" cmpd="sng" algn="ctr">
-                      <a:solidFill>
-                        <a:srgbClr val="BFBFBF"/>
-                      </a:solidFill>
-                      <a:prstDash val="solid"/>
-                      <a:round/>
-                      <a:headEnd type="none" w="med" len="med"/>
-                      <a:tailEnd type="none" w="med" len="med"/>
-                    </a:lnT>
-                    <a:lnB w="6350" cap="flat" cmpd="sng" algn="ctr">
-                      <a:solidFill>
-                        <a:srgbClr val="BFBFBF"/>
-                      </a:solidFill>
-                      <a:prstDash val="solid"/>
-                      <a:round/>
-                      <a:headEnd type="none" w="med" len="med"/>
-                      <a:tailEnd type="none" w="med" len="med"/>
-                    </a:lnB>
-                  </a:tcPr>
-                </a:tc>
-                <a:tc>
-                  <a:txBody>
-                    <a:bodyPr/>
-                    <a:lstStyle/>
-                    <a:p>
-                      <a:pPr marL="0" indent="0" algn="l">
-                        <a:buNone/>
-                      </a:pPr>
-                      <a:r>
-                        <a:rPr lang="ja-JP" altLang="en-US" sz="1800" dirty="0">
-                          <a:solidFill>
-                            <a:srgbClr val="262626"/>
-                          </a:solidFill>
-                          <a:latin typeface="Meiryo" pitchFamily="34" charset="0"/>
-                          <a:ea typeface="Meiryo" pitchFamily="34" charset="-122"/>
-                          <a:cs typeface="Meiryo" pitchFamily="34" charset="-120"/>
-                        </a:rPr>
-                        <a:t>著者の所属機関の国が2か国以上</a:t>
-                      </a:r>
-                      <a:endParaRPr lang="ja-JP" sz="1800" dirty="0">
-                        <a:latin typeface="Meiryo" charset="0"/>
-                        <a:ea typeface="Meiryo" charset="0"/>
-                        <a:cs typeface="Meiryo" charset="0"/>
-                      </a:endParaRPr>
-                    </a:p>
-                  </a:txBody>
-                  <a:tcPr marL="109728" marR="109728" marT="54864" marB="54864" anchor="ctr">
-                    <a:lnL w="0" cap="flat" cmpd="sng" algn="ctr">
-                      <a:noFill/>
-                    </a:lnL>
-                    <a:lnR w="0" cap="flat" cmpd="sng" algn="ctr">
-                      <a:noFill/>
-                    </a:lnR>
-                    <a:lnT w="6350" cap="flat" cmpd="sng" algn="ctr">
-                      <a:solidFill>
-                        <a:srgbClr val="BFBFBF"/>
-                      </a:solidFill>
-                      <a:prstDash val="solid"/>
-                      <a:round/>
-                      <a:headEnd type="none" w="med" len="med"/>
-                      <a:tailEnd type="none" w="med" len="med"/>
-                    </a:lnT>
-                    <a:lnB w="6350" cap="flat" cmpd="sng" algn="ctr">
-                      <a:solidFill>
-                        <a:srgbClr val="BFBFBF"/>
-                      </a:solidFill>
-                      <a:prstDash val="solid"/>
-                      <a:round/>
-                      <a:headEnd type="none" w="med" len="med"/>
-                      <a:tailEnd type="none" w="med" len="med"/>
-                    </a:lnB>
-                  </a:tcPr>
-                </a:tc>
-                <a:tc>
-                  <a:txBody>
-                    <a:bodyPr/>
-                    <a:lstStyle/>
-                    <a:p>
-                      <a:pPr marL="0" indent="0" algn="l">
-                        <a:buNone/>
-                      </a:pPr>
-                      <a:r>
-                        <a:rPr lang="ja-JP" altLang="en-US" sz="1800" dirty="0">
-                          <a:solidFill>
-                            <a:srgbClr val="262626"/>
-                          </a:solidFill>
-                          <a:latin typeface="Meiryo" pitchFamily="34" charset="0"/>
-                          <a:ea typeface="Meiryo" pitchFamily="34" charset="-122"/>
-                          <a:cs typeface="Meiryo" pitchFamily="34" charset="-120"/>
-                        </a:rPr>
-                        <a:t>OpenAlex</a:t>
-                      </a:r>
-                      <a:endParaRPr lang="ja-JP" sz="1800" dirty="0">
-                        <a:latin typeface="Meiryo" charset="0"/>
-                        <a:ea typeface="Meiryo" charset="0"/>
-                        <a:cs typeface="Meiryo" charset="0"/>
-                      </a:endParaRPr>
-                    </a:p>
-                  </a:txBody>
-                  <a:tcPr marL="109728" marR="109728" marT="54864" marB="54864" anchor="ctr">
-                    <a:lnL w="0" cap="flat" cmpd="sng" algn="ctr">
-                      <a:noFill/>
-                    </a:lnL>
-                    <a:lnR w="0" cap="flat" cmpd="sng" algn="ctr">
-                      <a:noFill/>
-                    </a:lnR>
-                    <a:lnT w="6350" cap="flat" cmpd="sng" algn="ctr">
-                      <a:solidFill>
-                        <a:srgbClr val="BFBFBF"/>
-                      </a:solidFill>
-                      <a:prstDash val="solid"/>
-                      <a:round/>
-                      <a:headEnd type="none" w="med" len="med"/>
-                      <a:tailEnd type="none" w="med" len="med"/>
-                    </a:lnT>
-                    <a:lnB w="6350" cap="flat" cmpd="sng" algn="ctr">
-                      <a:solidFill>
-                        <a:srgbClr val="BFBFBF"/>
-                      </a:solidFill>
-                      <a:prstDash val="solid"/>
-                      <a:round/>
-                      <a:headEnd type="none" w="med" len="med"/>
-                      <a:tailEnd type="none" w="med" len="med"/>
-                    </a:lnB>
-                  </a:tcPr>
-                </a:tc>
-              </a:tr>
-              <a:tr h="475488">
-                <a:extLst>
-                  <a:ext uri="{0D108BD9-81ED-4DB2-BD59-A6C34878D82A}">
-                    <a16:rowId xmlns:a16="http://schemas.microsoft.com/office/drawing/2014/main" val="10002"/>
-                  </a:ext>
-                </a:extLst>
-                <a:tc>
-                  <a:txBody>
-                    <a:bodyPr/>
-                    <a:lstStyle/>
-                    <a:p>
-                      <a:pPr marL="0" indent="0" algn="l">
-                        <a:buNone/>
-                      </a:pPr>
-                      <a:r>
-                        <a:rPr lang="ja-JP" altLang="en-US" sz="1800" dirty="0">
-                          <a:solidFill>
-                            <a:srgbClr val="262626"/>
-                          </a:solidFill>
-                          <a:latin typeface="Meiryo" pitchFamily="34" charset="0"/>
-                          <a:ea typeface="Meiryo" pitchFamily="34" charset="-122"/>
-                          <a:cs typeface="Meiryo" pitchFamily="34" charset="-120"/>
-                        </a:rPr>
-                        <a:t>産学連携</a:t>
-                      </a:r>
-                      <a:endParaRPr lang="ja-JP" sz="1800" dirty="0">
-                        <a:latin typeface="Meiryo" charset="0"/>
-                        <a:ea typeface="Meiryo" charset="0"/>
-                        <a:cs typeface="Meiryo" charset="0"/>
-                      </a:endParaRPr>
-                    </a:p>
-                  </a:txBody>
-                  <a:tcPr marL="109728" marR="109728" marT="54864" marB="54864" anchor="ctr">
-                    <a:lnL w="0" cap="flat" cmpd="sng" algn="ctr">
-                      <a:noFill/>
-                    </a:lnL>
-                    <a:lnR w="0" cap="flat" cmpd="sng" algn="ctr">
-                      <a:noFill/>
-                    </a:lnR>
-                    <a:lnT w="6350" cap="flat" cmpd="sng" algn="ctr">
-                      <a:solidFill>
-                        <a:srgbClr val="BFBFBF"/>
-                      </a:solidFill>
-                      <a:prstDash val="solid"/>
-                      <a:round/>
-                      <a:headEnd type="none" w="med" len="med"/>
-                      <a:tailEnd type="none" w="med" len="med"/>
-                    </a:lnT>
-                    <a:lnB w="6350" cap="flat" cmpd="sng" algn="ctr">
-                      <a:solidFill>
-                        <a:srgbClr val="BFBFBF"/>
-                      </a:solidFill>
-                      <a:prstDash val="solid"/>
-                      <a:round/>
-                      <a:headEnd type="none" w="med" len="med"/>
-                      <a:tailEnd type="none" w="med" len="med"/>
-                    </a:lnB>
-                  </a:tcPr>
-                </a:tc>
-                <a:tc>
-                  <a:txBody>
-                    <a:bodyPr/>
-                    <a:lstStyle/>
-                    <a:p>
-                      <a:pPr marL="0" indent="0" algn="l">
-                        <a:buNone/>
-                      </a:pPr>
-                      <a:r>
-                        <a:rPr lang="ja-JP" altLang="en-US" sz="1800" dirty="0">
-                          <a:solidFill>
-                            <a:srgbClr val="262626"/>
-                          </a:solidFill>
-                          <a:latin typeface="Meiryo" pitchFamily="34" charset="0"/>
-                          <a:ea typeface="Meiryo" pitchFamily="34" charset="-122"/>
-                          <a:cs typeface="Meiryo" pitchFamily="34" charset="-120"/>
-                        </a:rPr>
-                        <a:t>著者の所属機関に教育機関（大学など）と企業の両方を含む</a:t>
-                      </a:r>
-                      <a:endParaRPr lang="ja-JP" sz="1800" dirty="0">
-                        <a:latin typeface="Meiryo" charset="0"/>
-                        <a:ea typeface="Meiryo" charset="0"/>
-                        <a:cs typeface="Meiryo" charset="0"/>
-                      </a:endParaRPr>
-                    </a:p>
-                  </a:txBody>
-                  <a:tcPr marL="109728" marR="109728" marT="54864" marB="54864" anchor="ctr">
-                    <a:lnL w="0" cap="flat" cmpd="sng" algn="ctr">
-                      <a:noFill/>
-                    </a:lnL>
-                    <a:lnR w="0" cap="flat" cmpd="sng" algn="ctr">
-                      <a:noFill/>
-                    </a:lnR>
-                    <a:lnT w="6350" cap="flat" cmpd="sng" algn="ctr">
-                      <a:solidFill>
-                        <a:srgbClr val="BFBFBF"/>
-                      </a:solidFill>
-                      <a:prstDash val="solid"/>
-                      <a:round/>
-                      <a:headEnd type="none" w="med" len="med"/>
-                      <a:tailEnd type="none" w="med" len="med"/>
-                    </a:lnT>
-                    <a:lnB w="6350" cap="flat" cmpd="sng" algn="ctr">
-                      <a:solidFill>
-                        <a:srgbClr val="BFBFBF"/>
-                      </a:solidFill>
-                      <a:prstDash val="solid"/>
-                      <a:round/>
-                      <a:headEnd type="none" w="med" len="med"/>
-                      <a:tailEnd type="none" w="med" len="med"/>
-                    </a:lnB>
-                  </a:tcPr>
-                </a:tc>
-                <a:tc>
-                  <a:txBody>
-                    <a:bodyPr/>
-                    <a:lstStyle/>
-                    <a:p>
-                      <a:pPr marL="0" indent="0" algn="l">
-                        <a:buNone/>
-                      </a:pPr>
-                      <a:r>
-                        <a:rPr lang="ja-JP" altLang="en-US" sz="1800" dirty="0">
-                          <a:solidFill>
-                            <a:srgbClr val="262626"/>
-                          </a:solidFill>
-                          <a:latin typeface="Meiryo" pitchFamily="34" charset="0"/>
-                          <a:ea typeface="Meiryo" pitchFamily="34" charset="-122"/>
-                          <a:cs typeface="Meiryo" pitchFamily="34" charset="-120"/>
-                        </a:rPr>
-                        <a:t>OpenAlex</a:t>
-                      </a:r>
-                      <a:endParaRPr lang="ja-JP" sz="1800" dirty="0">
-                        <a:latin typeface="Meiryo" charset="0"/>
-                        <a:ea typeface="Meiryo" charset="0"/>
-                        <a:cs typeface="Meiryo" charset="0"/>
-                      </a:endParaRPr>
-                    </a:p>
-                  </a:txBody>
-                  <a:tcPr marL="109728" marR="109728" marT="54864" marB="54864" anchor="ctr">
-                    <a:lnL w="0" cap="flat" cmpd="sng" algn="ctr">
-                      <a:noFill/>
-                    </a:lnL>
-                    <a:lnR w="0" cap="flat" cmpd="sng" algn="ctr">
-                      <a:noFill/>
-                    </a:lnR>
-                    <a:lnT w="6350" cap="flat" cmpd="sng" algn="ctr">
-                      <a:solidFill>
-                        <a:srgbClr val="BFBFBF"/>
-                      </a:solidFill>
-                      <a:prstDash val="solid"/>
-                      <a:round/>
-                      <a:headEnd type="none" w="med" len="med"/>
-                      <a:tailEnd type="none" w="med" len="med"/>
-                    </a:lnT>
-                    <a:lnB w="6350" cap="flat" cmpd="sng" algn="ctr">
-                      <a:solidFill>
-                        <a:srgbClr val="BFBFBF"/>
-                      </a:solidFill>
-                      <a:prstDash val="solid"/>
-                      <a:round/>
-                      <a:headEnd type="none" w="med" len="med"/>
-                      <a:tailEnd type="none" w="med" len="med"/>
-                    </a:lnB>
-                  </a:tcPr>
-                </a:tc>
-              </a:tr>
-              <a:tr h="475488">
                 <a:extLst>
                   <a:ext uri="{0D108BD9-81ED-4DB2-BD59-A6C34878D82A}">
                     <a16:rowId xmlns:a16="http://schemas.microsoft.com/office/drawing/2014/main" val="10004"/>
                   </a:ext>
                 </a:extLst>
+              </a:tr>
+              <a:tr h="475488">
                 <a:tc>
                   <a:txBody>
                     <a:bodyPr/>
@@ -7655,6 +7336,338 @@
                           <a:ea typeface="Meiryo" pitchFamily="34" charset="-122"/>
                           <a:cs typeface="Meiryo" pitchFamily="34" charset="-120"/>
                         </a:rPr>
+                        <a:t>国際共同</a:t>
+                      </a:r>
+                      <a:endParaRPr lang="ja-JP" sz="1800" dirty="0">
+                        <a:latin typeface="Meiryo" charset="0"/>
+                        <a:ea typeface="Meiryo" charset="0"/>
+                        <a:cs typeface="Meiryo" charset="0"/>
+                      </a:endParaRPr>
+                    </a:p>
+                  </a:txBody>
+                  <a:tcPr marL="109728" marR="109728" marT="54864" marB="54864" anchor="ctr">
+                    <a:lnL w="0" cap="flat" cmpd="sng" algn="ctr">
+                      <a:noFill/>
+                    </a:lnL>
+                    <a:lnR w="0" cap="flat" cmpd="sng" algn="ctr">
+                      <a:noFill/>
+                    </a:lnR>
+                    <a:lnT w="6350" cap="flat" cmpd="sng" algn="ctr">
+                      <a:solidFill>
+                        <a:srgbClr val="BFBFBF"/>
+                      </a:solidFill>
+                      <a:prstDash val="solid"/>
+                      <a:round/>
+                      <a:headEnd type="none" w="med" len="med"/>
+                      <a:tailEnd type="none" w="med" len="med"/>
+                    </a:lnT>
+                    <a:lnB w="6350" cap="flat" cmpd="sng" algn="ctr">
+                      <a:solidFill>
+                        <a:srgbClr val="BFBFBF"/>
+                      </a:solidFill>
+                      <a:prstDash val="solid"/>
+                      <a:round/>
+                      <a:headEnd type="none" w="med" len="med"/>
+                      <a:tailEnd type="none" w="med" len="med"/>
+                    </a:lnB>
+                  </a:tcPr>
+                </a:tc>
+                <a:tc>
+                  <a:txBody>
+                    <a:bodyPr/>
+                    <a:lstStyle/>
+                    <a:p>
+                      <a:pPr marL="0" indent="0" algn="l">
+                        <a:buNone/>
+                      </a:pPr>
+                      <a:r>
+                        <a:rPr lang="ja-JP" altLang="en-US" sz="1800" dirty="0">
+                          <a:solidFill>
+                            <a:srgbClr val="262626"/>
+                          </a:solidFill>
+                          <a:latin typeface="Meiryo" pitchFamily="34" charset="0"/>
+                          <a:ea typeface="Meiryo" pitchFamily="34" charset="-122"/>
+                          <a:cs typeface="Meiryo" pitchFamily="34" charset="-120"/>
+                        </a:rPr>
+                        <a:t>著者の所属機関の国が2か国以上</a:t>
+                      </a:r>
+                      <a:endParaRPr lang="ja-JP" sz="1800" dirty="0">
+                        <a:latin typeface="Meiryo" charset="0"/>
+                        <a:ea typeface="Meiryo" charset="0"/>
+                        <a:cs typeface="Meiryo" charset="0"/>
+                      </a:endParaRPr>
+                    </a:p>
+                  </a:txBody>
+                  <a:tcPr marL="109728" marR="109728" marT="54864" marB="54864" anchor="ctr">
+                    <a:lnL w="0" cap="flat" cmpd="sng" algn="ctr">
+                      <a:noFill/>
+                    </a:lnL>
+                    <a:lnR w="0" cap="flat" cmpd="sng" algn="ctr">
+                      <a:noFill/>
+                    </a:lnR>
+                    <a:lnT w="6350" cap="flat" cmpd="sng" algn="ctr">
+                      <a:solidFill>
+                        <a:srgbClr val="BFBFBF"/>
+                      </a:solidFill>
+                      <a:prstDash val="solid"/>
+                      <a:round/>
+                      <a:headEnd type="none" w="med" len="med"/>
+                      <a:tailEnd type="none" w="med" len="med"/>
+                    </a:lnT>
+                    <a:lnB w="6350" cap="flat" cmpd="sng" algn="ctr">
+                      <a:solidFill>
+                        <a:srgbClr val="BFBFBF"/>
+                      </a:solidFill>
+                      <a:prstDash val="solid"/>
+                      <a:round/>
+                      <a:headEnd type="none" w="med" len="med"/>
+                      <a:tailEnd type="none" w="med" len="med"/>
+                    </a:lnB>
+                  </a:tcPr>
+                </a:tc>
+                <a:tc>
+                  <a:txBody>
+                    <a:bodyPr/>
+                    <a:lstStyle/>
+                    <a:p>
+                      <a:pPr marL="0" indent="0" algn="l">
+                        <a:buNone/>
+                      </a:pPr>
+                      <a:r>
+                        <a:rPr lang="ja-JP" altLang="en-US" sz="1800" dirty="0">
+                          <a:solidFill>
+                            <a:srgbClr val="262626"/>
+                          </a:solidFill>
+                          <a:latin typeface="Meiryo" pitchFamily="34" charset="0"/>
+                          <a:ea typeface="Meiryo" pitchFamily="34" charset="-122"/>
+                          <a:cs typeface="Meiryo" pitchFamily="34" charset="-120"/>
+                        </a:rPr>
+                        <a:t>OpenAlex</a:t>
+                      </a:r>
+                      <a:endParaRPr lang="ja-JP" sz="1800" dirty="0">
+                        <a:latin typeface="Meiryo" charset="0"/>
+                        <a:ea typeface="Meiryo" charset="0"/>
+                        <a:cs typeface="Meiryo" charset="0"/>
+                      </a:endParaRPr>
+                    </a:p>
+                  </a:txBody>
+                  <a:tcPr marL="109728" marR="109728" marT="54864" marB="54864" anchor="ctr">
+                    <a:lnL w="0" cap="flat" cmpd="sng" algn="ctr">
+                      <a:noFill/>
+                    </a:lnL>
+                    <a:lnR w="0" cap="flat" cmpd="sng" algn="ctr">
+                      <a:noFill/>
+                    </a:lnR>
+                    <a:lnT w="6350" cap="flat" cmpd="sng" algn="ctr">
+                      <a:solidFill>
+                        <a:srgbClr val="BFBFBF"/>
+                      </a:solidFill>
+                      <a:prstDash val="solid"/>
+                      <a:round/>
+                      <a:headEnd type="none" w="med" len="med"/>
+                      <a:tailEnd type="none" w="med" len="med"/>
+                    </a:lnT>
+                    <a:lnB w="6350" cap="flat" cmpd="sng" algn="ctr">
+                      <a:solidFill>
+                        <a:srgbClr val="BFBFBF"/>
+                      </a:solidFill>
+                      <a:prstDash val="solid"/>
+                      <a:round/>
+                      <a:headEnd type="none" w="med" len="med"/>
+                      <a:tailEnd type="none" w="med" len="med"/>
+                    </a:lnB>
+                  </a:tcPr>
+                </a:tc>
+                <a:extLst>
+                  <a:ext uri="{0D108BD9-81ED-4DB2-BD59-A6C34878D82A}">
+                    <a16:rowId xmlns:a16="http://schemas.microsoft.com/office/drawing/2014/main" val="10005"/>
+                  </a:ext>
+                </a:extLst>
+              </a:tr>
+              <a:tr h="475488">
+                <a:tc>
+                  <a:txBody>
+                    <a:bodyPr/>
+                    <a:lstStyle/>
+                    <a:p>
+                      <a:pPr marL="0" indent="0" algn="l">
+                        <a:buNone/>
+                      </a:pPr>
+                      <a:r>
+                        <a:rPr lang="ja-JP" altLang="en-US" sz="1800" dirty="0">
+                          <a:solidFill>
+                            <a:srgbClr val="262626"/>
+                          </a:solidFill>
+                          <a:latin typeface="Meiryo" pitchFamily="34" charset="0"/>
+                          <a:ea typeface="Meiryo" pitchFamily="34" charset="-122"/>
+                          <a:cs typeface="Meiryo" pitchFamily="34" charset="-120"/>
+                        </a:rPr>
+                        <a:t>産学連携</a:t>
+                      </a:r>
+                      <a:endParaRPr lang="ja-JP" sz="1800" dirty="0">
+                        <a:latin typeface="Meiryo" charset="0"/>
+                        <a:ea typeface="Meiryo" charset="0"/>
+                        <a:cs typeface="Meiryo" charset="0"/>
+                      </a:endParaRPr>
+                    </a:p>
+                  </a:txBody>
+                  <a:tcPr marL="109728" marR="109728" marT="54864" marB="54864" anchor="ctr">
+                    <a:lnL w="0" cap="flat" cmpd="sng" algn="ctr">
+                      <a:noFill/>
+                    </a:lnL>
+                    <a:lnR w="0" cap="flat" cmpd="sng" algn="ctr">
+                      <a:noFill/>
+                    </a:lnR>
+                    <a:lnT w="6350" cap="flat" cmpd="sng" algn="ctr">
+                      <a:solidFill>
+                        <a:srgbClr val="BFBFBF"/>
+                      </a:solidFill>
+                      <a:prstDash val="solid"/>
+                      <a:round/>
+                      <a:headEnd type="none" w="med" len="med"/>
+                      <a:tailEnd type="none" w="med" len="med"/>
+                    </a:lnT>
+                    <a:lnB w="6350" cap="flat" cmpd="sng" algn="ctr">
+                      <a:solidFill>
+                        <a:srgbClr val="BFBFBF"/>
+                      </a:solidFill>
+                      <a:prstDash val="solid"/>
+                      <a:round/>
+                      <a:headEnd type="none" w="med" len="med"/>
+                      <a:tailEnd type="none" w="med" len="med"/>
+                    </a:lnB>
+                  </a:tcPr>
+                </a:tc>
+                <a:tc>
+                  <a:txBody>
+                    <a:bodyPr/>
+                    <a:lstStyle/>
+                    <a:p>
+                      <a:pPr marL="0" indent="0" algn="l">
+                        <a:buNone/>
+                      </a:pPr>
+                      <a:r>
+                        <a:rPr lang="ja-JP" altLang="en-US" sz="1800" dirty="0">
+                          <a:solidFill>
+                            <a:srgbClr val="262626"/>
+                          </a:solidFill>
+                          <a:latin typeface="Meiryo" pitchFamily="34" charset="0"/>
+                          <a:ea typeface="Meiryo" pitchFamily="34" charset="-122"/>
+                          <a:cs typeface="Meiryo" pitchFamily="34" charset="-120"/>
+                        </a:rPr>
+                        <a:t>著者の所属機関に教育機関（大学など）と企業の両方を含む</a:t>
+                      </a:r>
+                      <a:endParaRPr lang="ja-JP" sz="1800" dirty="0">
+                        <a:latin typeface="Meiryo" charset="0"/>
+                        <a:ea typeface="Meiryo" charset="0"/>
+                        <a:cs typeface="Meiryo" charset="0"/>
+                      </a:endParaRPr>
+                    </a:p>
+                  </a:txBody>
+                  <a:tcPr marL="109728" marR="109728" marT="54864" marB="54864" anchor="ctr">
+                    <a:lnL w="0" cap="flat" cmpd="sng" algn="ctr">
+                      <a:noFill/>
+                    </a:lnL>
+                    <a:lnR w="0" cap="flat" cmpd="sng" algn="ctr">
+                      <a:noFill/>
+                    </a:lnR>
+                    <a:lnT w="6350" cap="flat" cmpd="sng" algn="ctr">
+                      <a:solidFill>
+                        <a:srgbClr val="BFBFBF"/>
+                      </a:solidFill>
+                      <a:prstDash val="solid"/>
+                      <a:round/>
+                      <a:headEnd type="none" w="med" len="med"/>
+                      <a:tailEnd type="none" w="med" len="med"/>
+                    </a:lnT>
+                    <a:lnB w="6350" cap="flat" cmpd="sng" algn="ctr">
+                      <a:solidFill>
+                        <a:srgbClr val="BFBFBF"/>
+                      </a:solidFill>
+                      <a:prstDash val="solid"/>
+                      <a:round/>
+                      <a:headEnd type="none" w="med" len="med"/>
+                      <a:tailEnd type="none" w="med" len="med"/>
+                    </a:lnB>
+                  </a:tcPr>
+                </a:tc>
+                <a:tc>
+                  <a:txBody>
+                    <a:bodyPr/>
+                    <a:lstStyle/>
+                    <a:p>
+                      <a:pPr marL="0" indent="0" algn="l">
+                        <a:buNone/>
+                      </a:pPr>
+                      <a:r>
+                        <a:rPr lang="ja-JP" altLang="en-US" sz="1800" dirty="0">
+                          <a:solidFill>
+                            <a:srgbClr val="262626"/>
+                          </a:solidFill>
+                          <a:latin typeface="Meiryo" pitchFamily="34" charset="0"/>
+                          <a:ea typeface="Meiryo" pitchFamily="34" charset="-122"/>
+                          <a:cs typeface="Meiryo" pitchFamily="34" charset="-120"/>
+                        </a:rPr>
+                        <a:t>OpenAlex</a:t>
+                      </a:r>
+                      <a:endParaRPr lang="ja-JP" sz="1800" dirty="0">
+                        <a:latin typeface="Meiryo" charset="0"/>
+                        <a:ea typeface="Meiryo" charset="0"/>
+                        <a:cs typeface="Meiryo" charset="0"/>
+                      </a:endParaRPr>
+                    </a:p>
+                  </a:txBody>
+                  <a:tcPr marL="109728" marR="109728" marT="54864" marB="54864" anchor="ctr">
+                    <a:lnL w="0" cap="flat" cmpd="sng" algn="ctr">
+                      <a:noFill/>
+                    </a:lnL>
+                    <a:lnR w="0" cap="flat" cmpd="sng" algn="ctr">
+                      <a:noFill/>
+                    </a:lnR>
+                    <a:lnT w="6350" cap="flat" cmpd="sng" algn="ctr">
+                      <a:solidFill>
+                        <a:srgbClr val="BFBFBF"/>
+                      </a:solidFill>
+                      <a:prstDash val="solid"/>
+                      <a:round/>
+                      <a:headEnd type="none" w="med" len="med"/>
+                      <a:tailEnd type="none" w="med" len="med"/>
+                    </a:lnT>
+                    <a:lnB w="6350" cap="flat" cmpd="sng" algn="ctr">
+                      <a:solidFill>
+                        <a:srgbClr val="BFBFBF"/>
+                      </a:solidFill>
+                      <a:prstDash val="solid"/>
+                      <a:round/>
+                      <a:headEnd type="none" w="med" len="med"/>
+                      <a:tailEnd type="none" w="med" len="med"/>
+                    </a:lnB>
+                  </a:tcPr>
+                </a:tc>
+                <a:extLst>
+                  <a:ext uri="{0D108BD9-81ED-4DB2-BD59-A6C34878D82A}">
+                    <a16:rowId xmlns:a16="http://schemas.microsoft.com/office/drawing/2014/main" val="10006"/>
+                  </a:ext>
+                </a:extLst>
+              </a:tr>
+              <a:tr h="475488">
+                <a:tc>
+                  <a:txBody>
+                    <a:bodyPr/>
+                    <a:lstStyle/>
+                    <a:p>
+                      <a:pPr marL="0" indent="0" algn="l">
+                        <a:buNone/>
+                      </a:pPr>
+                      <a:r>
+                        <a:rPr lang="ja-JP" altLang="en-US" sz="1800" dirty="0">
+                          <a:solidFill>
+                            <a:srgbClr val="262626"/>
+                          </a:solidFill>
+                          <a:latin typeface="Meiryo" pitchFamily="34" charset="0"/>
+                          <a:ea typeface="Meiryo" pitchFamily="34" charset="-122"/>
+                          <a:cs typeface="Meiryo" pitchFamily="34" charset="-120"/>
+                        </a:rPr>
                         <a:t>組織をまたぐ共同</a:t>
                       </a:r>
                       <a:endParaRPr lang="ja-JP" sz="1800" dirty="0">
@@ -7797,6 +7810,11 @@
                     </a:lnB>
                   </a:tcPr>
                 </a:tc>
+                <a:extLst>
+                  <a:ext uri="{0D108BD9-81ED-4DB2-BD59-A6C34878D82A}">
+                    <a16:rowId xmlns:a16="http://schemas.microsoft.com/office/drawing/2014/main" val="10007"/>
+                  </a:ext>
+                </a:extLst>
               </a:tr>
             </a:tbl>
           </a:graphicData>
@@ -7907,7 +7925,7 @@
                 <a:ea typeface="Meiryo" pitchFamily="34" charset="-122"/>
                 <a:cs typeface="Meiryo" pitchFamily="34" charset="-120"/>
               </a:rPr>
-              <a:t>計算：Python（statsmodels 0.15、scipy 1.18）、src/analyze_novelty_v2.py　log は自然対数</a:t>
+              <a:t>計算：Python（statsmodels 0.15 の最小二乗法、scipy 1.18）、src/analyze_novelty_v2.py。log は自然対数</a:t>
             </a:r>
             <a:endParaRPr lang="ja-JP" sz="1600" dirty="0"/>
           </a:p>
@@ -7952,6 +7970,49 @@
           </a:p>
         </p:txBody>
       </p:sp>
+      <p:sp>
+        <p:nvSpPr>
+          <p:cNvPr id="16" name="Text 4"/>
+          <p:cNvSpPr txBox="1"/>
+          <p:nvPr/>
+        </p:nvSpPr>
+        <p:spPr>
+          <a:xfrm>
+            <a:off x="548640" y="1600200"/>
+            <a:ext cx="11094415" cy="393192"/>
+          </a:xfrm>
+          <a:prstGeom prst="rect">
+            <a:avLst/>
+          </a:prstGeom>
+          <a:noFill/>
+          <a:ln/>
+        </p:spPr>
+        <p:txBody>
+          <a:bodyPr wrap="square" lIns="0" tIns="0" rIns="0" bIns="0" rtlCol="0" anchor="t"/>
+          <a:lstStyle/>
+          <a:p>
+            <a:pPr marL="228600" indent="-228600">
+              <a:spcAft>
+                <a:spcPts val="800"/>
+              </a:spcAft>
+              <a:buSzPct val="100000"/>
+              <a:buChar char="•"/>
+            </a:pPr>
+            <a:r>
+              <a:rPr lang="ja-JP" altLang="en-US" sz="1800" dirty="0">
+                <a:solidFill>
+                  <a:srgbClr val="262626"/>
+                </a:solidFill>
+                <a:latin typeface="Meiryo" pitchFamily="34" charset="0"/>
+                <a:ea typeface="Meiryo" pitchFamily="34" charset="-122"/>
+                <a:cs typeface="Meiryo" pitchFamily="34" charset="-120"/>
+              </a:rPr>
+              <a:t>基本の式：非慣習性の順位 ＝ 定数 ＋ a×log(著者数) ＋ b×log(参考文献数＋1) ＋ c×分野の偏り</a:t>
+            </a:r>
+            <a:endParaRPr lang="ja-JP" sz="1800" dirty="0"/>
+          </a:p>
+        </p:txBody>
+      </p:sp>
       <p:graphicFrame>
         <p:nvGraphicFramePr>
           <p:cNvPr id="15" name="Table 0"/>
@@ -7967,25 +8028,203 @@
           </p:nvPr>
         </p:nvGraphicFramePr>
         <p:xfrm>
-          <a:off x="548640" y="1600200"/>
-          <a:ext cx="11091672" cy="3767328"/>
+          <a:off x="548640" y="2221992"/>
+          <a:ext cx="11091672" cy="3419856"/>
         </p:xfrm>
         <a:graphic>
           <a:graphicData uri="http://schemas.openxmlformats.org/drawingml/2006/table">
             <a:tbl>
               <a:tblPr/>
               <a:tblGrid>
-                <a:gridCol w="2240280"/>
-                <a:gridCol w="2606040"/>
-                <a:gridCol w="4690872"/>
-                <a:gridCol w="1554480"/>
+                <a:gridCol w="2240280">
+                  <a:extLst>
+                    <a:ext uri="{9D8B030D-6E8A-4147-A177-3AD203B41FA5}">
+                      <a16:colId xmlns:a16="http://schemas.microsoft.com/office/drawing/2014/main" val="20000"/>
+                    </a:ext>
+                  </a:extLst>
+                </a:gridCol>
+                <a:gridCol w="6153912">
+                  <a:extLst>
+                    <a:ext uri="{9D8B030D-6E8A-4147-A177-3AD203B41FA5}">
+                      <a16:colId xmlns:a16="http://schemas.microsoft.com/office/drawing/2014/main" val="20001"/>
+                    </a:ext>
+                  </a:extLst>
+                </a:gridCol>
+                <a:gridCol w="2697480">
+                  <a:extLst>
+                    <a:ext uri="{9D8B030D-6E8A-4147-A177-3AD203B41FA5}">
+                      <a16:colId xmlns:a16="http://schemas.microsoft.com/office/drawing/2014/main" val="20002"/>
+                    </a:ext>
+                  </a:extLst>
+                </a:gridCol>
               </a:tblGrid>
               <a:tr h="475488">
+                <a:tc>
+                  <a:txBody>
+                    <a:bodyPr/>
+                    <a:lstStyle/>
+                    <a:p>
+                      <a:pPr marL="0" indent="0" algn="l">
+                        <a:buNone/>
+                      </a:pPr>
+                      <a:r>
+                        <a:rPr lang="ja-JP" altLang="en-US" sz="1800" b="1" dirty="0">
+                          <a:solidFill>
+                            <a:srgbClr val="262626"/>
+                          </a:solidFill>
+                          <a:latin typeface="Meiryo" pitchFamily="34" charset="0"/>
+                          <a:ea typeface="Meiryo" pitchFamily="34" charset="-122"/>
+                          <a:cs typeface="Meiryo" pitchFamily="34" charset="-120"/>
+                        </a:rPr>
+                        <a:t>要因</a:t>
+                      </a:r>
+                      <a:endParaRPr lang="ja-JP" sz="1800" dirty="0">
+                        <a:latin typeface="Meiryo" charset="0"/>
+                        <a:ea typeface="Meiryo" charset="0"/>
+                        <a:cs typeface="Meiryo" charset="0"/>
+                      </a:endParaRPr>
+                    </a:p>
+                  </a:txBody>
+                  <a:tcPr marL="109728" marR="109728" marT="54864" marB="54864" anchor="ctr">
+                    <a:lnL w="0" cap="flat" cmpd="sng" algn="ctr">
+                      <a:noFill/>
+                    </a:lnL>
+                    <a:lnR w="0" cap="flat" cmpd="sng" algn="ctr">
+                      <a:noFill/>
+                    </a:lnR>
+                    <a:lnT w="19050" cap="flat" cmpd="sng" algn="ctr">
+                      <a:solidFill>
+                        <a:srgbClr val="404040"/>
+                      </a:solidFill>
+                      <a:prstDash val="solid"/>
+                      <a:round/>
+                      <a:headEnd type="none" w="med" len="med"/>
+                      <a:tailEnd type="none" w="med" len="med"/>
+                    </a:lnT>
+                    <a:lnB w="12700" cap="flat" cmpd="sng" algn="ctr">
+                      <a:solidFill>
+                        <a:srgbClr val="404040"/>
+                      </a:solidFill>
+                      <a:prstDash val="solid"/>
+                      <a:round/>
+                      <a:headEnd type="none" w="med" len="med"/>
+                      <a:tailEnd type="none" w="med" len="med"/>
+                    </a:lnB>
+                  </a:tcPr>
+                </a:tc>
+                <a:tc>
+                  <a:txBody>
+                    <a:bodyPr/>
+                    <a:lstStyle/>
+                    <a:p>
+                      <a:pPr marL="0" indent="0" algn="l">
+                        <a:buNone/>
+                      </a:pPr>
+                      <a:r>
+                        <a:rPr lang="ja-JP" altLang="en-US" sz="1800" b="1" dirty="0">
+                          <a:solidFill>
+                            <a:srgbClr val="262626"/>
+                          </a:solidFill>
+                          <a:latin typeface="Meiryo" pitchFamily="34" charset="0"/>
+                          <a:ea typeface="Meiryo" pitchFamily="34" charset="-122"/>
+                          <a:cs typeface="Meiryo" pitchFamily="34" charset="-120"/>
+                        </a:rPr>
+                        <a:t>確かめ方</a:t>
+                      </a:r>
+                      <a:endParaRPr lang="ja-JP" sz="1800" dirty="0">
+                        <a:latin typeface="Meiryo" charset="0"/>
+                        <a:ea typeface="Meiryo" charset="0"/>
+                        <a:cs typeface="Meiryo" charset="0"/>
+                      </a:endParaRPr>
+                    </a:p>
+                  </a:txBody>
+                  <a:tcPr marL="109728" marR="109728" marT="54864" marB="54864" anchor="ctr">
+                    <a:lnL w="0" cap="flat" cmpd="sng" algn="ctr">
+                      <a:noFill/>
+                    </a:lnL>
+                    <a:lnR w="0" cap="flat" cmpd="sng" algn="ctr">
+                      <a:noFill/>
+                    </a:lnR>
+                    <a:lnT w="19050" cap="flat" cmpd="sng" algn="ctr">
+                      <a:solidFill>
+                        <a:srgbClr val="404040"/>
+                      </a:solidFill>
+                      <a:prstDash val="solid"/>
+                      <a:round/>
+                      <a:headEnd type="none" w="med" len="med"/>
+                      <a:tailEnd type="none" w="med" len="med"/>
+                    </a:lnT>
+                    <a:lnB w="12700" cap="flat" cmpd="sng" algn="ctr">
+                      <a:solidFill>
+                        <a:srgbClr val="404040"/>
+                      </a:solidFill>
+                      <a:prstDash val="solid"/>
+                      <a:round/>
+                      <a:headEnd type="none" w="med" len="med"/>
+                      <a:tailEnd type="none" w="med" len="med"/>
+                    </a:lnB>
+                  </a:tcPr>
+                </a:tc>
+                <a:tc>
+                  <a:txBody>
+                    <a:bodyPr/>
+                    <a:lstStyle/>
+                    <a:p>
+                      <a:pPr marL="0" indent="0" algn="l">
+                        <a:buNone/>
+                      </a:pPr>
+                      <a:r>
+                        <a:rPr lang="ja-JP" altLang="en-US" sz="1800" b="1" dirty="0">
+                          <a:solidFill>
+                            <a:srgbClr val="262626"/>
+                          </a:solidFill>
+                          <a:latin typeface="Meiryo" pitchFamily="34" charset="0"/>
+                          <a:ea typeface="Meiryo" pitchFamily="34" charset="-122"/>
+                          <a:cs typeface="Meiryo" pitchFamily="34" charset="-120"/>
+                        </a:rPr>
+                        <a:t>結果</a:t>
+                      </a:r>
+                      <a:endParaRPr lang="ja-JP" sz="1800" dirty="0">
+                        <a:latin typeface="Meiryo" charset="0"/>
+                        <a:ea typeface="Meiryo" charset="0"/>
+                        <a:cs typeface="Meiryo" charset="0"/>
+                      </a:endParaRPr>
+                    </a:p>
+                  </a:txBody>
+                  <a:tcPr marL="109728" marR="109728" marT="54864" marB="54864" anchor="ctr">
+                    <a:lnL w="0" cap="flat" cmpd="sng" algn="ctr">
+                      <a:noFill/>
+                    </a:lnL>
+                    <a:lnR w="0" cap="flat" cmpd="sng" algn="ctr">
+                      <a:noFill/>
+                    </a:lnR>
+                    <a:lnT w="19050" cap="flat" cmpd="sng" algn="ctr">
+                      <a:solidFill>
+                        <a:srgbClr val="404040"/>
+                      </a:solidFill>
+                      <a:prstDash val="solid"/>
+                      <a:round/>
+                      <a:headEnd type="none" w="med" len="med"/>
+                      <a:tailEnd type="none" w="med" len="med"/>
+                    </a:lnT>
+                    <a:lnB w="12700" cap="flat" cmpd="sng" algn="ctr">
+                      <a:solidFill>
+                        <a:srgbClr val="404040"/>
+                      </a:solidFill>
+                      <a:prstDash val="solid"/>
+                      <a:round/>
+                      <a:headEnd type="none" w="med" len="med"/>
+                      <a:tailEnd type="none" w="med" len="med"/>
+                    </a:lnB>
+                  </a:tcPr>
+                </a:tc>
                 <a:extLst>
                   <a:ext uri="{0D108BD9-81ED-4DB2-BD59-A6C34878D82A}">
                     <a16:rowId xmlns:a16="http://schemas.microsoft.com/office/drawing/2014/main" val="10000"/>
                   </a:ext>
                 </a:extLst>
+              </a:tr>
+              <a:tr h="475488">
                 <a:tc>
                   <a:txBody>
                     <a:bodyPr/>
@@ -7995,31 +8234,31 @@
                         <a:buNone/>
                       </a:pPr>
                       <a:r>
-                        <a:rPr lang="ja-JP" altLang="en-US" sz="1800" b="1" dirty="0">
-                          <a:solidFill>
-                            <a:srgbClr val="262626"/>
-                          </a:solidFill>
-                          <a:latin typeface="Meiryo" pitchFamily="34" charset="0"/>
-                          <a:ea typeface="Meiryo" pitchFamily="34" charset="-122"/>
-                          <a:cs typeface="Meiryo" pitchFamily="34" charset="-120"/>
-                        </a:rPr>
-                        <a:t>要因</a:t>
-                      </a:r>
-                      <a:endParaRPr lang="ja-JP" sz="1800" dirty="0">
-                        <a:latin typeface="Meiryo" charset="0"/>
-                        <a:ea typeface="Meiryo" charset="0"/>
-                        <a:cs typeface="Meiryo" charset="0"/>
-                      </a:endParaRPr>
-                    </a:p>
-                  </a:txBody>
-                  <a:tcPr marL="109728" marR="109728" marT="54864" marB="54864" anchor="ctr">
-                    <a:lnL w="0" cap="flat" cmpd="sng" algn="ctr">
-                      <a:noFill/>
-                    </a:lnL>
-                    <a:lnR w="0" cap="flat" cmpd="sng" algn="ctr">
-                      <a:noFill/>
-                    </a:lnR>
-                    <a:lnT w="19050" cap="flat" cmpd="sng" algn="ctr">
+                        <a:rPr lang="ja-JP" altLang="en-US" sz="1800" dirty="0">
+                          <a:solidFill>
+                            <a:srgbClr val="262626"/>
+                          </a:solidFill>
+                          <a:latin typeface="Meiryo" pitchFamily="34" charset="0"/>
+                          <a:ea typeface="Meiryo" pitchFamily="34" charset="-122"/>
+                          <a:cs typeface="Meiryo" pitchFamily="34" charset="-120"/>
+                        </a:rPr>
+                        <a:t>チーム規模</a:t>
+                      </a:r>
+                      <a:endParaRPr lang="ja-JP" sz="1800" dirty="0">
+                        <a:latin typeface="Meiryo" charset="0"/>
+                        <a:ea typeface="Meiryo" charset="0"/>
+                        <a:cs typeface="Meiryo" charset="0"/>
+                      </a:endParaRPr>
+                    </a:p>
+                  </a:txBody>
+                  <a:tcPr marL="109728" marR="109728" marT="54864" marB="54864" anchor="ctr">
+                    <a:lnL w="0" cap="flat" cmpd="sng" algn="ctr">
+                      <a:noFill/>
+                    </a:lnL>
+                    <a:lnR w="0" cap="flat" cmpd="sng" algn="ctr">
+                      <a:noFill/>
+                    </a:lnR>
+                    <a:lnT w="12700" cap="flat" cmpd="sng" algn="ctr">
                       <a:solidFill>
                         <a:srgbClr val="404040"/>
                       </a:solidFill>
@@ -8028,7 +8267,51 @@
                       <a:headEnd type="none" w="med" len="med"/>
                       <a:tailEnd type="none" w="med" len="med"/>
                     </a:lnT>
-                    <a:lnB w="12700" cap="flat" cmpd="sng" algn="ctr">
+                    <a:lnB w="6350" cap="flat" cmpd="sng" algn="ctr">
+                      <a:solidFill>
+                        <a:srgbClr val="BFBFBF"/>
+                      </a:solidFill>
+                      <a:prstDash val="solid"/>
+                      <a:round/>
+                      <a:headEnd type="none" w="med" len="med"/>
+                      <a:tailEnd type="none" w="med" len="med"/>
+                    </a:lnB>
+                  </a:tcPr>
+                </a:tc>
+                <a:tc>
+                  <a:txBody>
+                    <a:bodyPr/>
+                    <a:lstStyle/>
+                    <a:p>
+                      <a:pPr marL="0" indent="0" algn="l">
+                        <a:buNone/>
+                      </a:pPr>
+                      <a:r>
+                        <a:rPr lang="ja-JP" altLang="en-US" sz="1800" dirty="0">
+                          <a:solidFill>
+                            <a:srgbClr val="262626"/>
+                          </a:solidFill>
+                          <a:latin typeface="Meiryo" pitchFamily="34" charset="0"/>
+                          <a:ea typeface="Meiryo" pitchFamily="34" charset="-122"/>
+                          <a:cs typeface="Meiryo" pitchFamily="34" charset="-120"/>
+                        </a:rPr>
+                        <a:t>基本の式の a が0かどうか（t 検定）</a:t>
+                      </a:r>
+                      <a:endParaRPr lang="ja-JP" sz="1800" dirty="0">
+                        <a:latin typeface="Meiryo" charset="0"/>
+                        <a:ea typeface="Meiryo" charset="0"/>
+                        <a:cs typeface="Meiryo" charset="0"/>
+                      </a:endParaRPr>
+                    </a:p>
+                  </a:txBody>
+                  <a:tcPr marL="109728" marR="109728" marT="54864" marB="54864" anchor="ctr">
+                    <a:lnL w="0" cap="flat" cmpd="sng" algn="ctr">
+                      <a:noFill/>
+                    </a:lnL>
+                    <a:lnR w="0" cap="flat" cmpd="sng" algn="ctr">
+                      <a:noFill/>
+                    </a:lnR>
+                    <a:lnT w="12700" cap="flat" cmpd="sng" algn="ctr">
                       <a:solidFill>
                         <a:srgbClr val="404040"/>
                       </a:solidFill>
@@ -8036,6 +8319,15 @@
                       <a:round/>
                       <a:headEnd type="none" w="med" len="med"/>
                       <a:tailEnd type="none" w="med" len="med"/>
+                    </a:lnT>
+                    <a:lnB w="6350" cap="flat" cmpd="sng" algn="ctr">
+                      <a:solidFill>
+                        <a:srgbClr val="BFBFBF"/>
+                      </a:solidFill>
+                      <a:prstDash val="solid"/>
+                      <a:round/>
+                      <a:headEnd type="none" w="med" len="med"/>
+                      <a:tailEnd type="none" w="med" len="med"/>
                     </a:lnB>
                   </a:tcPr>
                 </a:tc>
@@ -8048,31 +8340,31 @@
                         <a:buNone/>
                       </a:pPr>
                       <a:r>
-                        <a:rPr lang="ja-JP" altLang="en-US" sz="1800" b="1" dirty="0">
-                          <a:solidFill>
-                            <a:srgbClr val="262626"/>
-                          </a:solidFill>
-                          <a:latin typeface="Meiryo" pitchFamily="34" charset="0"/>
-                          <a:ea typeface="Meiryo" pitchFamily="34" charset="-122"/>
-                          <a:cs typeface="Meiryo" pitchFamily="34" charset="-120"/>
-                        </a:rPr>
-                        <a:t>検定</a:t>
-                      </a:r>
-                      <a:endParaRPr lang="ja-JP" sz="1800" dirty="0">
-                        <a:latin typeface="Meiryo" charset="0"/>
-                        <a:ea typeface="Meiryo" charset="0"/>
-                        <a:cs typeface="Meiryo" charset="0"/>
-                      </a:endParaRPr>
-                    </a:p>
-                  </a:txBody>
-                  <a:tcPr marL="109728" marR="109728" marT="54864" marB="54864" anchor="ctr">
-                    <a:lnL w="0" cap="flat" cmpd="sng" algn="ctr">
-                      <a:noFill/>
-                    </a:lnL>
-                    <a:lnR w="0" cap="flat" cmpd="sng" algn="ctr">
-                      <a:noFill/>
-                    </a:lnR>
-                    <a:lnT w="19050" cap="flat" cmpd="sng" algn="ctr">
+                        <a:rPr lang="ja-JP" altLang="en-US" sz="1800" dirty="0">
+                          <a:solidFill>
+                            <a:srgbClr val="262626"/>
+                          </a:solidFill>
+                          <a:latin typeface="Meiryo" pitchFamily="34" charset="0"/>
+                          <a:ea typeface="Meiryo" pitchFamily="34" charset="-122"/>
+                          <a:cs typeface="Meiryo" pitchFamily="34" charset="-120"/>
+                        </a:rPr>
+                        <a:t>a = −1.5、p = 0.39</a:t>
+                      </a:r>
+                      <a:endParaRPr lang="ja-JP" sz="1800" dirty="0">
+                        <a:latin typeface="Meiryo" charset="0"/>
+                        <a:ea typeface="Meiryo" charset="0"/>
+                        <a:cs typeface="Meiryo" charset="0"/>
+                      </a:endParaRPr>
+                    </a:p>
+                  </a:txBody>
+                  <a:tcPr marL="109728" marR="109728" marT="54864" marB="54864" anchor="ctr">
+                    <a:lnL w="0" cap="flat" cmpd="sng" algn="ctr">
+                      <a:noFill/>
+                    </a:lnL>
+                    <a:lnR w="0" cap="flat" cmpd="sng" algn="ctr">
+                      <a:noFill/>
+                    </a:lnR>
+                    <a:lnT w="12700" cap="flat" cmpd="sng" algn="ctr">
                       <a:solidFill>
                         <a:srgbClr val="404040"/>
                       </a:solidFill>
@@ -8081,1146 +8373,541 @@
                       <a:headEnd type="none" w="med" len="med"/>
                       <a:tailEnd type="none" w="med" len="med"/>
                     </a:lnT>
-                    <a:lnB w="12700" cap="flat" cmpd="sng" algn="ctr">
-                      <a:solidFill>
-                        <a:srgbClr val="404040"/>
-                      </a:solidFill>
-                      <a:prstDash val="solid"/>
-                      <a:round/>
-                      <a:headEnd type="none" w="med" len="med"/>
-                      <a:tailEnd type="none" w="med" len="med"/>
-                    </a:lnB>
-                  </a:tcPr>
-                </a:tc>
-                <a:tc>
-                  <a:txBody>
-                    <a:bodyPr/>
-                    <a:lstStyle/>
-                    <a:p>
-                      <a:pPr marL="0" indent="0" algn="l">
-                        <a:buNone/>
-                      </a:pPr>
-                      <a:r>
-                        <a:rPr lang="ja-JP" altLang="en-US" sz="1800" b="1" dirty="0">
-                          <a:solidFill>
-                            <a:srgbClr val="262626"/>
-                          </a:solidFill>
-                          <a:latin typeface="Meiryo" pitchFamily="34" charset="0"/>
-                          <a:ea typeface="Meiryo" pitchFamily="34" charset="-122"/>
-                          <a:cs typeface="Meiryo" pitchFamily="34" charset="-120"/>
-                        </a:rPr>
-                        <a:t>式・比べ方</a:t>
-                      </a:r>
-                      <a:endParaRPr lang="ja-JP" sz="1800" dirty="0">
-                        <a:latin typeface="Meiryo" charset="0"/>
-                        <a:ea typeface="Meiryo" charset="0"/>
-                        <a:cs typeface="Meiryo" charset="0"/>
-                      </a:endParaRPr>
-                    </a:p>
-                  </a:txBody>
-                  <a:tcPr marL="109728" marR="109728" marT="54864" marB="54864" anchor="ctr">
-                    <a:lnL w="0" cap="flat" cmpd="sng" algn="ctr">
-                      <a:noFill/>
-                    </a:lnL>
-                    <a:lnR w="0" cap="flat" cmpd="sng" algn="ctr">
-                      <a:noFill/>
-                    </a:lnR>
-                    <a:lnT w="19050" cap="flat" cmpd="sng" algn="ctr">
-                      <a:solidFill>
-                        <a:srgbClr val="404040"/>
-                      </a:solidFill>
-                      <a:prstDash val="solid"/>
-                      <a:round/>
-                      <a:headEnd type="none" w="med" len="med"/>
-                      <a:tailEnd type="none" w="med" len="med"/>
-                    </a:lnT>
-                    <a:lnB w="12700" cap="flat" cmpd="sng" algn="ctr">
-                      <a:solidFill>
-                        <a:srgbClr val="404040"/>
-                      </a:solidFill>
-                      <a:prstDash val="solid"/>
-                      <a:round/>
-                      <a:headEnd type="none" w="med" len="med"/>
-                      <a:tailEnd type="none" w="med" len="med"/>
-                    </a:lnB>
-                  </a:tcPr>
-                </a:tc>
-                <a:tc>
-                  <a:txBody>
-                    <a:bodyPr/>
-                    <a:lstStyle/>
-                    <a:p>
-                      <a:pPr marL="0" indent="0" algn="l">
-                        <a:buNone/>
-                      </a:pPr>
-                      <a:r>
-                        <a:rPr lang="ja-JP" altLang="en-US" sz="1800" b="1" dirty="0">
-                          <a:solidFill>
-                            <a:srgbClr val="262626"/>
-                          </a:solidFill>
-                          <a:latin typeface="Meiryo" pitchFamily="34" charset="0"/>
-                          <a:ea typeface="Meiryo" pitchFamily="34" charset="-122"/>
-                          <a:cs typeface="Meiryo" pitchFamily="34" charset="-120"/>
-                        </a:rPr>
-                        <a:t>結果</a:t>
-                      </a:r>
-                      <a:endParaRPr lang="ja-JP" sz="1800" dirty="0">
-                        <a:latin typeface="Meiryo" charset="0"/>
-                        <a:ea typeface="Meiryo" charset="0"/>
-                        <a:cs typeface="Meiryo" charset="0"/>
-                      </a:endParaRPr>
-                    </a:p>
-                  </a:txBody>
-                  <a:tcPr marL="109728" marR="109728" marT="54864" marB="54864" anchor="ctr">
-                    <a:lnL w="0" cap="flat" cmpd="sng" algn="ctr">
-                      <a:noFill/>
-                    </a:lnL>
-                    <a:lnR w="0" cap="flat" cmpd="sng" algn="ctr">
-                      <a:noFill/>
-                    </a:lnR>
-                    <a:lnT w="19050" cap="flat" cmpd="sng" algn="ctr">
-                      <a:solidFill>
-                        <a:srgbClr val="404040"/>
-                      </a:solidFill>
-                      <a:prstDash val="solid"/>
-                      <a:round/>
-                      <a:headEnd type="none" w="med" len="med"/>
-                      <a:tailEnd type="none" w="med" len="med"/>
-                    </a:lnT>
-                    <a:lnB w="12700" cap="flat" cmpd="sng" algn="ctr">
-                      <a:solidFill>
-                        <a:srgbClr val="404040"/>
-                      </a:solidFill>
-                      <a:prstDash val="solid"/>
-                      <a:round/>
-                      <a:headEnd type="none" w="med" len="med"/>
-                      <a:tailEnd type="none" w="med" len="med"/>
-                    </a:lnB>
-                  </a:tcPr>
-                </a:tc>
-              </a:tr>
-              <a:tr h="822960">
+                    <a:lnB w="6350" cap="flat" cmpd="sng" algn="ctr">
+                      <a:solidFill>
+                        <a:srgbClr val="BFBFBF"/>
+                      </a:solidFill>
+                      <a:prstDash val="solid"/>
+                      <a:round/>
+                      <a:headEnd type="none" w="med" len="med"/>
+                      <a:tailEnd type="none" w="med" len="med"/>
+                    </a:lnB>
+                  </a:tcPr>
+                </a:tc>
                 <a:extLst>
                   <a:ext uri="{0D108BD9-81ED-4DB2-BD59-A6C34878D82A}">
                     <a16:rowId xmlns:a16="http://schemas.microsoft.com/office/drawing/2014/main" val="10001"/>
                   </a:ext>
                 </a:extLst>
-                <a:tc>
-                  <a:txBody>
-                    <a:bodyPr/>
-                    <a:lstStyle/>
-                    <a:p>
-                      <a:pPr marL="0" indent="0" algn="l">
-                        <a:buNone/>
-                      </a:pPr>
-                      <a:r>
-                        <a:rPr lang="ja-JP" altLang="en-US" sz="1800" dirty="0">
-                          <a:solidFill>
-                            <a:srgbClr val="262626"/>
-                          </a:solidFill>
-                          <a:latin typeface="Meiryo" pitchFamily="34" charset="0"/>
-                          <a:ea typeface="Meiryo" pitchFamily="34" charset="-122"/>
-                          <a:cs typeface="Meiryo" pitchFamily="34" charset="-120"/>
-                        </a:rPr>
-                        <a:t>チーム規模</a:t>
-                      </a:r>
-                      <a:endParaRPr lang="ja-JP" sz="1800" dirty="0">
-                        <a:latin typeface="Meiryo" charset="0"/>
-                        <a:ea typeface="Meiryo" charset="0"/>
-                        <a:cs typeface="Meiryo" charset="0"/>
-                      </a:endParaRPr>
-                    </a:p>
-                  </a:txBody>
-                  <a:tcPr marL="109728" marR="109728" marT="54864" marB="54864" anchor="ctr">
-                    <a:lnL w="0" cap="flat" cmpd="sng" algn="ctr">
-                      <a:noFill/>
-                    </a:lnL>
-                    <a:lnR w="0" cap="flat" cmpd="sng" algn="ctr">
-                      <a:noFill/>
-                    </a:lnR>
-                    <a:lnT w="12700" cap="flat" cmpd="sng" algn="ctr">
-                      <a:solidFill>
-                        <a:srgbClr val="404040"/>
-                      </a:solidFill>
-                      <a:prstDash val="solid"/>
-                      <a:round/>
-                      <a:headEnd type="none" w="med" len="med"/>
-                      <a:tailEnd type="none" w="med" len="med"/>
-                    </a:lnT>
-                    <a:lnB w="6350" cap="flat" cmpd="sng" algn="ctr">
-                      <a:solidFill>
-                        <a:srgbClr val="BFBFBF"/>
-                      </a:solidFill>
-                      <a:prstDash val="solid"/>
-                      <a:round/>
-                      <a:headEnd type="none" w="med" len="med"/>
-                      <a:tailEnd type="none" w="med" len="med"/>
-                    </a:lnB>
-                  </a:tcPr>
-                </a:tc>
-                <a:tc>
-                  <a:txBody>
-                    <a:bodyPr/>
-                    <a:lstStyle/>
-                    <a:p>
-                      <a:pPr marL="0" indent="0" algn="l">
-                        <a:buNone/>
-                      </a:pPr>
-                      <a:r>
-                        <a:rPr lang="ja-JP" altLang="en-US" sz="1800" dirty="0">
-                          <a:solidFill>
-                            <a:srgbClr val="262626"/>
-                          </a:solidFill>
-                          <a:latin typeface="Meiryo" pitchFamily="34" charset="0"/>
-                          <a:ea typeface="Meiryo" pitchFamily="34" charset="-122"/>
-                          <a:cs typeface="Meiryo" pitchFamily="34" charset="-120"/>
-                        </a:rPr>
-                        <a:t>最小二乗法</a:t>
-                      </a:r>
-                      <a:endParaRPr lang="ja-JP" sz="1800" dirty="0">
-                        <a:latin typeface="Meiryo" charset="0"/>
-                        <a:ea typeface="Meiryo" charset="0"/>
-                        <a:cs typeface="Meiryo" charset="0"/>
-                      </a:endParaRPr>
-                    </a:p>
-                    <a:p>
-                      <a:pPr marL="0" indent="0" algn="l">
-                        <a:buNone/>
-                      </a:pPr>
-                      <a:r>
-                        <a:rPr lang="ja-JP" altLang="en-US" sz="1800" dirty="0">
-                          <a:solidFill>
-                            <a:srgbClr val="262626"/>
-                          </a:solidFill>
-                          <a:latin typeface="Meiryo" pitchFamily="34" charset="0"/>
-                          <a:ea typeface="Meiryo" pitchFamily="34" charset="-122"/>
-                          <a:cs typeface="Meiryo" pitchFamily="34" charset="-120"/>
-                        </a:rPr>
-                        <a:t>係数 a の t 検定</a:t>
-                      </a:r>
-                      <a:endParaRPr lang="ja-JP" sz="1800" dirty="0">
-                        <a:latin typeface="Meiryo" charset="0"/>
-                        <a:ea typeface="Meiryo" charset="0"/>
-                        <a:cs typeface="Meiryo" charset="0"/>
-                      </a:endParaRPr>
-                    </a:p>
-                  </a:txBody>
-                  <a:tcPr marL="109728" marR="109728" marT="54864" marB="54864" anchor="ctr">
-                    <a:lnL w="0" cap="flat" cmpd="sng" algn="ctr">
-                      <a:noFill/>
-                    </a:lnL>
-                    <a:lnR w="0" cap="flat" cmpd="sng" algn="ctr">
-                      <a:noFill/>
-                    </a:lnR>
-                    <a:lnT w="12700" cap="flat" cmpd="sng" algn="ctr">
-                      <a:solidFill>
-                        <a:srgbClr val="404040"/>
-                      </a:solidFill>
-                      <a:prstDash val="solid"/>
-                      <a:round/>
-                      <a:headEnd type="none" w="med" len="med"/>
-                      <a:tailEnd type="none" w="med" len="med"/>
-                    </a:lnT>
-                    <a:lnB w="6350" cap="flat" cmpd="sng" algn="ctr">
-                      <a:solidFill>
-                        <a:srgbClr val="BFBFBF"/>
-                      </a:solidFill>
-                      <a:prstDash val="solid"/>
-                      <a:round/>
-                      <a:headEnd type="none" w="med" len="med"/>
-                      <a:tailEnd type="none" w="med" len="med"/>
-                    </a:lnB>
-                  </a:tcPr>
-                </a:tc>
-                <a:tc>
-                  <a:txBody>
-                    <a:bodyPr/>
-                    <a:lstStyle/>
-                    <a:p>
-                      <a:pPr marL="0" indent="0" algn="l">
-                        <a:buNone/>
-                      </a:pPr>
-                      <a:r>
-                        <a:rPr lang="ja-JP" altLang="en-US" sz="1800" dirty="0">
-                          <a:solidFill>
-                            <a:srgbClr val="262626"/>
-                          </a:solidFill>
-                          <a:latin typeface="Meiryo" pitchFamily="34" charset="0"/>
-                          <a:ea typeface="Meiryo" pitchFamily="34" charset="-122"/>
-                          <a:cs typeface="Meiryo" pitchFamily="34" charset="-120"/>
-                        </a:rPr>
-                        <a:t>非慣習性 ＝ 定数 ＋ a×log(著者数) ＋ b×log(参考文献数＋1) ＋ c×分野の偏り</a:t>
-                      </a:r>
-                      <a:endParaRPr lang="ja-JP" sz="1800" dirty="0">
-                        <a:latin typeface="Meiryo" charset="0"/>
-                        <a:ea typeface="Meiryo" charset="0"/>
-                        <a:cs typeface="Meiryo" charset="0"/>
-                      </a:endParaRPr>
-                    </a:p>
-                  </a:txBody>
-                  <a:tcPr marL="109728" marR="109728" marT="54864" marB="54864" anchor="ctr">
-                    <a:lnL w="0" cap="flat" cmpd="sng" algn="ctr">
-                      <a:noFill/>
-                    </a:lnL>
-                    <a:lnR w="0" cap="flat" cmpd="sng" algn="ctr">
-                      <a:noFill/>
-                    </a:lnR>
-                    <a:lnT w="12700" cap="flat" cmpd="sng" algn="ctr">
-                      <a:solidFill>
-                        <a:srgbClr val="404040"/>
-                      </a:solidFill>
-                      <a:prstDash val="solid"/>
-                      <a:round/>
-                      <a:headEnd type="none" w="med" len="med"/>
-                      <a:tailEnd type="none" w="med" len="med"/>
-                    </a:lnT>
-                    <a:lnB w="6350" cap="flat" cmpd="sng" algn="ctr">
-                      <a:solidFill>
-                        <a:srgbClr val="BFBFBF"/>
-                      </a:solidFill>
-                      <a:prstDash val="solid"/>
-                      <a:round/>
-                      <a:headEnd type="none" w="med" len="med"/>
-                      <a:tailEnd type="none" w="med" len="med"/>
-                    </a:lnB>
-                  </a:tcPr>
-                </a:tc>
-                <a:tc>
-                  <a:txBody>
-                    <a:bodyPr/>
-                    <a:lstStyle/>
-                    <a:p>
-                      <a:pPr marL="0" indent="0" algn="l">
-                        <a:buNone/>
-                      </a:pPr>
-                      <a:r>
-                        <a:rPr lang="ja-JP" altLang="en-US" sz="1800" dirty="0">
-                          <a:solidFill>
-                            <a:srgbClr val="262626"/>
-                          </a:solidFill>
-                          <a:latin typeface="Meiryo" pitchFamily="34" charset="0"/>
-                          <a:ea typeface="Meiryo" pitchFamily="34" charset="-122"/>
-                          <a:cs typeface="Meiryo" pitchFamily="34" charset="-120"/>
-                        </a:rPr>
-                        <a:t>a = −1.5</a:t>
-                      </a:r>
-                      <a:endParaRPr lang="ja-JP" sz="1800" dirty="0">
-                        <a:latin typeface="Meiryo" charset="0"/>
-                        <a:ea typeface="Meiryo" charset="0"/>
-                        <a:cs typeface="Meiryo" charset="0"/>
-                      </a:endParaRPr>
-                    </a:p>
-                    <a:p>
-                      <a:pPr marL="0" indent="0" algn="l">
-                        <a:buNone/>
-                      </a:pPr>
-                      <a:r>
-                        <a:rPr lang="ja-JP" altLang="en-US" sz="1800" dirty="0">
-                          <a:solidFill>
-                            <a:srgbClr val="262626"/>
-                          </a:solidFill>
-                          <a:latin typeface="Meiryo" pitchFamily="34" charset="0"/>
-                          <a:ea typeface="Meiryo" pitchFamily="34" charset="-122"/>
-                          <a:cs typeface="Meiryo" pitchFamily="34" charset="-120"/>
-                        </a:rPr>
-                        <a:t>p = 0.39</a:t>
-                      </a:r>
-                      <a:endParaRPr lang="ja-JP" sz="1800" dirty="0">
-                        <a:latin typeface="Meiryo" charset="0"/>
-                        <a:ea typeface="Meiryo" charset="0"/>
-                        <a:cs typeface="Meiryo" charset="0"/>
-                      </a:endParaRPr>
-                    </a:p>
-                  </a:txBody>
-                  <a:tcPr marL="109728" marR="109728" marT="54864" marB="54864" anchor="ctr">
-                    <a:lnL w="0" cap="flat" cmpd="sng" algn="ctr">
-                      <a:noFill/>
-                    </a:lnL>
-                    <a:lnR w="0" cap="flat" cmpd="sng" algn="ctr">
-                      <a:noFill/>
-                    </a:lnR>
-                    <a:lnT w="12700" cap="flat" cmpd="sng" algn="ctr">
-                      <a:solidFill>
-                        <a:srgbClr val="404040"/>
-                      </a:solidFill>
-                      <a:prstDash val="solid"/>
-                      <a:round/>
-                      <a:headEnd type="none" w="med" len="med"/>
-                      <a:tailEnd type="none" w="med" len="med"/>
-                    </a:lnT>
-                    <a:lnB w="6350" cap="flat" cmpd="sng" algn="ctr">
-                      <a:solidFill>
-                        <a:srgbClr val="BFBFBF"/>
-                      </a:solidFill>
-                      <a:prstDash val="solid"/>
-                      <a:round/>
-                      <a:headEnd type="none" w="med" len="med"/>
-                      <a:tailEnd type="none" w="med" len="med"/>
-                    </a:lnB>
-                  </a:tcPr>
-                </a:tc>
               </a:tr>
               <a:tr h="822960">
+                <a:tc>
+                  <a:txBody>
+                    <a:bodyPr/>
+                    <a:lstStyle/>
+                    <a:p>
+                      <a:pPr marL="0" indent="0" algn="l">
+                        <a:buNone/>
+                      </a:pPr>
+                      <a:r>
+                        <a:rPr lang="ja-JP" altLang="en-US" sz="1800" dirty="0">
+                          <a:solidFill>
+                            <a:srgbClr val="262626"/>
+                          </a:solidFill>
+                          <a:latin typeface="Meiryo" pitchFamily="34" charset="0"/>
+                          <a:ea typeface="Meiryo" pitchFamily="34" charset="-122"/>
+                          <a:cs typeface="Meiryo" pitchFamily="34" charset="-120"/>
+                        </a:rPr>
+                        <a:t>国際共同</a:t>
+                      </a:r>
+                      <a:endParaRPr lang="ja-JP" sz="1800" dirty="0">
+                        <a:latin typeface="Meiryo" charset="0"/>
+                        <a:ea typeface="Meiryo" charset="0"/>
+                        <a:cs typeface="Meiryo" charset="0"/>
+                      </a:endParaRPr>
+                    </a:p>
+                  </a:txBody>
+                  <a:tcPr marL="109728" marR="109728" marT="54864" marB="54864" anchor="ctr">
+                    <a:lnL w="0" cap="flat" cmpd="sng" algn="ctr">
+                      <a:noFill/>
+                    </a:lnL>
+                    <a:lnR w="0" cap="flat" cmpd="sng" algn="ctr">
+                      <a:noFill/>
+                    </a:lnR>
+                    <a:lnT w="6350" cap="flat" cmpd="sng" algn="ctr">
+                      <a:solidFill>
+                        <a:srgbClr val="BFBFBF"/>
+                      </a:solidFill>
+                      <a:prstDash val="solid"/>
+                      <a:round/>
+                      <a:headEnd type="none" w="med" len="med"/>
+                      <a:tailEnd type="none" w="med" len="med"/>
+                    </a:lnT>
+                    <a:lnB w="6350" cap="flat" cmpd="sng" algn="ctr">
+                      <a:solidFill>
+                        <a:srgbClr val="BFBFBF"/>
+                      </a:solidFill>
+                      <a:prstDash val="solid"/>
+                      <a:round/>
+                      <a:headEnd type="none" w="med" len="med"/>
+                      <a:tailEnd type="none" w="med" len="med"/>
+                    </a:lnB>
+                  </a:tcPr>
+                </a:tc>
+                <a:tc>
+                  <a:txBody>
+                    <a:bodyPr/>
+                    <a:lstStyle/>
+                    <a:p>
+                      <a:pPr marL="0" indent="0" algn="l">
+                        <a:buNone/>
+                      </a:pPr>
+                      <a:r>
+                        <a:rPr lang="ja-JP" altLang="en-US" sz="1800" dirty="0">
+                          <a:solidFill>
+                            <a:srgbClr val="262626"/>
+                          </a:solidFill>
+                          <a:latin typeface="Meiryo" pitchFamily="34" charset="0"/>
+                          <a:ea typeface="Meiryo" pitchFamily="34" charset="-122"/>
+                          <a:cs typeface="Meiryo" pitchFamily="34" charset="-120"/>
+                        </a:rPr>
+                        <a:t>基本の式に国際共同（1 か 0）を加え、その係数が0かどうか（t 検定）</a:t>
+                      </a:r>
+                      <a:endParaRPr lang="ja-JP" sz="1800" dirty="0">
+                        <a:latin typeface="Meiryo" charset="0"/>
+                        <a:ea typeface="Meiryo" charset="0"/>
+                        <a:cs typeface="Meiryo" charset="0"/>
+                      </a:endParaRPr>
+                    </a:p>
+                  </a:txBody>
+                  <a:tcPr marL="109728" marR="109728" marT="54864" marB="54864" anchor="ctr">
+                    <a:lnL w="0" cap="flat" cmpd="sng" algn="ctr">
+                      <a:noFill/>
+                    </a:lnL>
+                    <a:lnR w="0" cap="flat" cmpd="sng" algn="ctr">
+                      <a:noFill/>
+                    </a:lnR>
+                    <a:lnT w="6350" cap="flat" cmpd="sng" algn="ctr">
+                      <a:solidFill>
+                        <a:srgbClr val="BFBFBF"/>
+                      </a:solidFill>
+                      <a:prstDash val="solid"/>
+                      <a:round/>
+                      <a:headEnd type="none" w="med" len="med"/>
+                      <a:tailEnd type="none" w="med" len="med"/>
+                    </a:lnT>
+                    <a:lnB w="6350" cap="flat" cmpd="sng" algn="ctr">
+                      <a:solidFill>
+                        <a:srgbClr val="BFBFBF"/>
+                      </a:solidFill>
+                      <a:prstDash val="solid"/>
+                      <a:round/>
+                      <a:headEnd type="none" w="med" len="med"/>
+                      <a:tailEnd type="none" w="med" len="med"/>
+                    </a:lnB>
+                  </a:tcPr>
+                </a:tc>
+                <a:tc>
+                  <a:txBody>
+                    <a:bodyPr/>
+                    <a:lstStyle/>
+                    <a:p>
+                      <a:pPr marL="0" indent="0" algn="l">
+                        <a:buNone/>
+                      </a:pPr>
+                      <a:r>
+                        <a:rPr lang="ja-JP" altLang="en-US" sz="1800" dirty="0">
+                          <a:solidFill>
+                            <a:srgbClr val="262626"/>
+                          </a:solidFill>
+                          <a:latin typeface="Meiryo" pitchFamily="34" charset="0"/>
+                          <a:ea typeface="Meiryo" pitchFamily="34" charset="-122"/>
+                          <a:cs typeface="Meiryo" pitchFamily="34" charset="-120"/>
+                        </a:rPr>
+                        <a:t>係数 −0.76、p = 0.81</a:t>
+                      </a:r>
+                      <a:endParaRPr lang="ja-JP" sz="1800" dirty="0">
+                        <a:latin typeface="Meiryo" charset="0"/>
+                        <a:ea typeface="Meiryo" charset="0"/>
+                        <a:cs typeface="Meiryo" charset="0"/>
+                      </a:endParaRPr>
+                    </a:p>
+                  </a:txBody>
+                  <a:tcPr marL="109728" marR="109728" marT="54864" marB="54864" anchor="ctr">
+                    <a:lnL w="0" cap="flat" cmpd="sng" algn="ctr">
+                      <a:noFill/>
+                    </a:lnL>
+                    <a:lnR w="0" cap="flat" cmpd="sng" algn="ctr">
+                      <a:noFill/>
+                    </a:lnR>
+                    <a:lnT w="6350" cap="flat" cmpd="sng" algn="ctr">
+                      <a:solidFill>
+                        <a:srgbClr val="BFBFBF"/>
+                      </a:solidFill>
+                      <a:prstDash val="solid"/>
+                      <a:round/>
+                      <a:headEnd type="none" w="med" len="med"/>
+                      <a:tailEnd type="none" w="med" len="med"/>
+                    </a:lnT>
+                    <a:lnB w="6350" cap="flat" cmpd="sng" algn="ctr">
+                      <a:solidFill>
+                        <a:srgbClr val="BFBFBF"/>
+                      </a:solidFill>
+                      <a:prstDash val="solid"/>
+                      <a:round/>
+                      <a:headEnd type="none" w="med" len="med"/>
+                      <a:tailEnd type="none" w="med" len="med"/>
+                    </a:lnB>
+                  </a:tcPr>
+                </a:tc>
                 <a:extLst>
                   <a:ext uri="{0D108BD9-81ED-4DB2-BD59-A6C34878D82A}">
                     <a16:rowId xmlns:a16="http://schemas.microsoft.com/office/drawing/2014/main" val="10002"/>
                   </a:ext>
                 </a:extLst>
-                <a:tc>
-                  <a:txBody>
-                    <a:bodyPr/>
-                    <a:lstStyle/>
-                    <a:p>
-                      <a:pPr marL="0" indent="0" algn="l">
-                        <a:buNone/>
-                      </a:pPr>
-                      <a:r>
-                        <a:rPr lang="ja-JP" altLang="en-US" sz="1800" dirty="0">
-                          <a:solidFill>
-                            <a:srgbClr val="262626"/>
-                          </a:solidFill>
-                          <a:latin typeface="Meiryo" pitchFamily="34" charset="0"/>
-                          <a:ea typeface="Meiryo" pitchFamily="34" charset="-122"/>
-                          <a:cs typeface="Meiryo" pitchFamily="34" charset="-120"/>
-                        </a:rPr>
-                        <a:t>国際共同</a:t>
-                      </a:r>
-                      <a:endParaRPr lang="ja-JP" sz="1800" dirty="0">
-                        <a:latin typeface="Meiryo" charset="0"/>
-                        <a:ea typeface="Meiryo" charset="0"/>
-                        <a:cs typeface="Meiryo" charset="0"/>
-                      </a:endParaRPr>
-                    </a:p>
-                  </a:txBody>
-                  <a:tcPr marL="109728" marR="109728" marT="54864" marB="54864" anchor="ctr">
-                    <a:lnL w="0" cap="flat" cmpd="sng" algn="ctr">
-                      <a:noFill/>
-                    </a:lnL>
-                    <a:lnR w="0" cap="flat" cmpd="sng" algn="ctr">
-                      <a:noFill/>
-                    </a:lnR>
-                    <a:lnT w="6350" cap="flat" cmpd="sng" algn="ctr">
-                      <a:solidFill>
-                        <a:srgbClr val="BFBFBF"/>
-                      </a:solidFill>
-                      <a:prstDash val="solid"/>
-                      <a:round/>
-                      <a:headEnd type="none" w="med" len="med"/>
-                      <a:tailEnd type="none" w="med" len="med"/>
-                    </a:lnT>
-                    <a:lnB w="6350" cap="flat" cmpd="sng" algn="ctr">
-                      <a:solidFill>
-                        <a:srgbClr val="BFBFBF"/>
-                      </a:solidFill>
-                      <a:prstDash val="solid"/>
-                      <a:round/>
-                      <a:headEnd type="none" w="med" len="med"/>
-                      <a:tailEnd type="none" w="med" len="med"/>
-                    </a:lnB>
-                  </a:tcPr>
-                </a:tc>
-                <a:tc>
-                  <a:txBody>
-                    <a:bodyPr/>
-                    <a:lstStyle/>
-                    <a:p>
-                      <a:pPr marL="0" indent="0" algn="l">
-                        <a:buNone/>
-                      </a:pPr>
-                      <a:r>
-                        <a:rPr lang="ja-JP" altLang="en-US" sz="1800" dirty="0">
-                          <a:solidFill>
-                            <a:srgbClr val="262626"/>
-                          </a:solidFill>
-                          <a:latin typeface="Meiryo" pitchFamily="34" charset="0"/>
-                          <a:ea typeface="Meiryo" pitchFamily="34" charset="-122"/>
-                          <a:cs typeface="Meiryo" pitchFamily="34" charset="-120"/>
-                        </a:rPr>
-                        <a:t>最小二乗法</a:t>
-                      </a:r>
-                      <a:endParaRPr lang="ja-JP" sz="1800" dirty="0">
-                        <a:latin typeface="Meiryo" charset="0"/>
-                        <a:ea typeface="Meiryo" charset="0"/>
-                        <a:cs typeface="Meiryo" charset="0"/>
-                      </a:endParaRPr>
-                    </a:p>
-                    <a:p>
-                      <a:pPr marL="0" indent="0" algn="l">
-                        <a:buNone/>
-                      </a:pPr>
-                      <a:r>
-                        <a:rPr lang="ja-JP" altLang="en-US" sz="1800" dirty="0">
-                          <a:solidFill>
-                            <a:srgbClr val="262626"/>
-                          </a:solidFill>
-                          <a:latin typeface="Meiryo" pitchFamily="34" charset="0"/>
-                          <a:ea typeface="Meiryo" pitchFamily="34" charset="-122"/>
-                          <a:cs typeface="Meiryo" pitchFamily="34" charset="-120"/>
-                        </a:rPr>
-                        <a:t>係数の t 検定</a:t>
-                      </a:r>
-                      <a:endParaRPr lang="ja-JP" sz="1800" dirty="0">
-                        <a:latin typeface="Meiryo" charset="0"/>
-                        <a:ea typeface="Meiryo" charset="0"/>
-                        <a:cs typeface="Meiryo" charset="0"/>
-                      </a:endParaRPr>
-                    </a:p>
-                  </a:txBody>
-                  <a:tcPr marL="109728" marR="109728" marT="54864" marB="54864" anchor="ctr">
-                    <a:lnL w="0" cap="flat" cmpd="sng" algn="ctr">
-                      <a:noFill/>
-                    </a:lnL>
-                    <a:lnR w="0" cap="flat" cmpd="sng" algn="ctr">
-                      <a:noFill/>
-                    </a:lnR>
-                    <a:lnT w="6350" cap="flat" cmpd="sng" algn="ctr">
-                      <a:solidFill>
-                        <a:srgbClr val="BFBFBF"/>
-                      </a:solidFill>
-                      <a:prstDash val="solid"/>
-                      <a:round/>
-                      <a:headEnd type="none" w="med" len="med"/>
-                      <a:tailEnd type="none" w="med" len="med"/>
-                    </a:lnT>
-                    <a:lnB w="6350" cap="flat" cmpd="sng" algn="ctr">
-                      <a:solidFill>
-                        <a:srgbClr val="BFBFBF"/>
-                      </a:solidFill>
-                      <a:prstDash val="solid"/>
-                      <a:round/>
-                      <a:headEnd type="none" w="med" len="med"/>
-                      <a:tailEnd type="none" w="med" len="med"/>
-                    </a:lnB>
-                  </a:tcPr>
-                </a:tc>
-                <a:tc>
-                  <a:txBody>
-                    <a:bodyPr/>
-                    <a:lstStyle/>
-                    <a:p>
-                      <a:pPr marL="0" indent="0" algn="l">
-                        <a:buNone/>
-                      </a:pPr>
-                      <a:r>
-                        <a:rPr lang="ja-JP" altLang="en-US" sz="1800" dirty="0">
-                          <a:solidFill>
-                            <a:srgbClr val="262626"/>
-                          </a:solidFill>
-                          <a:latin typeface="Meiryo" pitchFamily="34" charset="0"/>
-                          <a:ea typeface="Meiryo" pitchFamily="34" charset="-122"/>
-                          <a:cs typeface="Meiryo" pitchFamily="34" charset="-120"/>
-                        </a:rPr>
-                        <a:t>上の式に国際共同（1 か 0）を追加</a:t>
-                      </a:r>
-                      <a:endParaRPr lang="ja-JP" sz="1800" dirty="0">
-                        <a:latin typeface="Meiryo" charset="0"/>
-                        <a:ea typeface="Meiryo" charset="0"/>
-                        <a:cs typeface="Meiryo" charset="0"/>
-                      </a:endParaRPr>
-                    </a:p>
-                  </a:txBody>
-                  <a:tcPr marL="109728" marR="109728" marT="54864" marB="54864" anchor="ctr">
-                    <a:lnL w="0" cap="flat" cmpd="sng" algn="ctr">
-                      <a:noFill/>
-                    </a:lnL>
-                    <a:lnR w="0" cap="flat" cmpd="sng" algn="ctr">
-                      <a:noFill/>
-                    </a:lnR>
-                    <a:lnT w="6350" cap="flat" cmpd="sng" algn="ctr">
-                      <a:solidFill>
-                        <a:srgbClr val="BFBFBF"/>
-                      </a:solidFill>
-                      <a:prstDash val="solid"/>
-                      <a:round/>
-                      <a:headEnd type="none" w="med" len="med"/>
-                      <a:tailEnd type="none" w="med" len="med"/>
-                    </a:lnT>
-                    <a:lnB w="6350" cap="flat" cmpd="sng" algn="ctr">
-                      <a:solidFill>
-                        <a:srgbClr val="BFBFBF"/>
-                      </a:solidFill>
-                      <a:prstDash val="solid"/>
-                      <a:round/>
-                      <a:headEnd type="none" w="med" len="med"/>
-                      <a:tailEnd type="none" w="med" len="med"/>
-                    </a:lnB>
-                  </a:tcPr>
-                </a:tc>
-                <a:tc>
-                  <a:txBody>
-                    <a:bodyPr/>
-                    <a:lstStyle/>
-                    <a:p>
-                      <a:pPr marL="0" indent="0" algn="l">
-                        <a:buNone/>
-                      </a:pPr>
-                      <a:r>
-                        <a:rPr lang="ja-JP" altLang="en-US" sz="1800" dirty="0">
-                          <a:solidFill>
-                            <a:srgbClr val="262626"/>
-                          </a:solidFill>
-                          <a:latin typeface="Meiryo" pitchFamily="34" charset="0"/>
-                          <a:ea typeface="Meiryo" pitchFamily="34" charset="-122"/>
-                          <a:cs typeface="Meiryo" pitchFamily="34" charset="-120"/>
-                        </a:rPr>
-                        <a:t>係数 −0.76</a:t>
-                      </a:r>
-                      <a:endParaRPr lang="ja-JP" sz="1800" dirty="0">
-                        <a:latin typeface="Meiryo" charset="0"/>
-                        <a:ea typeface="Meiryo" charset="0"/>
-                        <a:cs typeface="Meiryo" charset="0"/>
-                      </a:endParaRPr>
-                    </a:p>
-                    <a:p>
-                      <a:pPr marL="0" indent="0" algn="l">
-                        <a:buNone/>
-                      </a:pPr>
-                      <a:r>
-                        <a:rPr lang="ja-JP" altLang="en-US" sz="1800" dirty="0">
-                          <a:solidFill>
-                            <a:srgbClr val="262626"/>
-                          </a:solidFill>
-                          <a:latin typeface="Meiryo" pitchFamily="34" charset="0"/>
-                          <a:ea typeface="Meiryo" pitchFamily="34" charset="-122"/>
-                          <a:cs typeface="Meiryo" pitchFamily="34" charset="-120"/>
-                        </a:rPr>
-                        <a:t>p = 0.81</a:t>
-                      </a:r>
-                      <a:endParaRPr lang="ja-JP" sz="1800" dirty="0">
-                        <a:latin typeface="Meiryo" charset="0"/>
-                        <a:ea typeface="Meiryo" charset="0"/>
-                        <a:cs typeface="Meiryo" charset="0"/>
-                      </a:endParaRPr>
-                    </a:p>
-                  </a:txBody>
-                  <a:tcPr marL="109728" marR="109728" marT="54864" marB="54864" anchor="ctr">
-                    <a:lnL w="0" cap="flat" cmpd="sng" algn="ctr">
-                      <a:noFill/>
-                    </a:lnL>
-                    <a:lnR w="0" cap="flat" cmpd="sng" algn="ctr">
-                      <a:noFill/>
-                    </a:lnR>
-                    <a:lnT w="6350" cap="flat" cmpd="sng" algn="ctr">
-                      <a:solidFill>
-                        <a:srgbClr val="BFBFBF"/>
-                      </a:solidFill>
-                      <a:prstDash val="solid"/>
-                      <a:round/>
-                      <a:headEnd type="none" w="med" len="med"/>
-                      <a:tailEnd type="none" w="med" len="med"/>
-                    </a:lnT>
-                    <a:lnB w="6350" cap="flat" cmpd="sng" algn="ctr">
-                      <a:solidFill>
-                        <a:srgbClr val="BFBFBF"/>
-                      </a:solidFill>
-                      <a:prstDash val="solid"/>
-                      <a:round/>
-                      <a:headEnd type="none" w="med" len="med"/>
-                      <a:tailEnd type="none" w="med" len="med"/>
-                    </a:lnB>
-                  </a:tcPr>
-                </a:tc>
               </a:tr>
               <a:tr h="822960">
+                <a:tc>
+                  <a:txBody>
+                    <a:bodyPr/>
+                    <a:lstStyle/>
+                    <a:p>
+                      <a:pPr marL="0" indent="0" algn="l">
+                        <a:buNone/>
+                      </a:pPr>
+                      <a:r>
+                        <a:rPr lang="ja-JP" altLang="en-US" sz="1800" dirty="0">
+                          <a:solidFill>
+                            <a:srgbClr val="262626"/>
+                          </a:solidFill>
+                          <a:latin typeface="Meiryo" pitchFamily="34" charset="0"/>
+                          <a:ea typeface="Meiryo" pitchFamily="34" charset="-122"/>
+                          <a:cs typeface="Meiryo" pitchFamily="34" charset="-120"/>
+                        </a:rPr>
+                        <a:t>組織による差</a:t>
+                      </a:r>
+                      <a:endParaRPr lang="ja-JP" sz="1800" dirty="0">
+                        <a:latin typeface="Meiryo" charset="0"/>
+                        <a:ea typeface="Meiryo" charset="0"/>
+                        <a:cs typeface="Meiryo" charset="0"/>
+                      </a:endParaRPr>
+                    </a:p>
+                  </a:txBody>
+                  <a:tcPr marL="109728" marR="109728" marT="54864" marB="54864" anchor="ctr">
+                    <a:lnL w="0" cap="flat" cmpd="sng" algn="ctr">
+                      <a:noFill/>
+                    </a:lnL>
+                    <a:lnR w="0" cap="flat" cmpd="sng" algn="ctr">
+                      <a:noFill/>
+                    </a:lnR>
+                    <a:lnT w="6350" cap="flat" cmpd="sng" algn="ctr">
+                      <a:solidFill>
+                        <a:srgbClr val="BFBFBF"/>
+                      </a:solidFill>
+                      <a:prstDash val="solid"/>
+                      <a:round/>
+                      <a:headEnd type="none" w="med" len="med"/>
+                      <a:tailEnd type="none" w="med" len="med"/>
+                    </a:lnT>
+                    <a:lnB w="6350" cap="flat" cmpd="sng" algn="ctr">
+                      <a:solidFill>
+                        <a:srgbClr val="BFBFBF"/>
+                      </a:solidFill>
+                      <a:prstDash val="solid"/>
+                      <a:round/>
+                      <a:headEnd type="none" w="med" len="med"/>
+                      <a:tailEnd type="none" w="med" len="med"/>
+                    </a:lnB>
+                  </a:tcPr>
+                </a:tc>
+                <a:tc>
+                  <a:txBody>
+                    <a:bodyPr/>
+                    <a:lstStyle/>
+                    <a:p>
+                      <a:pPr marL="0" indent="0" algn="l">
+                        <a:buNone/>
+                      </a:pPr>
+                      <a:r>
+                        <a:rPr lang="ja-JP" altLang="en-US" sz="1800" dirty="0">
+                          <a:solidFill>
+                            <a:srgbClr val="262626"/>
+                          </a:solidFill>
+                          <a:latin typeface="Meiryo" pitchFamily="34" charset="0"/>
+                          <a:ea typeface="Meiryo" pitchFamily="34" charset="-122"/>
+                          <a:cs typeface="Meiryo" pitchFamily="34" charset="-120"/>
+                        </a:rPr>
+                        <a:t>基本の式から著者数を除いた式に組織（4区分）を加え、当てはまりが良くなるか（F 検定）</a:t>
+                      </a:r>
+                      <a:endParaRPr lang="ja-JP" sz="1800" dirty="0">
+                        <a:latin typeface="Meiryo" charset="0"/>
+                        <a:ea typeface="Meiryo" charset="0"/>
+                        <a:cs typeface="Meiryo" charset="0"/>
+                      </a:endParaRPr>
+                    </a:p>
+                  </a:txBody>
+                  <a:tcPr marL="109728" marR="109728" marT="54864" marB="54864" anchor="ctr">
+                    <a:lnL w="0" cap="flat" cmpd="sng" algn="ctr">
+                      <a:noFill/>
+                    </a:lnL>
+                    <a:lnR w="0" cap="flat" cmpd="sng" algn="ctr">
+                      <a:noFill/>
+                    </a:lnR>
+                    <a:lnT w="6350" cap="flat" cmpd="sng" algn="ctr">
+                      <a:solidFill>
+                        <a:srgbClr val="BFBFBF"/>
+                      </a:solidFill>
+                      <a:prstDash val="solid"/>
+                      <a:round/>
+                      <a:headEnd type="none" w="med" len="med"/>
+                      <a:tailEnd type="none" w="med" len="med"/>
+                    </a:lnT>
+                    <a:lnB w="6350" cap="flat" cmpd="sng" algn="ctr">
+                      <a:solidFill>
+                        <a:srgbClr val="BFBFBF"/>
+                      </a:solidFill>
+                      <a:prstDash val="solid"/>
+                      <a:round/>
+                      <a:headEnd type="none" w="med" len="med"/>
+                      <a:tailEnd type="none" w="med" len="med"/>
+                    </a:lnB>
+                  </a:tcPr>
+                </a:tc>
+                <a:tc>
+                  <a:txBody>
+                    <a:bodyPr/>
+                    <a:lstStyle/>
+                    <a:p>
+                      <a:pPr marL="0" indent="0" algn="l">
+                        <a:buNone/>
+                      </a:pPr>
+                      <a:r>
+                        <a:rPr lang="ja-JP" altLang="en-US" sz="1800" dirty="0">
+                          <a:solidFill>
+                            <a:srgbClr val="262626"/>
+                          </a:solidFill>
+                          <a:latin typeface="Meiryo" pitchFamily="34" charset="0"/>
+                          <a:ea typeface="Meiryo" pitchFamily="34" charset="-122"/>
+                          <a:cs typeface="Meiryo" pitchFamily="34" charset="-120"/>
+                        </a:rPr>
+                        <a:t>p = 0.027</a:t>
+                      </a:r>
+                      <a:endParaRPr lang="ja-JP" sz="1800" dirty="0">
+                        <a:latin typeface="Meiryo" charset="0"/>
+                        <a:ea typeface="Meiryo" charset="0"/>
+                        <a:cs typeface="Meiryo" charset="0"/>
+                      </a:endParaRPr>
+                    </a:p>
+                  </a:txBody>
+                  <a:tcPr marL="109728" marR="109728" marT="54864" marB="54864" anchor="ctr">
+                    <a:lnL w="0" cap="flat" cmpd="sng" algn="ctr">
+                      <a:noFill/>
+                    </a:lnL>
+                    <a:lnR w="0" cap="flat" cmpd="sng" algn="ctr">
+                      <a:noFill/>
+                    </a:lnR>
+                    <a:lnT w="6350" cap="flat" cmpd="sng" algn="ctr">
+                      <a:solidFill>
+                        <a:srgbClr val="BFBFBF"/>
+                      </a:solidFill>
+                      <a:prstDash val="solid"/>
+                      <a:round/>
+                      <a:headEnd type="none" w="med" len="med"/>
+                      <a:tailEnd type="none" w="med" len="med"/>
+                    </a:lnT>
+                    <a:lnB w="6350" cap="flat" cmpd="sng" algn="ctr">
+                      <a:solidFill>
+                        <a:srgbClr val="BFBFBF"/>
+                      </a:solidFill>
+                      <a:prstDash val="solid"/>
+                      <a:round/>
+                      <a:headEnd type="none" w="med" len="med"/>
+                      <a:tailEnd type="none" w="med" len="med"/>
+                    </a:lnB>
+                  </a:tcPr>
+                </a:tc>
                 <a:extLst>
                   <a:ext uri="{0D108BD9-81ED-4DB2-BD59-A6C34878D82A}">
-                    <a16:rowId xmlns:a16="http://schemas.microsoft.com/office/drawing/2014/main" val="10002"/>
+                    <a16:rowId xmlns:a16="http://schemas.microsoft.com/office/drawing/2014/main" val="10003"/>
                   </a:ext>
                 </a:extLst>
-                <a:tc>
-                  <a:txBody>
-                    <a:bodyPr/>
-                    <a:lstStyle/>
-                    <a:p>
-                      <a:pPr marL="0" indent="0" algn="l">
-                        <a:buNone/>
-                      </a:pPr>
-                      <a:r>
-                        <a:rPr lang="ja-JP" altLang="en-US" sz="1800" dirty="0">
-                          <a:solidFill>
-                            <a:srgbClr val="262626"/>
-                          </a:solidFill>
-                          <a:latin typeface="Meiryo" pitchFamily="34" charset="0"/>
-                          <a:ea typeface="Meiryo" pitchFamily="34" charset="-122"/>
-                          <a:cs typeface="Meiryo" pitchFamily="34" charset="-120"/>
-                        </a:rPr>
-                        <a:t>産学連携</a:t>
-                      </a:r>
-                      <a:endParaRPr lang="ja-JP" sz="1800" dirty="0">
-                        <a:latin typeface="Meiryo" charset="0"/>
-                        <a:ea typeface="Meiryo" charset="0"/>
-                        <a:cs typeface="Meiryo" charset="0"/>
-                      </a:endParaRPr>
-                    </a:p>
-                    <a:p>
-                      <a:pPr marL="0" indent="0" algn="l">
-                        <a:buNone/>
-                      </a:pPr>
-                      <a:r>
-                        <a:rPr lang="ja-JP" altLang="en-US" sz="1800" dirty="0">
-                          <a:solidFill>
-                            <a:srgbClr val="262626"/>
-                          </a:solidFill>
-                          <a:latin typeface="Meiryo" pitchFamily="34" charset="0"/>
-                          <a:ea typeface="Meiryo" pitchFamily="34" charset="-122"/>
-                          <a:cs typeface="Meiryo" pitchFamily="34" charset="-120"/>
-                        </a:rPr>
-                        <a:t>組織をまたぐ共同</a:t>
-                      </a:r>
-                      <a:endParaRPr lang="ja-JP" sz="1800" dirty="0">
-                        <a:latin typeface="Meiryo" charset="0"/>
-                        <a:ea typeface="Meiryo" charset="0"/>
-                        <a:cs typeface="Meiryo" charset="0"/>
-                      </a:endParaRPr>
-                    </a:p>
-                  </a:txBody>
-                  <a:tcPr marL="109728" marR="109728" marT="54864" marB="54864" anchor="ctr">
-                    <a:lnL w="0" cap="flat" cmpd="sng" algn="ctr">
-                      <a:noFill/>
-                    </a:lnL>
-                    <a:lnR w="0" cap="flat" cmpd="sng" algn="ctr">
-                      <a:noFill/>
-                    </a:lnR>
-                    <a:lnT w="6350" cap="flat" cmpd="sng" algn="ctr">
-                      <a:solidFill>
-                        <a:srgbClr val="BFBFBF"/>
-                      </a:solidFill>
-                      <a:prstDash val="solid"/>
-                      <a:round/>
-                      <a:headEnd type="none" w="med" len="med"/>
-                      <a:tailEnd type="none" w="med" len="med"/>
-                    </a:lnT>
-                    <a:lnB w="6350" cap="flat" cmpd="sng" algn="ctr">
-                      <a:solidFill>
-                        <a:srgbClr val="BFBFBF"/>
-                      </a:solidFill>
-                      <a:prstDash val="solid"/>
-                      <a:round/>
-                      <a:headEnd type="none" w="med" len="med"/>
-                      <a:tailEnd type="none" w="med" len="med"/>
-                    </a:lnB>
-                  </a:tcPr>
-                </a:tc>
-                <a:tc>
-                  <a:txBody>
-                    <a:bodyPr/>
-                    <a:lstStyle/>
-                    <a:p>
-                      <a:pPr marL="0" indent="0" algn="l">
-                        <a:buNone/>
-                      </a:pPr>
-                      <a:r>
-                        <a:rPr lang="ja-JP" altLang="en-US" sz="1800" dirty="0">
-                          <a:solidFill>
-                            <a:srgbClr val="262626"/>
-                          </a:solidFill>
-                          <a:latin typeface="Meiryo" pitchFamily="34" charset="0"/>
-                          <a:ea typeface="Meiryo" pitchFamily="34" charset="-122"/>
-                          <a:cs typeface="Meiryo" pitchFamily="34" charset="-120"/>
-                        </a:rPr>
-                        <a:t>マン・ホイットニーの</a:t>
-                      </a:r>
-                      <a:endParaRPr lang="ja-JP" sz="1800" dirty="0">
-                        <a:latin typeface="Meiryo" charset="0"/>
-                        <a:ea typeface="Meiryo" charset="0"/>
-                        <a:cs typeface="Meiryo" charset="0"/>
-                      </a:endParaRPr>
-                    </a:p>
-                    <a:p>
-                      <a:pPr marL="0" indent="0" algn="l">
-                        <a:buNone/>
-                      </a:pPr>
-                      <a:r>
-                        <a:rPr lang="ja-JP" altLang="en-US" sz="1800" dirty="0">
-                          <a:solidFill>
-                            <a:srgbClr val="262626"/>
-                          </a:solidFill>
-                          <a:latin typeface="Meiryo" pitchFamily="34" charset="0"/>
-                          <a:ea typeface="Meiryo" pitchFamily="34" charset="-122"/>
-                          <a:cs typeface="Meiryo" pitchFamily="34" charset="-120"/>
-                        </a:rPr>
-                        <a:t>U 検定（両側）</a:t>
-                      </a:r>
-                      <a:endParaRPr lang="ja-JP" sz="1800" dirty="0">
-                        <a:latin typeface="Meiryo" charset="0"/>
-                        <a:ea typeface="Meiryo" charset="0"/>
-                        <a:cs typeface="Meiryo" charset="0"/>
-                      </a:endParaRPr>
-                    </a:p>
-                  </a:txBody>
-                  <a:tcPr marL="109728" marR="109728" marT="54864" marB="54864" anchor="ctr">
-                    <a:lnL w="0" cap="flat" cmpd="sng" algn="ctr">
-                      <a:noFill/>
-                    </a:lnL>
-                    <a:lnR w="0" cap="flat" cmpd="sng" algn="ctr">
-                      <a:noFill/>
-                    </a:lnR>
-                    <a:lnT w="6350" cap="flat" cmpd="sng" algn="ctr">
-                      <a:solidFill>
-                        <a:srgbClr val="BFBFBF"/>
-                      </a:solidFill>
-                      <a:prstDash val="solid"/>
-                      <a:round/>
-                      <a:headEnd type="none" w="med" len="med"/>
-                      <a:tailEnd type="none" w="med" len="med"/>
-                    </a:lnT>
-                    <a:lnB w="6350" cap="flat" cmpd="sng" algn="ctr">
-                      <a:solidFill>
-                        <a:srgbClr val="BFBFBF"/>
-                      </a:solidFill>
-                      <a:prstDash val="solid"/>
-                      <a:round/>
-                      <a:headEnd type="none" w="med" len="med"/>
-                      <a:tailEnd type="none" w="med" len="med"/>
-                    </a:lnB>
-                  </a:tcPr>
-                </a:tc>
-                <a:tc>
-                  <a:txBody>
-                    <a:bodyPr/>
-                    <a:lstStyle/>
-                    <a:p>
-                      <a:pPr marL="0" indent="0" algn="l">
-                        <a:buNone/>
-                      </a:pPr>
-                      <a:r>
-                        <a:rPr lang="ja-JP" altLang="en-US" sz="1800" dirty="0">
-                          <a:solidFill>
-                            <a:srgbClr val="262626"/>
-                          </a:solidFill>
-                          <a:latin typeface="Meiryo" pitchFamily="34" charset="0"/>
-                          <a:ea typeface="Meiryo" pitchFamily="34" charset="-122"/>
-                          <a:cs typeface="Meiryo" pitchFamily="34" charset="-120"/>
-                        </a:rPr>
-                        <a:t>あり（224件、53件）となしで順位の分布を比較。統制なし</a:t>
-                      </a:r>
-                      <a:endParaRPr lang="ja-JP" sz="1800" dirty="0">
-                        <a:latin typeface="Meiryo" charset="0"/>
-                        <a:ea typeface="Meiryo" charset="0"/>
-                        <a:cs typeface="Meiryo" charset="0"/>
-                      </a:endParaRPr>
-                    </a:p>
-                  </a:txBody>
-                  <a:tcPr marL="109728" marR="109728" marT="54864" marB="54864" anchor="ctr">
-                    <a:lnL w="0" cap="flat" cmpd="sng" algn="ctr">
-                      <a:noFill/>
-                    </a:lnL>
-                    <a:lnR w="0" cap="flat" cmpd="sng" algn="ctr">
-                      <a:noFill/>
-                    </a:lnR>
-                    <a:lnT w="6350" cap="flat" cmpd="sng" algn="ctr">
-                      <a:solidFill>
-                        <a:srgbClr val="BFBFBF"/>
-                      </a:solidFill>
-                      <a:prstDash val="solid"/>
-                      <a:round/>
-                      <a:headEnd type="none" w="med" len="med"/>
-                      <a:tailEnd type="none" w="med" len="med"/>
-                    </a:lnT>
-                    <a:lnB w="6350" cap="flat" cmpd="sng" algn="ctr">
-                      <a:solidFill>
-                        <a:srgbClr val="BFBFBF"/>
-                      </a:solidFill>
-                      <a:prstDash val="solid"/>
-                      <a:round/>
-                      <a:headEnd type="none" w="med" len="med"/>
-                      <a:tailEnd type="none" w="med" len="med"/>
-                    </a:lnB>
-                  </a:tcPr>
-                </a:tc>
-                <a:tc>
-                  <a:txBody>
-                    <a:bodyPr/>
-                    <a:lstStyle/>
-                    <a:p>
-                      <a:pPr marL="0" indent="0" algn="l">
-                        <a:buNone/>
-                      </a:pPr>
-                      <a:r>
-                        <a:rPr lang="ja-JP" altLang="en-US" sz="1800" dirty="0">
-                          <a:solidFill>
-                            <a:srgbClr val="262626"/>
-                          </a:solidFill>
-                          <a:latin typeface="Meiryo" pitchFamily="34" charset="0"/>
-                          <a:ea typeface="Meiryo" pitchFamily="34" charset="-122"/>
-                          <a:cs typeface="Meiryo" pitchFamily="34" charset="-120"/>
-                        </a:rPr>
-                        <a:t>p = 0.06</a:t>
-                      </a:r>
-                      <a:endParaRPr lang="ja-JP" sz="1800" dirty="0">
-                        <a:latin typeface="Meiryo" charset="0"/>
-                        <a:ea typeface="Meiryo" charset="0"/>
-                        <a:cs typeface="Meiryo" charset="0"/>
-                      </a:endParaRPr>
-                    </a:p>
-                    <a:p>
-                      <a:pPr marL="0" indent="0" algn="l">
-                        <a:buNone/>
-                      </a:pPr>
-                      <a:r>
-                        <a:rPr lang="ja-JP" altLang="en-US" sz="1800" dirty="0">
-                          <a:solidFill>
-                            <a:srgbClr val="262626"/>
-                          </a:solidFill>
-                          <a:latin typeface="Meiryo" pitchFamily="34" charset="0"/>
-                          <a:ea typeface="Meiryo" pitchFamily="34" charset="-122"/>
-                          <a:cs typeface="Meiryo" pitchFamily="34" charset="-120"/>
-                        </a:rPr>
-                        <a:t>p = 0.85</a:t>
-                      </a:r>
-                      <a:endParaRPr lang="ja-JP" sz="1800" dirty="0">
-                        <a:latin typeface="Meiryo" charset="0"/>
-                        <a:ea typeface="Meiryo" charset="0"/>
-                        <a:cs typeface="Meiryo" charset="0"/>
-                      </a:endParaRPr>
-                    </a:p>
-                  </a:txBody>
-                  <a:tcPr marL="109728" marR="109728" marT="54864" marB="54864" anchor="ctr">
-                    <a:lnL w="0" cap="flat" cmpd="sng" algn="ctr">
-                      <a:noFill/>
-                    </a:lnL>
-                    <a:lnR w="0" cap="flat" cmpd="sng" algn="ctr">
-                      <a:noFill/>
-                    </a:lnR>
-                    <a:lnT w="6350" cap="flat" cmpd="sng" algn="ctr">
-                      <a:solidFill>
-                        <a:srgbClr val="BFBFBF"/>
-                      </a:solidFill>
-                      <a:prstDash val="solid"/>
-                      <a:round/>
-                      <a:headEnd type="none" w="med" len="med"/>
-                      <a:tailEnd type="none" w="med" len="med"/>
-                    </a:lnT>
-                    <a:lnB w="6350" cap="flat" cmpd="sng" algn="ctr">
-                      <a:solidFill>
-                        <a:srgbClr val="BFBFBF"/>
-                      </a:solidFill>
-                      <a:prstDash val="solid"/>
-                      <a:round/>
-                      <a:headEnd type="none" w="med" len="med"/>
-                      <a:tailEnd type="none" w="med" len="med"/>
-                    </a:lnB>
-                  </a:tcPr>
-                </a:tc>
               </a:tr>
               <a:tr h="822960">
+                <a:tc>
+                  <a:txBody>
+                    <a:bodyPr/>
+                    <a:lstStyle/>
+                    <a:p>
+                      <a:pPr marL="0" indent="0" algn="l">
+                        <a:buNone/>
+                      </a:pPr>
+                      <a:r>
+                        <a:rPr lang="ja-JP" altLang="en-US" sz="1800" dirty="0">
+                          <a:solidFill>
+                            <a:srgbClr val="262626"/>
+                          </a:solidFill>
+                          <a:latin typeface="Meiryo" pitchFamily="34" charset="0"/>
+                          <a:ea typeface="Meiryo" pitchFamily="34" charset="-122"/>
+                          <a:cs typeface="Meiryo" pitchFamily="34" charset="-120"/>
+                        </a:rPr>
+                        <a:t>産学連携</a:t>
+                      </a:r>
+                      <a:endParaRPr lang="ja-JP" sz="1800" dirty="0">
+                        <a:latin typeface="Meiryo" charset="0"/>
+                        <a:ea typeface="Meiryo" charset="0"/>
+                        <a:cs typeface="Meiryo" charset="0"/>
+                      </a:endParaRPr>
+                    </a:p>
+                    <a:p>
+                      <a:pPr marL="0" indent="0" algn="l">
+                        <a:buNone/>
+                      </a:pPr>
+                      <a:r>
+                        <a:rPr lang="ja-JP" altLang="en-US" sz="1800" dirty="0">
+                          <a:solidFill>
+                            <a:srgbClr val="262626"/>
+                          </a:solidFill>
+                          <a:latin typeface="Meiryo" pitchFamily="34" charset="0"/>
+                          <a:ea typeface="Meiryo" pitchFamily="34" charset="-122"/>
+                          <a:cs typeface="Meiryo" pitchFamily="34" charset="-120"/>
+                        </a:rPr>
+                        <a:t>組織をまたぐ共同</a:t>
+                      </a:r>
+                      <a:endParaRPr lang="ja-JP" sz="1800" dirty="0">
+                        <a:latin typeface="Meiryo" charset="0"/>
+                        <a:ea typeface="Meiryo" charset="0"/>
+                        <a:cs typeface="Meiryo" charset="0"/>
+                      </a:endParaRPr>
+                    </a:p>
+                  </a:txBody>
+                  <a:tcPr marL="109728" marR="109728" marT="54864" marB="54864" anchor="ctr">
+                    <a:lnL w="0" cap="flat" cmpd="sng" algn="ctr">
+                      <a:noFill/>
+                    </a:lnL>
+                    <a:lnR w="0" cap="flat" cmpd="sng" algn="ctr">
+                      <a:noFill/>
+                    </a:lnR>
+                    <a:lnT w="6350" cap="flat" cmpd="sng" algn="ctr">
+                      <a:solidFill>
+                        <a:srgbClr val="BFBFBF"/>
+                      </a:solidFill>
+                      <a:prstDash val="solid"/>
+                      <a:round/>
+                      <a:headEnd type="none" w="med" len="med"/>
+                      <a:tailEnd type="none" w="med" len="med"/>
+                    </a:lnT>
+                    <a:lnB w="19050" cap="flat" cmpd="sng" algn="ctr">
+                      <a:solidFill>
+                        <a:srgbClr val="404040"/>
+                      </a:solidFill>
+                      <a:prstDash val="solid"/>
+                      <a:round/>
+                      <a:headEnd type="none" w="med" len="med"/>
+                      <a:tailEnd type="none" w="med" len="med"/>
+                    </a:lnB>
+                  </a:tcPr>
+                </a:tc>
+                <a:tc>
+                  <a:txBody>
+                    <a:bodyPr/>
+                    <a:lstStyle/>
+                    <a:p>
+                      <a:pPr marL="0" indent="0" algn="l">
+                        <a:buNone/>
+                      </a:pPr>
+                      <a:r>
+                        <a:rPr lang="ja-JP" altLang="en-US" sz="1800" dirty="0">
+                          <a:solidFill>
+                            <a:srgbClr val="262626"/>
+                          </a:solidFill>
+                          <a:latin typeface="Meiryo" pitchFamily="34" charset="0"/>
+                          <a:ea typeface="Meiryo" pitchFamily="34" charset="-122"/>
+                          <a:cs typeface="Meiryo" pitchFamily="34" charset="-120"/>
+                        </a:rPr>
+                        <a:t>あり（224件、53件）となしで順位の分布を比較（U 検定、両側、統制なし）</a:t>
+                      </a:r>
+                      <a:endParaRPr lang="ja-JP" sz="1800" dirty="0">
+                        <a:latin typeface="Meiryo" charset="0"/>
+                        <a:ea typeface="Meiryo" charset="0"/>
+                        <a:cs typeface="Meiryo" charset="0"/>
+                      </a:endParaRPr>
+                    </a:p>
+                  </a:txBody>
+                  <a:tcPr marL="109728" marR="109728" marT="54864" marB="54864" anchor="ctr">
+                    <a:lnL w="0" cap="flat" cmpd="sng" algn="ctr">
+                      <a:noFill/>
+                    </a:lnL>
+                    <a:lnR w="0" cap="flat" cmpd="sng" algn="ctr">
+                      <a:noFill/>
+                    </a:lnR>
+                    <a:lnT w="6350" cap="flat" cmpd="sng" algn="ctr">
+                      <a:solidFill>
+                        <a:srgbClr val="BFBFBF"/>
+                      </a:solidFill>
+                      <a:prstDash val="solid"/>
+                      <a:round/>
+                      <a:headEnd type="none" w="med" len="med"/>
+                      <a:tailEnd type="none" w="med" len="med"/>
+                    </a:lnT>
+                    <a:lnB w="19050" cap="flat" cmpd="sng" algn="ctr">
+                      <a:solidFill>
+                        <a:srgbClr val="404040"/>
+                      </a:solidFill>
+                      <a:prstDash val="solid"/>
+                      <a:round/>
+                      <a:headEnd type="none" w="med" len="med"/>
+                      <a:tailEnd type="none" w="med" len="med"/>
+                    </a:lnB>
+                  </a:tcPr>
+                </a:tc>
+                <a:tc>
+                  <a:txBody>
+                    <a:bodyPr/>
+                    <a:lstStyle/>
+                    <a:p>
+                      <a:pPr marL="0" indent="0" algn="l">
+                        <a:buNone/>
+                      </a:pPr>
+                      <a:r>
+                        <a:rPr lang="ja-JP" altLang="en-US" sz="1800" dirty="0">
+                          <a:solidFill>
+                            <a:srgbClr val="262626"/>
+                          </a:solidFill>
+                          <a:latin typeface="Meiryo" pitchFamily="34" charset="0"/>
+                          <a:ea typeface="Meiryo" pitchFamily="34" charset="-122"/>
+                          <a:cs typeface="Meiryo" pitchFamily="34" charset="-120"/>
+                        </a:rPr>
+                        <a:t>p = 0.06、0.85</a:t>
+                      </a:r>
+                      <a:endParaRPr lang="ja-JP" sz="1800" dirty="0">
+                        <a:latin typeface="Meiryo" charset="0"/>
+                        <a:ea typeface="Meiryo" charset="0"/>
+                        <a:cs typeface="Meiryo" charset="0"/>
+                      </a:endParaRPr>
+                    </a:p>
+                  </a:txBody>
+                  <a:tcPr marL="109728" marR="109728" marT="54864" marB="54864" anchor="ctr">
+                    <a:lnL w="0" cap="flat" cmpd="sng" algn="ctr">
+                      <a:noFill/>
+                    </a:lnL>
+                    <a:lnR w="0" cap="flat" cmpd="sng" algn="ctr">
+                      <a:noFill/>
+                    </a:lnR>
+                    <a:lnT w="6350" cap="flat" cmpd="sng" algn="ctr">
+                      <a:solidFill>
+                        <a:srgbClr val="BFBFBF"/>
+                      </a:solidFill>
+                      <a:prstDash val="solid"/>
+                      <a:round/>
+                      <a:headEnd type="none" w="med" len="med"/>
+                      <a:tailEnd type="none" w="med" len="med"/>
+                    </a:lnT>
+                    <a:lnB w="19050" cap="flat" cmpd="sng" algn="ctr">
+                      <a:solidFill>
+                        <a:srgbClr val="404040"/>
+                      </a:solidFill>
+                      <a:prstDash val="solid"/>
+                      <a:round/>
+                      <a:headEnd type="none" w="med" len="med"/>
+                      <a:tailEnd type="none" w="med" len="med"/>
+                    </a:lnB>
+                  </a:tcPr>
+                </a:tc>
                 <a:extLst>
                   <a:ext uri="{0D108BD9-81ED-4DB2-BD59-A6C34878D82A}">
                     <a16:rowId xmlns:a16="http://schemas.microsoft.com/office/drawing/2014/main" val="10004"/>
                   </a:ext>
                 </a:extLst>
-                <a:tc>
-                  <a:txBody>
-                    <a:bodyPr/>
-                    <a:lstStyle/>
-                    <a:p>
-                      <a:pPr marL="0" indent="0" algn="l">
-                        <a:buNone/>
-                      </a:pPr>
-                      <a:r>
-                        <a:rPr lang="ja-JP" altLang="en-US" sz="1800" dirty="0">
-                          <a:solidFill>
-                            <a:srgbClr val="262626"/>
-                          </a:solidFill>
-                          <a:latin typeface="Meiryo" pitchFamily="34" charset="0"/>
-                          <a:ea typeface="Meiryo" pitchFamily="34" charset="-122"/>
-                          <a:cs typeface="Meiryo" pitchFamily="34" charset="-120"/>
-                        </a:rPr>
-                        <a:t>組織による差</a:t>
-                      </a:r>
-                      <a:endParaRPr lang="ja-JP" sz="1800" dirty="0">
-                        <a:latin typeface="Meiryo" charset="0"/>
-                        <a:ea typeface="Meiryo" charset="0"/>
-                        <a:cs typeface="Meiryo" charset="0"/>
-                      </a:endParaRPr>
-                    </a:p>
-                  </a:txBody>
-                  <a:tcPr marL="109728" marR="109728" marT="54864" marB="54864" anchor="ctr">
-                    <a:lnL w="0" cap="flat" cmpd="sng" algn="ctr">
-                      <a:noFill/>
-                    </a:lnL>
-                    <a:lnR w="0" cap="flat" cmpd="sng" algn="ctr">
-                      <a:noFill/>
-                    </a:lnR>
-                    <a:lnT w="6350" cap="flat" cmpd="sng" algn="ctr">
-                      <a:solidFill>
-                        <a:srgbClr val="BFBFBF"/>
-                      </a:solidFill>
-                      <a:prstDash val="solid"/>
-                      <a:round/>
-                      <a:headEnd type="none" w="med" len="med"/>
-                      <a:tailEnd type="none" w="med" len="med"/>
-                    </a:lnT>
-                    <a:lnB w="19050" cap="flat" cmpd="sng" algn="ctr">
-                      <a:solidFill>
-                        <a:srgbClr val="404040"/>
-                      </a:solidFill>
-                      <a:prstDash val="solid"/>
-                      <a:round/>
-                      <a:headEnd type="none" w="med" len="med"/>
-                      <a:tailEnd type="none" w="med" len="med"/>
-                    </a:lnB>
-                  </a:tcPr>
-                </a:tc>
-                <a:tc>
-                  <a:txBody>
-                    <a:bodyPr/>
-                    <a:lstStyle/>
-                    <a:p>
-                      <a:pPr marL="0" indent="0" algn="l">
-                        <a:buNone/>
-                      </a:pPr>
-                      <a:r>
-                        <a:rPr lang="ja-JP" altLang="en-US" sz="1800" dirty="0">
-                          <a:solidFill>
-                            <a:srgbClr val="262626"/>
-                          </a:solidFill>
-                          <a:latin typeface="Meiryo" pitchFamily="34" charset="0"/>
-                          <a:ea typeface="Meiryo" pitchFamily="34" charset="-122"/>
-                          <a:cs typeface="Meiryo" pitchFamily="34" charset="-120"/>
-                        </a:rPr>
-                        <a:t>F 検定</a:t>
-                      </a:r>
-                      <a:endParaRPr lang="ja-JP" sz="1800" dirty="0">
-                        <a:latin typeface="Meiryo" charset="0"/>
-                        <a:ea typeface="Meiryo" charset="0"/>
-                        <a:cs typeface="Meiryo" charset="0"/>
-                      </a:endParaRPr>
-                    </a:p>
-                  </a:txBody>
-                  <a:tcPr marL="109728" marR="109728" marT="54864" marB="54864" anchor="ctr">
-                    <a:lnL w="0" cap="flat" cmpd="sng" algn="ctr">
-                      <a:noFill/>
-                    </a:lnL>
-                    <a:lnR w="0" cap="flat" cmpd="sng" algn="ctr">
-                      <a:noFill/>
-                    </a:lnR>
-                    <a:lnT w="6350" cap="flat" cmpd="sng" algn="ctr">
-                      <a:solidFill>
-                        <a:srgbClr val="BFBFBF"/>
-                      </a:solidFill>
-                      <a:prstDash val="solid"/>
-                      <a:round/>
-                      <a:headEnd type="none" w="med" len="med"/>
-                      <a:tailEnd type="none" w="med" len="med"/>
-                    </a:lnT>
-                    <a:lnB w="19050" cap="flat" cmpd="sng" algn="ctr">
-                      <a:solidFill>
-                        <a:srgbClr val="404040"/>
-                      </a:solidFill>
-                      <a:prstDash val="solid"/>
-                      <a:round/>
-                      <a:headEnd type="none" w="med" len="med"/>
-                      <a:tailEnd type="none" w="med" len="med"/>
-                    </a:lnB>
-                  </a:tcPr>
-                </a:tc>
-                <a:tc>
-                  <a:txBody>
-                    <a:bodyPr/>
-                    <a:lstStyle/>
-                    <a:p>
-                      <a:pPr marL="0" indent="0" algn="l">
-                        <a:buNone/>
-                      </a:pPr>
-                      <a:r>
-                        <a:rPr lang="ja-JP" altLang="en-US" sz="1800" dirty="0">
-                          <a:solidFill>
-                            <a:srgbClr val="262626"/>
-                          </a:solidFill>
-                          <a:latin typeface="Meiryo" pitchFamily="34" charset="0"/>
-                          <a:ea typeface="Meiryo" pitchFamily="34" charset="-122"/>
-                          <a:cs typeface="Meiryo" pitchFamily="34" charset="-120"/>
-                        </a:rPr>
-                        <a:t>参考文献数と分野の偏りだけの式に、組織（4区分）を加えて比較</a:t>
-                      </a:r>
-                      <a:endParaRPr lang="ja-JP" sz="1800" dirty="0">
-                        <a:latin typeface="Meiryo" charset="0"/>
-                        <a:ea typeface="Meiryo" charset="0"/>
-                        <a:cs typeface="Meiryo" charset="0"/>
-                      </a:endParaRPr>
-                    </a:p>
-                  </a:txBody>
-                  <a:tcPr marL="109728" marR="109728" marT="54864" marB="54864" anchor="ctr">
-                    <a:lnL w="0" cap="flat" cmpd="sng" algn="ctr">
-                      <a:noFill/>
-                    </a:lnL>
-                    <a:lnR w="0" cap="flat" cmpd="sng" algn="ctr">
-                      <a:noFill/>
-                    </a:lnR>
-                    <a:lnT w="6350" cap="flat" cmpd="sng" algn="ctr">
-                      <a:solidFill>
-                        <a:srgbClr val="BFBFBF"/>
-                      </a:solidFill>
-                      <a:prstDash val="solid"/>
-                      <a:round/>
-                      <a:headEnd type="none" w="med" len="med"/>
-                      <a:tailEnd type="none" w="med" len="med"/>
-                    </a:lnT>
-                    <a:lnB w="19050" cap="flat" cmpd="sng" algn="ctr">
-                      <a:solidFill>
-                        <a:srgbClr val="404040"/>
-                      </a:solidFill>
-                      <a:prstDash val="solid"/>
-                      <a:round/>
-                      <a:headEnd type="none" w="med" len="med"/>
-                      <a:tailEnd type="none" w="med" len="med"/>
-                    </a:lnB>
-                  </a:tcPr>
-                </a:tc>
-                <a:tc>
-                  <a:txBody>
-                    <a:bodyPr/>
-                    <a:lstStyle/>
-                    <a:p>
-                      <a:pPr marL="0" indent="0" algn="l">
-                        <a:buNone/>
-                      </a:pPr>
-                      <a:r>
-                        <a:rPr lang="ja-JP" altLang="en-US" sz="1800" dirty="0">
-                          <a:solidFill>
-                            <a:srgbClr val="262626"/>
-                          </a:solidFill>
-                          <a:latin typeface="Meiryo" pitchFamily="34" charset="0"/>
-                          <a:ea typeface="Meiryo" pitchFamily="34" charset="-122"/>
-                          <a:cs typeface="Meiryo" pitchFamily="34" charset="-120"/>
-                        </a:rPr>
-                        <a:t>p = 0.027</a:t>
-                      </a:r>
-                      <a:endParaRPr lang="ja-JP" sz="1800" dirty="0">
-                        <a:latin typeface="Meiryo" charset="0"/>
-                        <a:ea typeface="Meiryo" charset="0"/>
-                        <a:cs typeface="Meiryo" charset="0"/>
-                      </a:endParaRPr>
-                    </a:p>
-                  </a:txBody>
-                  <a:tcPr marL="109728" marR="109728" marT="54864" marB="54864" anchor="ctr">
-                    <a:lnL w="0" cap="flat" cmpd="sng" algn="ctr">
-                      <a:noFill/>
-                    </a:lnL>
-                    <a:lnR w="0" cap="flat" cmpd="sng" algn="ctr">
-                      <a:noFill/>
-                    </a:lnR>
-                    <a:lnT w="6350" cap="flat" cmpd="sng" algn="ctr">
-                      <a:solidFill>
-                        <a:srgbClr val="BFBFBF"/>
-                      </a:solidFill>
-                      <a:prstDash val="solid"/>
-                      <a:round/>
-                      <a:headEnd type="none" w="med" len="med"/>
-                      <a:tailEnd type="none" w="med" len="med"/>
-                    </a:lnT>
-                    <a:lnB w="19050" cap="flat" cmpd="sng" algn="ctr">
-                      <a:solidFill>
-                        <a:srgbClr val="404040"/>
-                      </a:solidFill>
-                      <a:prstDash val="solid"/>
-                      <a:round/>
-                      <a:headEnd type="none" w="med" len="med"/>
-                      <a:tailEnd type="none" w="med" len="med"/>
-                    </a:lnB>
-                  </a:tcPr>
-                </a:tc>
               </a:tr>
             </a:tbl>
           </a:graphicData>
@@ -9234,8 +8921,8 @@
         </p:nvSpPr>
         <p:spPr>
           <a:xfrm>
-            <a:off x="548640" y="5641848"/>
-            <a:ext cx="11094415" cy="713232"/>
+            <a:off x="548640" y="5870448"/>
+            <a:ext cx="11094415" cy="393192"/>
           </a:xfrm>
           <a:prstGeom prst="rect">
             <a:avLst/>

--- a/docs/slides/toyota_novelty_progress.pptx
+++ b/docs/slides/toyota_novelty_progress.pptx
@@ -5,7 +5,7 @@
     <p:sldMasterId id="2147483648" r:id="rId1"/>
   </p:sldMasterIdLst>
   <p:notesMasterIdLst>
-    <p:notesMasterId r:id="rId16"/>
+    <p:notesMasterId r:id="rId15"/>
   </p:notesMasterIdLst>
   <p:sldIdLst>
     <p:sldId id="256" r:id="rId2"/>
@@ -15,15 +15,16 @@
     <p:sldId id="260" r:id="rId6"/>
     <p:sldId id="261" r:id="rId7"/>
     <p:sldId id="262" r:id="rId8"/>
+    <p:sldId id="272" r:id="rId20"/>
     <p:sldId id="263" r:id="rId9"/>
+    <p:sldId id="273" r:id="rId21"/>
     <p:sldId id="264" r:id="rId10"/>
     <p:sldId id="268" r:id="rId11"/>
     <p:sldId id="269" r:id="rId12"/>
-    <p:sldId id="270" r:id="rId21"/>
-    <p:sldId id="271" r:id="rId22"/>
-    <p:sldId id="266" r:id="rId13"/>
-    <p:sldId id="265" r:id="rId14"/>
-    <p:sldId id="267" r:id="rId15"/>
+    <p:sldId id="274" r:id="rId22"/>
+    <p:sldId id="270" r:id="rId13"/>
+    <p:sldId id="271" r:id="rId14"/>
+    <p:sldId id="275" r:id="rId23"/>
   </p:sldIdLst>
   <p:sldSz cx="12192000" cy="6858000"/>
   <p:notesSz cx="6858000" cy="12192000"/>
@@ -501,274 +502,6 @@
             <a:fld id="{F7021451-1387-4CA6-816F-3879F97B5CBC}" type="slidenum">
               <a:rPr lang="en-US"/>
               <a:t>11</a:t>
-            </a:fld>
-            <a:endParaRPr lang="en-US"/>
-          </a:p>
-        </p:txBody>
-      </p:sp>
-    </p:spTree>
-    <p:extLst>
-      <p:ext uri="{BB962C8B-B14F-4D97-AF65-F5344CB8AC3E}">
-        <p14:creationId xmlns:p14="http://schemas.microsoft.com/office/powerpoint/2010/main" val="1024086991"/>
-      </p:ext>
-    </p:extLst>
-  </p:cSld>
-  <p:clrMapOvr>
-    <a:masterClrMapping/>
-  </p:clrMapOvr>
-</p:notes>
-</file>
-
-<file path=ppt/notesSlides/notesSlide12.xml><?xml version="1.0" encoding="utf-8"?>
-<p:notes xmlns:a="http://schemas.openxmlformats.org/drawingml/2006/main" xmlns:r="http://schemas.openxmlformats.org/officeDocument/2006/relationships" xmlns:p="http://schemas.openxmlformats.org/presentationml/2006/main">
-  <p:cSld>
-    <p:spTree>
-      <p:nvGrpSpPr>
-        <p:cNvPr id="1" name=""/>
-        <p:cNvGrpSpPr/>
-        <p:nvPr/>
-      </p:nvGrpSpPr>
-      <p:grpSpPr>
-        <a:xfrm>
-          <a:off x="0" y="0"/>
-          <a:ext cx="0" cy="0"/>
-          <a:chOff x="0" y="0"/>
-          <a:chExt cx="0" cy="0"/>
-        </a:xfrm>
-      </p:grpSpPr>
-      <p:sp>
-        <p:nvSpPr>
-          <p:cNvPr id="2" name="Slide Image Placeholder 1"/>
-          <p:cNvSpPr>
-            <a:spLocks noGrp="1" noRot="1" noChangeAspect="1"/>
-          </p:cNvSpPr>
-          <p:nvPr>
-            <p:ph type="sldImg"/>
-          </p:nvPr>
-        </p:nvSpPr>
-        <p:spPr/>
-      </p:sp>
-      <p:sp>
-        <p:nvSpPr>
-          <p:cNvPr id="3" name="Notes Placeholder 2"/>
-          <p:cNvSpPr>
-            <a:spLocks noGrp="1"/>
-          </p:cNvSpPr>
-          <p:nvPr>
-            <p:ph type="body" idx="1"/>
-          </p:nvPr>
-        </p:nvSpPr>
-        <p:spPr/>
-        <p:txBody>
-          <a:bodyPr/>
-          <a:lstStyle/>
-          <a:p>
-            <a:r>
-              <a:rPr lang="en-US" dirty="0"/>
-              <a:t>今後の予定です。次の段階は hot streak で、先生の問いのうち、どの研究者が特に成功するかに当たります。
-hot streak を見るには、研究者一人ひとりについて、トヨタ以外での論文も含めたキャリア全体の論文が要ります。いまのデータでは、サイトに20本以上の論文がある研究者は18名しかおりませんので、論文を集め直す必要があります。
-前回、この作業の手間を見積もってからご相談すると申し上げましたが、まだお出しできておりません。次回までにお出しします。そのうえで hot streak の分析に着手します。あわせて、AI の研究利用についての報告書をまとめます。</a:t>
-            </a:r>
-          </a:p>
-        </p:txBody>
-      </p:sp>
-      <p:sp>
-        <p:nvSpPr>
-          <p:cNvPr id="4" name="Slide Number Placeholder 3"/>
-          <p:cNvSpPr>
-            <a:spLocks noGrp="1"/>
-          </p:cNvSpPr>
-          <p:nvPr>
-            <p:ph type="sldNum" sz="quarter" idx="10"/>
-          </p:nvPr>
-        </p:nvSpPr>
-        <p:spPr/>
-        <p:txBody>
-          <a:bodyPr/>
-          <a:lstStyle/>
-          <a:p>
-            <a:fld id="{F7021451-1387-4CA6-816F-3879F97B5CBC}" type="slidenum">
-              <a:rPr lang="en-US"/>
-              <a:t>12</a:t>
-            </a:fld>
-            <a:endParaRPr lang="en-US"/>
-          </a:p>
-        </p:txBody>
-      </p:sp>
-    </p:spTree>
-    <p:extLst>
-      <p:ext uri="{BB962C8B-B14F-4D97-AF65-F5344CB8AC3E}">
-        <p14:creationId xmlns:p14="http://schemas.microsoft.com/office/powerpoint/2010/main" val="1024086991"/>
-      </p:ext>
-    </p:extLst>
-  </p:cSld>
-  <p:clrMapOvr>
-    <a:masterClrMapping/>
-  </p:clrMapOvr>
-</p:notes>
-</file>
-
-<file path=ppt/notesSlides/notesSlide13.xml><?xml version="1.0" encoding="utf-8"?>
-<p:notes xmlns:a="http://schemas.openxmlformats.org/drawingml/2006/main" xmlns:r="http://schemas.openxmlformats.org/officeDocument/2006/relationships" xmlns:p="http://schemas.openxmlformats.org/presentationml/2006/main">
-  <p:cSld>
-    <p:spTree>
-      <p:nvGrpSpPr>
-        <p:cNvPr id="1" name=""/>
-        <p:cNvGrpSpPr/>
-        <p:nvPr/>
-      </p:nvGrpSpPr>
-      <p:grpSpPr>
-        <a:xfrm>
-          <a:off x="0" y="0"/>
-          <a:ext cx="0" cy="0"/>
-          <a:chOff x="0" y="0"/>
-          <a:chExt cx="0" cy="0"/>
-        </a:xfrm>
-      </p:grpSpPr>
-      <p:sp>
-        <p:nvSpPr>
-          <p:cNvPr id="2" name="Slide Image Placeholder 1"/>
-          <p:cNvSpPr>
-            <a:spLocks noGrp="1" noRot="1" noChangeAspect="1"/>
-          </p:cNvSpPr>
-          <p:nvPr>
-            <p:ph type="sldImg"/>
-          </p:nvPr>
-        </p:nvSpPr>
-        <p:spPr/>
-      </p:sp>
-      <p:sp>
-        <p:nvSpPr>
-          <p:cNvPr id="3" name="Notes Placeholder 2"/>
-          <p:cNvSpPr>
-            <a:spLocks noGrp="1"/>
-          </p:cNvSpPr>
-          <p:nvPr>
-            <p:ph type="body" idx="1"/>
-          </p:nvPr>
-        </p:nvSpPr>
-        <p:spPr/>
-        <p:txBody>
-          <a:bodyPr/>
-          <a:lstStyle/>
-          <a:p>
-            <a:r>
-              <a:rPr lang="en-US" dirty="0"/>
-              <a:t>このほか、SciSciGPT を調べました。SciSciNet のデータに言葉で指示すると、AI が手順を組み立てて分析してくれるシステムです。今回の分析には使っておらず、SciSciNet のデータを直接集計しています。
-先生からいただいている、AI の研究利用についての報告に向けて、同じ種類のシステムと、AI の研究利用への批判を調べております。</a:t>
-            </a:r>
-          </a:p>
-        </p:txBody>
-      </p:sp>
-      <p:sp>
-        <p:nvSpPr>
-          <p:cNvPr id="4" name="Slide Number Placeholder 3"/>
-          <p:cNvSpPr>
-            <a:spLocks noGrp="1"/>
-          </p:cNvSpPr>
-          <p:nvPr>
-            <p:ph type="sldNum" sz="quarter" idx="10"/>
-          </p:nvPr>
-        </p:nvSpPr>
-        <p:spPr/>
-        <p:txBody>
-          <a:bodyPr/>
-          <a:lstStyle/>
-          <a:p>
-            <a:fld id="{F7021451-1387-4CA6-816F-3879F97B5CBC}" type="slidenum">
-              <a:rPr lang="en-US"/>
-              <a:t>13</a:t>
-            </a:fld>
-            <a:endParaRPr lang="en-US"/>
-          </a:p>
-        </p:txBody>
-      </p:sp>
-    </p:spTree>
-    <p:extLst>
-      <p:ext uri="{BB962C8B-B14F-4D97-AF65-F5344CB8AC3E}">
-        <p14:creationId xmlns:p14="http://schemas.microsoft.com/office/powerpoint/2010/main" val="1024086991"/>
-      </p:ext>
-    </p:extLst>
-  </p:cSld>
-  <p:clrMapOvr>
-    <a:masterClrMapping/>
-  </p:clrMapOvr>
-</p:notes>
-</file>
-
-<file path=ppt/notesSlides/notesSlide14.xml><?xml version="1.0" encoding="utf-8"?>
-<p:notes xmlns:a="http://schemas.openxmlformats.org/drawingml/2006/main" xmlns:r="http://schemas.openxmlformats.org/officeDocument/2006/relationships" xmlns:p="http://schemas.openxmlformats.org/presentationml/2006/main">
-  <p:cSld>
-    <p:spTree>
-      <p:nvGrpSpPr>
-        <p:cNvPr id="1" name=""/>
-        <p:cNvGrpSpPr/>
-        <p:nvPr/>
-      </p:nvGrpSpPr>
-      <p:grpSpPr>
-        <a:xfrm>
-          <a:off x="0" y="0"/>
-          <a:ext cx="0" cy="0"/>
-          <a:chOff x="0" y="0"/>
-          <a:chExt cx="0" cy="0"/>
-        </a:xfrm>
-      </p:grpSpPr>
-      <p:sp>
-        <p:nvSpPr>
-          <p:cNvPr id="2" name="Slide Image Placeholder 1"/>
-          <p:cNvSpPr>
-            <a:spLocks noGrp="1" noRot="1" noChangeAspect="1"/>
-          </p:cNvSpPr>
-          <p:nvPr>
-            <p:ph type="sldImg"/>
-          </p:nvPr>
-        </p:nvSpPr>
-        <p:spPr/>
-      </p:sp>
-      <p:sp>
-        <p:nvSpPr>
-          <p:cNvPr id="3" name="Notes Placeholder 2"/>
-          <p:cNvSpPr>
-            <a:spLocks noGrp="1"/>
-          </p:cNvSpPr>
-          <p:nvPr>
-            <p:ph type="body" idx="1"/>
-          </p:nvPr>
-        </p:nvSpPr>
-        <p:spPr/>
-        <p:txBody>
-          <a:bodyPr/>
-          <a:lstStyle/>
-          <a:p>
-            <a:r>
-              <a:rPr lang="en-US" dirty="0"/>
-              <a:t>確認させていただきたいことが四点ございます。
-一つめは、hot streak を、研究者ごとに論文を集め直す前提で進めてよいかです。
-二つめは対象期間です。1990年代以前の論文は参考文献の登録が薄く、新規性の値が不安定になるため、2000年以降に絞っております。なお、1990年代以前の論文62件は、すべて AISIN IMRA の米国法人のものです。
-三つめは対象組織です。Web of Science で調べたところ、デンソーや Toyota Research Institute などにも論文がまとまってございます。豊田工業大学は、企業の研究所ではなく教育研究機関ですので、除外することを提案いたします。
-四つめは、Sota Hayashi さんとの役割分担です。作業が重複している可能性がございますので、ご教示いただけますと助かります。</a:t>
-            </a:r>
-          </a:p>
-        </p:txBody>
-      </p:sp>
-      <p:sp>
-        <p:nvSpPr>
-          <p:cNvPr id="4" name="Slide Number Placeholder 3"/>
-          <p:cNvSpPr>
-            <a:spLocks noGrp="1"/>
-          </p:cNvSpPr>
-          <p:nvPr>
-            <p:ph type="sldNum" sz="quarter" idx="10"/>
-          </p:nvPr>
-        </p:nvSpPr>
-        <p:spPr/>
-        <p:txBody>
-          <a:bodyPr/>
-          <a:lstStyle/>
-          <a:p>
-            <a:fld id="{F7021451-1387-4CA6-816F-3879F97B5CBC}" type="slidenum">
-              <a:rPr lang="en-US"/>
-              <a:t>14</a:t>
             </a:fld>
             <a:endParaRPr lang="en-US"/>
           </a:p>
@@ -1921,40 +1654,7 @@
                 <a:ea typeface="Meiryo" pitchFamily="34" charset="-122"/>
                 <a:cs typeface="Meiryo" pitchFamily="34" charset="-120"/>
               </a:rPr>
-              <a:t>進捗報告　</a:t>
-            </a:r>
-            <a:r>
-              <a:rPr lang="ja-JP" altLang="en-US" sz="1800">
-                <a:solidFill>
-                  <a:srgbClr val="262626"/>
-                </a:solidFill>
-                <a:latin typeface="Meiryo" pitchFamily="34" charset="0"/>
-                <a:ea typeface="Meiryo" pitchFamily="34" charset="-122"/>
-                <a:cs typeface="Meiryo" pitchFamily="34" charset="-120"/>
-              </a:rPr>
-              <a:t>2026年9月</a:t>
-            </a:r>
-            <a:r>
-              <a:rPr lang="en-US" altLang="ja-JP" sz="1800" dirty="0">
-                <a:solidFill>
-                  <a:srgbClr val="262626"/>
-                </a:solidFill>
-                <a:latin typeface="Meiryo" pitchFamily="34" charset="0"/>
-                <a:ea typeface="Meiryo" pitchFamily="34" charset="-122"/>
-                <a:cs typeface="Meiryo" pitchFamily="34" charset="-120"/>
-              </a:rPr>
-              <a:t>28</a:t>
-            </a:r>
-            <a:r>
-              <a:rPr lang="ja-JP" altLang="en-US" sz="1800">
-                <a:solidFill>
-                  <a:srgbClr val="262626"/>
-                </a:solidFill>
-                <a:latin typeface="Meiryo" pitchFamily="34" charset="0"/>
-                <a:ea typeface="Meiryo" pitchFamily="34" charset="-122"/>
-                <a:cs typeface="Meiryo" pitchFamily="34" charset="-120"/>
-              </a:rPr>
-              <a:t>日</a:t>
+              <a:t>1</a:t>
             </a:r>
             <a:endParaRPr lang="ja-JP" sz="1800" dirty="0"/>
           </a:p>
@@ -2165,118 +1865,7 @@
                 <a:ea typeface="Meiryo" pitchFamily="34" charset="-122"/>
                 <a:cs typeface="Meiryo" pitchFamily="34" charset="-120"/>
               </a:rPr>
-              <a:t>SciSciNet 公開値の検証：自前の計算と並び順がよく一致し、以降の分析に使用</a:t>
-            </a:r>
-            <a:endParaRPr lang="ja-JP" sz="2000" dirty="0"/>
-          </a:p>
-          <a:p>
-            <a:pPr marL="304800" indent="-304800">
-              <a:spcAft>
-                <a:spcPts val="1000"/>
-              </a:spcAft>
-              <a:buSzPct val="100000"/>
-              <a:buFont typeface="+mj-lt"/>
-              <a:buAutoNum type="arabicPeriod"/>
-            </a:pPr>
-            <a:r>
-              <a:rPr lang="ja-JP" altLang="en-US" sz="2000" dirty="0">
-                <a:solidFill>
-                  <a:srgbClr val="262626"/>
-                </a:solidFill>
-                <a:latin typeface="Meiryo" pitchFamily="34" charset="0"/>
-                <a:ea typeface="Meiryo" pitchFamily="34" charset="-122"/>
-                <a:cs typeface="Meiryo" pitchFamily="34" charset="-120"/>
-              </a:rPr>
-              <a:t>一般論文との比較：条件を揃えると、新規性・破壊性・被引用とも中央付近</a:t>
-            </a:r>
-            <a:endParaRPr lang="ja-JP" sz="2000" dirty="0"/>
-          </a:p>
-          <a:p>
-            <a:pPr marL="457200" lvl="1" indent="-228600">
-              <a:spcAft>
-                <a:spcPts val="1000"/>
-              </a:spcAft>
-              <a:buSzPct val="100000"/>
-              <a:buChar char="•"/>
-            </a:pPr>
-            <a:r>
-              <a:rPr lang="ja-JP" altLang="en-US" sz="1800" dirty="0">
-                <a:solidFill>
-                  <a:srgbClr val="262626"/>
-                </a:solidFill>
-                <a:latin typeface="Meiryo" pitchFamily="34" charset="0"/>
-                <a:ea typeface="Meiryo" pitchFamily="34" charset="-122"/>
-                <a:cs typeface="Meiryo" pitchFamily="34" charset="-120"/>
-              </a:rPr>
-              <a:t>被引用の高さと破壊性の低さは、チーム規模と参考文献数の大きさによる</a:t>
-            </a:r>
-            <a:endParaRPr lang="ja-JP" sz="2000" dirty="0"/>
-          </a:p>
-          <a:p>
-            <a:pPr marL="457200" lvl="1" indent="-228600">
-              <a:spcAft>
-                <a:spcPts val="1000"/>
-              </a:spcAft>
-              <a:buSzPct val="100000"/>
-              <a:buChar char="•"/>
-            </a:pPr>
-            <a:r>
-              <a:rPr lang="ja-JP" altLang="en-US" sz="1800" dirty="0">
-                <a:solidFill>
-                  <a:srgbClr val="262626"/>
-                </a:solidFill>
-                <a:latin typeface="Meiryo" pitchFamily="34" charset="0"/>
-                <a:ea typeface="Meiryo" pitchFamily="34" charset="-122"/>
-                <a:cs typeface="Meiryo" pitchFamily="34" charset="-120"/>
-              </a:rPr>
-              <a:t>組織間では、豊田中研・未来創成が珍しい組み合わせ寄り、AISIN IMRA が定石寄り</a:t>
-            </a:r>
-            <a:endParaRPr lang="ja-JP" sz="2000" dirty="0"/>
-          </a:p>
-          <a:p>
-            <a:pPr marL="304800" indent="-304800">
-              <a:spcAft>
-                <a:spcPts val="1000"/>
-              </a:spcAft>
-              <a:buSzPct val="100000"/>
-              <a:buFont typeface="+mj-lt"/>
-              <a:buAutoNum type="arabicPeriod"/>
-            </a:pPr>
-            <a:r>
-              <a:rPr lang="ja-JP" altLang="en-US" sz="2000" dirty="0">
-                <a:solidFill>
-                  <a:srgbClr val="262626"/>
-                </a:solidFill>
-                <a:latin typeface="Meiryo" pitchFamily="34" charset="0"/>
-                <a:ea typeface="Meiryo" pitchFamily="34" charset="-122"/>
-                <a:cs typeface="Meiryo" pitchFamily="34" charset="-120"/>
-              </a:rPr>
-              <a:t>新規性の要因の検証：チーム規模・国際共同とも関係は見られず（件数が少ない）</a:t>
-            </a:r>
-            <a:br>
-              <a:rPr dirty="0"/>
-            </a:br>
-            <a:r>
-              <a:rPr lang="ja-JP" altLang="en-US" sz="2000" dirty="0">
-                <a:solidFill>
-                  <a:srgbClr val="262626"/>
-                </a:solidFill>
-                <a:latin typeface="Meiryo" pitchFamily="34" charset="0"/>
-                <a:ea typeface="Meiryo" pitchFamily="34" charset="-122"/>
-                <a:cs typeface="Meiryo" pitchFamily="34" charset="-120"/>
-              </a:rPr>
-              <a:t>組織の差は残るが、</a:t>
-            </a:r>
-            <a:r>
-              <a:rPr lang="ja-JP" altLang="en-US" sz="2000">
-                <a:solidFill>
-                  <a:srgbClr val="262626"/>
-                </a:solidFill>
-                <a:latin typeface="Meiryo" pitchFamily="34" charset="0"/>
-                <a:ea typeface="Meiryo" pitchFamily="34" charset="-122"/>
-                <a:cs typeface="Meiryo" pitchFamily="34" charset="-120"/>
-              </a:rPr>
-              <a:t>説明できる因子としては小さい</a:t>
+              <a:t>12</a:t>
             </a:r>
             <a:endParaRPr lang="ja-JP" sz="2000" dirty="0"/>
           </a:p>
@@ -2575,7 +2164,7 @@
                 <a:ea typeface="Meiryo" pitchFamily="34" charset="-122"/>
                 <a:cs typeface="Meiryo" pitchFamily="34" charset="-120"/>
               </a:rPr>
-              <a:t>14</a:t>
+              <a:t>13</a:t>
             </a:r>
             <a:endParaRPr lang="ja-JP" sz="1200" dirty="0"/>
           </a:p>
@@ -4370,1917 +3959,6 @@
 </file>
 
 <file path=ppt/slides/slide12.xml><?xml version="1.0" encoding="utf-8"?>
-<p:sld xmlns:a="http://schemas.openxmlformats.org/drawingml/2006/main" xmlns:r="http://schemas.openxmlformats.org/officeDocument/2006/relationships" xmlns:p="http://schemas.openxmlformats.org/presentationml/2006/main" show="0">
-  <p:cSld name="Slide 11">
-    <p:bg>
-      <p:bgPr>
-        <a:solidFill>
-          <a:srgbClr val="FFFFFF"/>
-        </a:solidFill>
-        <a:effectLst/>
-      </p:bgPr>
-    </p:bg>
-    <p:spTree>
-      <p:nvGrpSpPr>
-        <p:cNvPr id="1" name=""/>
-        <p:cNvGrpSpPr/>
-        <p:nvPr/>
-      </p:nvGrpSpPr>
-      <p:grpSpPr>
-        <a:xfrm>
-          <a:off x="0" y="0"/>
-          <a:ext cx="0" cy="0"/>
-          <a:chOff x="0" y="0"/>
-          <a:chExt cx="0" cy="0"/>
-        </a:xfrm>
-      </p:grpSpPr>
-      <p:sp>
-        <p:nvSpPr>
-          <p:cNvPr id="2" name="Text 0"/>
-          <p:cNvSpPr txBox="1"/>
-          <p:nvPr/>
-        </p:nvSpPr>
-        <p:spPr>
-          <a:xfrm>
-            <a:off x="548640" y="365760"/>
-            <a:ext cx="11094415" cy="594360"/>
-          </a:xfrm>
-          <a:prstGeom prst="rect">
-            <a:avLst/>
-          </a:prstGeom>
-          <a:noFill/>
-          <a:ln/>
-        </p:spPr>
-        <p:txBody>
-          <a:bodyPr wrap="square" lIns="0" tIns="0" rIns="0" bIns="0" rtlCol="0" anchor="ctr"/>
-          <a:lstStyle/>
-          <a:p>
-            <a:pPr marL="0" indent="0">
-              <a:buNone/>
-            </a:pPr>
-            <a:r>
-              <a:rPr lang="ja-JP" altLang="en-US" sz="2600" b="1" dirty="0">
-                <a:solidFill>
-                  <a:srgbClr val="1F3864"/>
-                </a:solidFill>
-                <a:latin typeface="Meiryo" pitchFamily="34" charset="0"/>
-                <a:ea typeface="Meiryo" pitchFamily="34" charset="-122"/>
-                <a:cs typeface="Meiryo" pitchFamily="34" charset="-120"/>
-              </a:rPr>
-              <a:t>今後の予定</a:t>
-            </a:r>
-            <a:endParaRPr lang="ja-JP" sz="2600" dirty="0"/>
-          </a:p>
-        </p:txBody>
-      </p:sp>
-      <p:sp>
-        <p:nvSpPr>
-          <p:cNvPr id="3" name="Text 1"/>
-          <p:cNvSpPr txBox="1"/>
-          <p:nvPr/>
-        </p:nvSpPr>
-        <p:spPr>
-          <a:xfrm>
-            <a:off x="11094415" y="6400800"/>
-            <a:ext cx="548640" cy="274320"/>
-          </a:xfrm>
-          <a:prstGeom prst="rect">
-            <a:avLst/>
-          </a:prstGeom>
-          <a:noFill/>
-          <a:ln/>
-        </p:spPr>
-        <p:txBody>
-          <a:bodyPr wrap="square" lIns="0" tIns="0" rIns="0" bIns="0" rtlCol="0" anchor="ctr"/>
-          <a:lstStyle/>
-          <a:p>
-            <a:pPr marL="0" indent="0" algn="r">
-              <a:buNone/>
-            </a:pPr>
-            <a:r>
-              <a:rPr lang="ja-JP" altLang="en-US" sz="1200" dirty="0">
-                <a:solidFill>
-                  <a:srgbClr val="7F7F7F"/>
-                </a:solidFill>
-                <a:latin typeface="Meiryo" pitchFamily="34" charset="0"/>
-                <a:ea typeface="Meiryo" pitchFamily="34" charset="-122"/>
-                <a:cs typeface="Meiryo" pitchFamily="34" charset="-120"/>
-              </a:rPr>
-              <a:t>11</a:t>
-            </a:r>
-            <a:endParaRPr lang="ja-JP" sz="1200" dirty="0"/>
-          </a:p>
-        </p:txBody>
-      </p:sp>
-      <p:sp>
-        <p:nvSpPr>
-          <p:cNvPr id="4" name="Text 2"/>
-          <p:cNvSpPr txBox="1"/>
-          <p:nvPr/>
-        </p:nvSpPr>
-        <p:spPr>
-          <a:xfrm>
-            <a:off x="548640" y="1234440"/>
-            <a:ext cx="11094415" cy="4937760"/>
-          </a:xfrm>
-          <a:prstGeom prst="rect">
-            <a:avLst/>
-          </a:prstGeom>
-          <a:noFill/>
-          <a:ln/>
-        </p:spPr>
-        <p:txBody>
-          <a:bodyPr wrap="square" lIns="0" tIns="0" rIns="0" bIns="0" rtlCol="0" anchor="t"/>
-          <a:lstStyle/>
-          <a:p>
-            <a:pPr marL="228600" indent="-228600">
-              <a:spcAft>
-                <a:spcPts val="1000"/>
-              </a:spcAft>
-              <a:buSzPct val="100000"/>
-              <a:buChar char="•"/>
-            </a:pPr>
-            <a:r>
-              <a:rPr lang="ja-JP" altLang="en-US" sz="2000" dirty="0">
-                <a:solidFill>
-                  <a:srgbClr val="262626"/>
-                </a:solidFill>
-                <a:latin typeface="Meiryo" pitchFamily="34" charset="0"/>
-                <a:ea typeface="Meiryo" pitchFamily="34" charset="-122"/>
-                <a:cs typeface="Meiryo" pitchFamily="34" charset="-120"/>
-              </a:rPr>
-              <a:t>研究者ごとの論文の再収集について、作業量を見積もる（次回報告まで）</a:t>
-            </a:r>
-            <a:endParaRPr lang="ja-JP" sz="2000" dirty="0"/>
-          </a:p>
-          <a:p>
-            <a:pPr marL="457200" lvl="1" indent="-228600">
-              <a:spcAft>
-                <a:spcPts val="1000"/>
-              </a:spcAft>
-              <a:buSzPct val="100000"/>
-              <a:buChar char="•"/>
-            </a:pPr>
-            <a:r>
-              <a:rPr lang="ja-JP" altLang="en-US" sz="1800" dirty="0">
-                <a:solidFill>
-                  <a:srgbClr val="262626"/>
-                </a:solidFill>
-                <a:latin typeface="Meiryo" pitchFamily="34" charset="0"/>
-                <a:ea typeface="Meiryo" pitchFamily="34" charset="-122"/>
-                <a:cs typeface="Meiryo" pitchFamily="34" charset="-120"/>
-              </a:rPr>
-              <a:t>hot streak（研究者の業績が一時期に集中する現象）の分析には、</a:t>
-            </a:r>
-            <a:br/>
-            <a:r>
-              <a:rPr lang="ja-JP" altLang="en-US" sz="1800" dirty="0">
-                <a:solidFill>
-                  <a:srgbClr val="262626"/>
-                </a:solidFill>
-                <a:latin typeface="Meiryo" pitchFamily="34" charset="0"/>
-                <a:ea typeface="Meiryo" pitchFamily="34" charset="-122"/>
-                <a:cs typeface="Meiryo" pitchFamily="34" charset="-120"/>
-              </a:rPr>
-              <a:t>トヨタ以外も含めたキャリア全体の論文が必要</a:t>
-            </a:r>
-            <a:endParaRPr lang="ja-JP" sz="2000" dirty="0"/>
-          </a:p>
-          <a:p>
-            <a:pPr marL="457200" lvl="1" indent="-228600">
-              <a:spcAft>
-                <a:spcPts val="1000"/>
-              </a:spcAft>
-              <a:buSzPct val="100000"/>
-              <a:buChar char="•"/>
-            </a:pPr>
-            <a:r>
-              <a:rPr lang="ja-JP" altLang="en-US" sz="1800" dirty="0">
-                <a:solidFill>
-                  <a:srgbClr val="262626"/>
-                </a:solidFill>
-                <a:latin typeface="Meiryo" pitchFamily="34" charset="0"/>
-                <a:ea typeface="Meiryo" pitchFamily="34" charset="-122"/>
-                <a:cs typeface="Meiryo" pitchFamily="34" charset="-120"/>
-              </a:rPr>
-              <a:t>サイト上で20本以上の論文がある研究者は18名のみ</a:t>
-            </a:r>
-            <a:endParaRPr lang="ja-JP" sz="2000" dirty="0"/>
-          </a:p>
-          <a:p>
-            <a:pPr marL="228600" indent="-228600">
-              <a:spcAft>
-                <a:spcPts val="1000"/>
-              </a:spcAft>
-              <a:buSzPct val="100000"/>
-              <a:buChar char="•"/>
-            </a:pPr>
-            <a:r>
-              <a:rPr lang="ja-JP" altLang="en-US" sz="2000" dirty="0">
-                <a:solidFill>
-                  <a:srgbClr val="262626"/>
-                </a:solidFill>
-                <a:latin typeface="Meiryo" pitchFamily="34" charset="0"/>
-                <a:ea typeface="Meiryo" pitchFamily="34" charset="-122"/>
-                <a:cs typeface="Meiryo" pitchFamily="34" charset="-120"/>
-              </a:rPr>
-              <a:t>hot streak の分析（見積もりの確認後に着手）</a:t>
-            </a:r>
-            <a:endParaRPr lang="ja-JP" sz="2000" dirty="0"/>
-          </a:p>
-          <a:p>
-            <a:pPr marL="228600" indent="-228600">
-              <a:spcAft>
-                <a:spcPts val="1000"/>
-              </a:spcAft>
-              <a:buSzPct val="100000"/>
-              <a:buChar char="•"/>
-            </a:pPr>
-            <a:r>
-              <a:rPr lang="ja-JP" altLang="en-US" sz="2000" dirty="0">
-                <a:solidFill>
-                  <a:srgbClr val="262626"/>
-                </a:solidFill>
-                <a:latin typeface="Meiryo" pitchFamily="34" charset="0"/>
-                <a:ea typeface="Meiryo" pitchFamily="34" charset="-122"/>
-                <a:cs typeface="Meiryo" pitchFamily="34" charset="-120"/>
-              </a:rPr>
-              <a:t>AI の研究利用に関する報告書の作成</a:t>
-            </a:r>
-            <a:endParaRPr lang="ja-JP" sz="2000" dirty="0"/>
-          </a:p>
-        </p:txBody>
-      </p:sp>
-    </p:spTree>
-  </p:cSld>
-  <p:clrMapOvr>
-    <a:masterClrMapping/>
-  </p:clrMapOvr>
-</p:sld>
-</file>
-
-<file path=ppt/slides/slide13.xml><?xml version="1.0" encoding="utf-8"?>
-<p:sld xmlns:a="http://schemas.openxmlformats.org/drawingml/2006/main" xmlns:r="http://schemas.openxmlformats.org/officeDocument/2006/relationships" xmlns:p="http://schemas.openxmlformats.org/presentationml/2006/main" show="0">
-  <p:cSld name="Slide 10">
-    <p:bg>
-      <p:bgPr>
-        <a:solidFill>
-          <a:srgbClr val="FFFFFF"/>
-        </a:solidFill>
-        <a:effectLst/>
-      </p:bgPr>
-    </p:bg>
-    <p:spTree>
-      <p:nvGrpSpPr>
-        <p:cNvPr id="1" name=""/>
-        <p:cNvGrpSpPr/>
-        <p:nvPr/>
-      </p:nvGrpSpPr>
-      <p:grpSpPr>
-        <a:xfrm>
-          <a:off x="0" y="0"/>
-          <a:ext cx="0" cy="0"/>
-          <a:chOff x="0" y="0"/>
-          <a:chExt cx="0" cy="0"/>
-        </a:xfrm>
-      </p:grpSpPr>
-      <p:sp>
-        <p:nvSpPr>
-          <p:cNvPr id="2" name="Text 0"/>
-          <p:cNvSpPr txBox="1"/>
-          <p:nvPr/>
-        </p:nvSpPr>
-        <p:spPr>
-          <a:xfrm>
-            <a:off x="548640" y="365760"/>
-            <a:ext cx="11094415" cy="594360"/>
-          </a:xfrm>
-          <a:prstGeom prst="rect">
-            <a:avLst/>
-          </a:prstGeom>
-          <a:noFill/>
-          <a:ln/>
-        </p:spPr>
-        <p:txBody>
-          <a:bodyPr wrap="square" lIns="0" tIns="0" rIns="0" bIns="0" rtlCol="0" anchor="ctr"/>
-          <a:lstStyle/>
-          <a:p>
-            <a:pPr marL="0" indent="0">
-              <a:buNone/>
-            </a:pPr>
-            <a:r>
-              <a:rPr lang="ja-JP" altLang="en-US" sz="2600" b="1" dirty="0">
-                <a:solidFill>
-                  <a:srgbClr val="1F3864"/>
-                </a:solidFill>
-                <a:latin typeface="Meiryo" pitchFamily="34" charset="0"/>
-                <a:ea typeface="Meiryo" pitchFamily="34" charset="-122"/>
-                <a:cs typeface="Meiryo" pitchFamily="34" charset="-120"/>
-              </a:rPr>
-              <a:t>その他：SciSciGPT の調査</a:t>
-            </a:r>
-            <a:endParaRPr lang="ja-JP" sz="2600" dirty="0"/>
-          </a:p>
-        </p:txBody>
-      </p:sp>
-      <p:sp>
-        <p:nvSpPr>
-          <p:cNvPr id="3" name="Text 1"/>
-          <p:cNvSpPr txBox="1"/>
-          <p:nvPr/>
-        </p:nvSpPr>
-        <p:spPr>
-          <a:xfrm>
-            <a:off x="11094415" y="6400800"/>
-            <a:ext cx="548640" cy="274320"/>
-          </a:xfrm>
-          <a:prstGeom prst="rect">
-            <a:avLst/>
-          </a:prstGeom>
-          <a:noFill/>
-          <a:ln/>
-        </p:spPr>
-        <p:txBody>
-          <a:bodyPr wrap="square" lIns="0" tIns="0" rIns="0" bIns="0" rtlCol="0" anchor="ctr"/>
-          <a:lstStyle/>
-          <a:p>
-            <a:pPr marL="0" indent="0" algn="r">
-              <a:buNone/>
-            </a:pPr>
-            <a:r>
-              <a:rPr lang="ja-JP" altLang="en-US" sz="1200" dirty="0">
-                <a:solidFill>
-                  <a:srgbClr val="7F7F7F"/>
-                </a:solidFill>
-                <a:latin typeface="Meiryo" pitchFamily="34" charset="0"/>
-                <a:ea typeface="Meiryo" pitchFamily="34" charset="-122"/>
-                <a:cs typeface="Meiryo" pitchFamily="34" charset="-120"/>
-              </a:rPr>
-              <a:t>10</a:t>
-            </a:r>
-            <a:endParaRPr lang="ja-JP" sz="1200" dirty="0"/>
-          </a:p>
-        </p:txBody>
-      </p:sp>
-      <p:sp>
-        <p:nvSpPr>
-          <p:cNvPr id="4" name="Text 2"/>
-          <p:cNvSpPr txBox="1"/>
-          <p:nvPr/>
-        </p:nvSpPr>
-        <p:spPr>
-          <a:xfrm>
-            <a:off x="548640" y="1188720"/>
-            <a:ext cx="11094415" cy="2103120"/>
-          </a:xfrm>
-          <a:prstGeom prst="rect">
-            <a:avLst/>
-          </a:prstGeom>
-          <a:noFill/>
-          <a:ln/>
-        </p:spPr>
-        <p:txBody>
-          <a:bodyPr wrap="square" lIns="0" tIns="0" rIns="0" bIns="0" rtlCol="0" anchor="t"/>
-          <a:lstStyle/>
-          <a:p>
-            <a:pPr marL="228600" indent="-228600">
-              <a:spcAft>
-                <a:spcPts val="800"/>
-              </a:spcAft>
-              <a:buSzPct val="100000"/>
-              <a:buChar char="•"/>
-            </a:pPr>
-            <a:r>
-              <a:rPr lang="ja-JP" altLang="en-US" sz="1800" dirty="0">
-                <a:solidFill>
-                  <a:srgbClr val="262626"/>
-                </a:solidFill>
-                <a:latin typeface="Meiryo" pitchFamily="34" charset="0"/>
-                <a:ea typeface="Meiryo" pitchFamily="34" charset="-122"/>
-                <a:cs typeface="Meiryo" pitchFamily="34" charset="-120"/>
-              </a:rPr>
-              <a:t>SciSciGPT（Shao et al. 2025, Nature Computational Science）</a:t>
-            </a:r>
-            <a:br/>
-            <a:r>
-              <a:rPr lang="ja-JP" altLang="en-US" sz="1800" dirty="0">
-                <a:solidFill>
-                  <a:srgbClr val="262626"/>
-                </a:solidFill>
-                <a:latin typeface="Meiryo" pitchFamily="34" charset="0"/>
-                <a:ea typeface="Meiryo" pitchFamily="34" charset="-122"/>
-                <a:cs typeface="Meiryo" pitchFamily="34" charset="-120"/>
-              </a:rPr>
-              <a:t>SciSciNet のデータを、言葉での指示にもとづいて AI が分析するシステム</a:t>
-            </a:r>
-            <a:endParaRPr lang="ja-JP" sz="1800" dirty="0"/>
-          </a:p>
-          <a:p>
-            <a:pPr marL="228600" indent="-228600">
-              <a:spcAft>
-                <a:spcPts val="800"/>
-              </a:spcAft>
-              <a:buSzPct val="100000"/>
-              <a:buChar char="•"/>
-            </a:pPr>
-            <a:r>
-              <a:rPr lang="ja-JP" altLang="en-US" sz="1800" dirty="0">
-                <a:solidFill>
-                  <a:srgbClr val="262626"/>
-                </a:solidFill>
-                <a:latin typeface="Meiryo" pitchFamily="34" charset="0"/>
-                <a:ea typeface="Meiryo" pitchFamily="34" charset="-122"/>
-                <a:cs typeface="Meiryo" pitchFamily="34" charset="-120"/>
-              </a:rPr>
-              <a:t>今回の分析には使用していない（SciSciNet のデータを直接集計）</a:t>
-            </a:r>
-            <a:endParaRPr lang="ja-JP" sz="1800" dirty="0"/>
-          </a:p>
-          <a:p>
-            <a:pPr marL="228600" indent="-228600">
-              <a:spcAft>
-                <a:spcPts val="800"/>
-              </a:spcAft>
-              <a:buSzPct val="100000"/>
-              <a:buChar char="•"/>
-            </a:pPr>
-            <a:r>
-              <a:rPr lang="ja-JP" altLang="en-US" sz="1800" dirty="0">
-                <a:solidFill>
-                  <a:srgbClr val="262626"/>
-                </a:solidFill>
-                <a:latin typeface="Meiryo" pitchFamily="34" charset="0"/>
-                <a:ea typeface="Meiryo" pitchFamily="34" charset="-122"/>
-                <a:cs typeface="Meiryo" pitchFamily="34" charset="-120"/>
-              </a:rPr>
-              <a:t>AI の研究利用に関する報告の準備として、同種のシステムと、AI の研究利用への批判を調査中</a:t>
-            </a:r>
-            <a:endParaRPr lang="ja-JP" sz="1800" dirty="0"/>
-          </a:p>
-        </p:txBody>
-      </p:sp>
-      <p:graphicFrame>
-        <p:nvGraphicFramePr>
-          <p:cNvPr id="11" name="Table 0"/>
-          <p:cNvGraphicFramePr>
-            <a:graphicFrameLocks noGrp="1"/>
-          </p:cNvGraphicFramePr>
-          <p:nvPr>
-            <p:extLst>
-              <p:ext uri="{D42A27DB-BD31-4B8C-83A1-F6EECF244321}">
-                <p14:modId xmlns:p14="http://schemas.microsoft.com/office/powerpoint/2010/main" val="1579011935"/>
-              </p:ext>
-            </p:extLst>
-          </p:nvPr>
-        </p:nvGraphicFramePr>
-        <p:xfrm>
-          <a:off x="548640" y="3520440"/>
-          <a:ext cx="11094415" cy="1682496"/>
-        </p:xfrm>
-        <a:graphic>
-          <a:graphicData uri="http://schemas.openxmlformats.org/drawingml/2006/table">
-            <a:tbl>
-              <a:tblPr/>
-              <a:tblGrid>
-                <a:gridCol w="2926080">
-                  <a:extLst>
-                    <a:ext uri="{9D8B030D-6E8A-4147-A177-3AD203B41FA5}">
-                      <a16:colId xmlns:a16="http://schemas.microsoft.com/office/drawing/2014/main" val="20000"/>
-                    </a:ext>
-                  </a:extLst>
-                </a:gridCol>
-                <a:gridCol w="3200400">
-                  <a:extLst>
-                    <a:ext uri="{9D8B030D-6E8A-4147-A177-3AD203B41FA5}">
-                      <a16:colId xmlns:a16="http://schemas.microsoft.com/office/drawing/2014/main" val="20001"/>
-                    </a:ext>
-                  </a:extLst>
-                </a:gridCol>
-                <a:gridCol w="1097280">
-                  <a:extLst>
-                    <a:ext uri="{9D8B030D-6E8A-4147-A177-3AD203B41FA5}">
-                      <a16:colId xmlns:a16="http://schemas.microsoft.com/office/drawing/2014/main" val="20002"/>
-                    </a:ext>
-                  </a:extLst>
-                </a:gridCol>
-                <a:gridCol w="2468880">
-                  <a:extLst>
-                    <a:ext uri="{9D8B030D-6E8A-4147-A177-3AD203B41FA5}">
-                      <a16:colId xmlns:a16="http://schemas.microsoft.com/office/drawing/2014/main" val="20003"/>
-                    </a:ext>
-                  </a:extLst>
-                </a:gridCol>
-                <a:gridCol w="1401775">
-                  <a:extLst>
-                    <a:ext uri="{9D8B030D-6E8A-4147-A177-3AD203B41FA5}">
-                      <a16:colId xmlns:a16="http://schemas.microsoft.com/office/drawing/2014/main" val="20004"/>
-                    </a:ext>
-                  </a:extLst>
-                </a:gridCol>
-              </a:tblGrid>
-              <a:tr h="420624">
-                <a:tc>
-                  <a:txBody>
-                    <a:bodyPr/>
-                    <a:lstStyle/>
-                    <a:p>
-                      <a:pPr marL="0" indent="0" algn="l">
-                        <a:buNone/>
-                      </a:pPr>
-                      <a:r>
-                        <a:rPr lang="ja-JP" altLang="en-US" sz="1800" b="1" dirty="0">
-                          <a:solidFill>
-                            <a:srgbClr val="262626"/>
-                          </a:solidFill>
-                          <a:latin typeface="Meiryo" pitchFamily="34" charset="0"/>
-                          <a:ea typeface="Meiryo" pitchFamily="34" charset="-122"/>
-                          <a:cs typeface="Meiryo" pitchFamily="34" charset="-120"/>
-                        </a:rPr>
-                        <a:t>システム</a:t>
-                      </a:r>
-                      <a:endParaRPr lang="ja-JP" sz="1800" dirty="0">
-                        <a:latin typeface="Meiryo" charset="0"/>
-                        <a:ea typeface="Meiryo" charset="0"/>
-                        <a:cs typeface="Meiryo" charset="0"/>
-                      </a:endParaRPr>
-                    </a:p>
-                  </a:txBody>
-                  <a:tcPr marL="109728" marR="109728" marT="54864" marB="54864" anchor="ctr">
-                    <a:lnL w="0" cap="flat" cmpd="sng" algn="ctr">
-                      <a:noFill/>
-                    </a:lnL>
-                    <a:lnR w="0" cap="flat" cmpd="sng" algn="ctr">
-                      <a:noFill/>
-                    </a:lnR>
-                    <a:lnT w="19050" cap="flat" cmpd="sng" algn="ctr">
-                      <a:solidFill>
-                        <a:srgbClr val="404040"/>
-                      </a:solidFill>
-                      <a:prstDash val="solid"/>
-                      <a:round/>
-                      <a:headEnd type="none" w="med" len="med"/>
-                      <a:tailEnd type="none" w="med" len="med"/>
-                    </a:lnT>
-                    <a:lnB w="12700" cap="flat" cmpd="sng" algn="ctr">
-                      <a:solidFill>
-                        <a:srgbClr val="404040"/>
-                      </a:solidFill>
-                      <a:prstDash val="solid"/>
-                      <a:round/>
-                      <a:headEnd type="none" w="med" len="med"/>
-                      <a:tailEnd type="none" w="med" len="med"/>
-                    </a:lnB>
-                  </a:tcPr>
-                </a:tc>
-                <a:tc>
-                  <a:txBody>
-                    <a:bodyPr/>
-                    <a:lstStyle/>
-                    <a:p>
-                      <a:pPr marL="0" indent="0" algn="ctr">
-                        <a:buNone/>
-                      </a:pPr>
-                      <a:r>
-                        <a:rPr lang="ja-JP" altLang="en-US" sz="1800" b="1" dirty="0">
-                          <a:solidFill>
-                            <a:srgbClr val="262626"/>
-                          </a:solidFill>
-                          <a:latin typeface="Meiryo" pitchFamily="34" charset="0"/>
-                          <a:ea typeface="Meiryo" pitchFamily="34" charset="-122"/>
-                          <a:cs typeface="Meiryo" pitchFamily="34" charset="-120"/>
-                        </a:rPr>
-                        <a:t>内容</a:t>
-                      </a:r>
-                      <a:endParaRPr lang="ja-JP" sz="1800" dirty="0">
-                        <a:latin typeface="Meiryo" charset="0"/>
-                        <a:ea typeface="Meiryo" charset="0"/>
-                        <a:cs typeface="Meiryo" charset="0"/>
-                      </a:endParaRPr>
-                    </a:p>
-                  </a:txBody>
-                  <a:tcPr marL="109728" marR="109728" marT="54864" marB="54864" anchor="ctr">
-                    <a:lnL w="0" cap="flat" cmpd="sng" algn="ctr">
-                      <a:noFill/>
-                    </a:lnL>
-                    <a:lnR w="0" cap="flat" cmpd="sng" algn="ctr">
-                      <a:noFill/>
-                    </a:lnR>
-                    <a:lnT w="19050" cap="flat" cmpd="sng" algn="ctr">
-                      <a:solidFill>
-                        <a:srgbClr val="404040"/>
-                      </a:solidFill>
-                      <a:prstDash val="solid"/>
-                      <a:round/>
-                      <a:headEnd type="none" w="med" len="med"/>
-                      <a:tailEnd type="none" w="med" len="med"/>
-                    </a:lnT>
-                    <a:lnB w="12700" cap="flat" cmpd="sng" algn="ctr">
-                      <a:solidFill>
-                        <a:srgbClr val="404040"/>
-                      </a:solidFill>
-                      <a:prstDash val="solid"/>
-                      <a:round/>
-                      <a:headEnd type="none" w="med" len="med"/>
-                      <a:tailEnd type="none" w="med" len="med"/>
-                    </a:lnB>
-                  </a:tcPr>
-                </a:tc>
-                <a:tc>
-                  <a:txBody>
-                    <a:bodyPr/>
-                    <a:lstStyle/>
-                    <a:p>
-                      <a:pPr marL="0" indent="0" algn="ctr">
-                        <a:buNone/>
-                      </a:pPr>
-                      <a:r>
-                        <a:rPr lang="ja-JP" altLang="en-US" sz="1800" b="1" dirty="0">
-                          <a:solidFill>
-                            <a:srgbClr val="262626"/>
-                          </a:solidFill>
-                          <a:latin typeface="Meiryo" pitchFamily="34" charset="0"/>
-                          <a:ea typeface="Meiryo" pitchFamily="34" charset="-122"/>
-                          <a:cs typeface="Meiryo" pitchFamily="34" charset="-120"/>
-                        </a:rPr>
-                        <a:t>年</a:t>
-                      </a:r>
-                      <a:endParaRPr lang="ja-JP" sz="1800" dirty="0">
-                        <a:latin typeface="Meiryo" charset="0"/>
-                        <a:ea typeface="Meiryo" charset="0"/>
-                        <a:cs typeface="Meiryo" charset="0"/>
-                      </a:endParaRPr>
-                    </a:p>
-                  </a:txBody>
-                  <a:tcPr marL="109728" marR="109728" marT="54864" marB="54864" anchor="ctr">
-                    <a:lnL w="0" cap="flat" cmpd="sng" algn="ctr">
-                      <a:noFill/>
-                    </a:lnL>
-                    <a:lnR w="0" cap="flat" cmpd="sng" algn="ctr">
-                      <a:noFill/>
-                    </a:lnR>
-                    <a:lnT w="19050" cap="flat" cmpd="sng" algn="ctr">
-                      <a:solidFill>
-                        <a:srgbClr val="404040"/>
-                      </a:solidFill>
-                      <a:prstDash val="solid"/>
-                      <a:round/>
-                      <a:headEnd type="none" w="med" len="med"/>
-                      <a:tailEnd type="none" w="med" len="med"/>
-                    </a:lnT>
-                    <a:lnB w="12700" cap="flat" cmpd="sng" algn="ctr">
-                      <a:solidFill>
-                        <a:srgbClr val="404040"/>
-                      </a:solidFill>
-                      <a:prstDash val="solid"/>
-                      <a:round/>
-                      <a:headEnd type="none" w="med" len="med"/>
-                      <a:tailEnd type="none" w="med" len="med"/>
-                    </a:lnB>
-                  </a:tcPr>
-                </a:tc>
-                <a:tc>
-                  <a:txBody>
-                    <a:bodyPr/>
-                    <a:lstStyle/>
-                    <a:p>
-                      <a:pPr marL="0" indent="0" algn="ctr">
-                        <a:buNone/>
-                      </a:pPr>
-                      <a:r>
-                        <a:rPr lang="ja-JP" altLang="en-US" sz="1800" b="1" dirty="0">
-                          <a:solidFill>
-                            <a:srgbClr val="262626"/>
-                          </a:solidFill>
-                          <a:latin typeface="Meiryo" pitchFamily="34" charset="0"/>
-                          <a:ea typeface="Meiryo" pitchFamily="34" charset="-122"/>
-                          <a:cs typeface="Meiryo" pitchFamily="34" charset="-120"/>
-                        </a:rPr>
-                        <a:t>掲載</a:t>
-                      </a:r>
-                      <a:endParaRPr lang="ja-JP" sz="1800" dirty="0">
-                        <a:latin typeface="Meiryo" charset="0"/>
-                        <a:ea typeface="Meiryo" charset="0"/>
-                        <a:cs typeface="Meiryo" charset="0"/>
-                      </a:endParaRPr>
-                    </a:p>
-                  </a:txBody>
-                  <a:tcPr marL="109728" marR="109728" marT="54864" marB="54864" anchor="ctr">
-                    <a:lnL w="0" cap="flat" cmpd="sng" algn="ctr">
-                      <a:noFill/>
-                    </a:lnL>
-                    <a:lnR w="0" cap="flat" cmpd="sng" algn="ctr">
-                      <a:noFill/>
-                    </a:lnR>
-                    <a:lnT w="19050" cap="flat" cmpd="sng" algn="ctr">
-                      <a:solidFill>
-                        <a:srgbClr val="404040"/>
-                      </a:solidFill>
-                      <a:prstDash val="solid"/>
-                      <a:round/>
-                      <a:headEnd type="none" w="med" len="med"/>
-                      <a:tailEnd type="none" w="med" len="med"/>
-                    </a:lnT>
-                    <a:lnB w="12700" cap="flat" cmpd="sng" algn="ctr">
-                      <a:solidFill>
-                        <a:srgbClr val="404040"/>
-                      </a:solidFill>
-                      <a:prstDash val="solid"/>
-                      <a:round/>
-                      <a:headEnd type="none" w="med" len="med"/>
-                      <a:tailEnd type="none" w="med" len="med"/>
-                    </a:lnB>
-                  </a:tcPr>
-                </a:tc>
-                <a:tc>
-                  <a:txBody>
-                    <a:bodyPr/>
-                    <a:lstStyle/>
-                    <a:p>
-                      <a:pPr marL="0" indent="0" algn="ctr">
-                        <a:buNone/>
-                      </a:pPr>
-                      <a:r>
-                        <a:rPr lang="ja-JP" altLang="en-US" sz="1800" b="1" dirty="0">
-                          <a:solidFill>
-                            <a:srgbClr val="262626"/>
-                          </a:solidFill>
-                          <a:latin typeface="Meiryo" pitchFamily="34" charset="0"/>
-                          <a:ea typeface="Meiryo" pitchFamily="34" charset="-122"/>
-                          <a:cs typeface="Meiryo" pitchFamily="34" charset="-120"/>
-                        </a:rPr>
-                        <a:t>被引用数</a:t>
-                      </a:r>
-                      <a:endParaRPr lang="ja-JP" sz="1800" dirty="0">
-                        <a:latin typeface="Meiryo" charset="0"/>
-                        <a:ea typeface="Meiryo" charset="0"/>
-                        <a:cs typeface="Meiryo" charset="0"/>
-                      </a:endParaRPr>
-                    </a:p>
-                  </a:txBody>
-                  <a:tcPr marL="109728" marR="109728" marT="54864" marB="54864" anchor="ctr">
-                    <a:lnL w="0" cap="flat" cmpd="sng" algn="ctr">
-                      <a:noFill/>
-                    </a:lnL>
-                    <a:lnR w="0" cap="flat" cmpd="sng" algn="ctr">
-                      <a:noFill/>
-                    </a:lnR>
-                    <a:lnT w="19050" cap="flat" cmpd="sng" algn="ctr">
-                      <a:solidFill>
-                        <a:srgbClr val="404040"/>
-                      </a:solidFill>
-                      <a:prstDash val="solid"/>
-                      <a:round/>
-                      <a:headEnd type="none" w="med" len="med"/>
-                      <a:tailEnd type="none" w="med" len="med"/>
-                    </a:lnT>
-                    <a:lnB w="12700" cap="flat" cmpd="sng" algn="ctr">
-                      <a:solidFill>
-                        <a:srgbClr val="404040"/>
-                      </a:solidFill>
-                      <a:prstDash val="solid"/>
-                      <a:round/>
-                      <a:headEnd type="none" w="med" len="med"/>
-                      <a:tailEnd type="none" w="med" len="med"/>
-                    </a:lnB>
-                  </a:tcPr>
-                </a:tc>
-                <a:extLst>
-                  <a:ext uri="{0D108BD9-81ED-4DB2-BD59-A6C34878D82A}">
-                    <a16:rowId xmlns:a16="http://schemas.microsoft.com/office/drawing/2014/main" val="10000"/>
-                  </a:ext>
-                </a:extLst>
-              </a:tr>
-              <a:tr h="420624">
-                <a:tc>
-                  <a:txBody>
-                    <a:bodyPr/>
-                    <a:lstStyle/>
-                    <a:p>
-                      <a:pPr marL="0" indent="0" algn="l">
-                        <a:buNone/>
-                      </a:pPr>
-                      <a:r>
-                        <a:rPr lang="ja-JP" altLang="en-US" sz="1800" dirty="0">
-                          <a:solidFill>
-                            <a:srgbClr val="262626"/>
-                          </a:solidFill>
-                          <a:latin typeface="Meiryo" pitchFamily="34" charset="0"/>
-                          <a:ea typeface="Meiryo" pitchFamily="34" charset="-122"/>
-                          <a:cs typeface="Meiryo" pitchFamily="34" charset="-120"/>
-                        </a:rPr>
-                        <a:t>Coscientist</a:t>
-                      </a:r>
-                      <a:endParaRPr lang="ja-JP" sz="1800" dirty="0">
-                        <a:latin typeface="Meiryo" charset="0"/>
-                        <a:ea typeface="Meiryo" charset="0"/>
-                        <a:cs typeface="Meiryo" charset="0"/>
-                      </a:endParaRPr>
-                    </a:p>
-                  </a:txBody>
-                  <a:tcPr marL="109728" marR="109728" marT="54864" marB="54864" anchor="ctr">
-                    <a:lnL w="0" cap="flat" cmpd="sng" algn="ctr">
-                      <a:noFill/>
-                    </a:lnL>
-                    <a:lnR w="0" cap="flat" cmpd="sng" algn="ctr">
-                      <a:noFill/>
-                    </a:lnR>
-                    <a:lnT w="12700" cap="flat" cmpd="sng" algn="ctr">
-                      <a:solidFill>
-                        <a:srgbClr val="404040"/>
-                      </a:solidFill>
-                      <a:prstDash val="solid"/>
-                      <a:round/>
-                      <a:headEnd type="none" w="med" len="med"/>
-                      <a:tailEnd type="none" w="med" len="med"/>
-                    </a:lnT>
-                    <a:lnB w="6350" cap="flat" cmpd="sng" algn="ctr">
-                      <a:solidFill>
-                        <a:srgbClr val="BFBFBF"/>
-                      </a:solidFill>
-                      <a:prstDash val="solid"/>
-                      <a:round/>
-                      <a:headEnd type="none" w="med" len="med"/>
-                      <a:tailEnd type="none" w="med" len="med"/>
-                    </a:lnB>
-                  </a:tcPr>
-                </a:tc>
-                <a:tc>
-                  <a:txBody>
-                    <a:bodyPr/>
-                    <a:lstStyle/>
-                    <a:p>
-                      <a:pPr marL="0" indent="0" algn="ctr">
-                        <a:buNone/>
-                      </a:pPr>
-                      <a:r>
-                        <a:rPr lang="ja-JP" altLang="en-US" sz="1800" dirty="0">
-                          <a:solidFill>
-                            <a:srgbClr val="262626"/>
-                          </a:solidFill>
-                          <a:latin typeface="Meiryo" pitchFamily="34" charset="0"/>
-                          <a:ea typeface="Meiryo" pitchFamily="34" charset="-122"/>
-                          <a:cs typeface="Meiryo" pitchFamily="34" charset="-120"/>
-                        </a:rPr>
-                        <a:t>化学実験の自動化</a:t>
-                      </a:r>
-                      <a:endParaRPr lang="ja-JP" sz="1800" dirty="0">
-                        <a:latin typeface="Meiryo" charset="0"/>
-                        <a:ea typeface="Meiryo" charset="0"/>
-                        <a:cs typeface="Meiryo" charset="0"/>
-                      </a:endParaRPr>
-                    </a:p>
-                  </a:txBody>
-                  <a:tcPr marL="109728" marR="109728" marT="54864" marB="54864" anchor="ctr">
-                    <a:lnL w="0" cap="flat" cmpd="sng" algn="ctr">
-                      <a:noFill/>
-                    </a:lnL>
-                    <a:lnR w="0" cap="flat" cmpd="sng" algn="ctr">
-                      <a:noFill/>
-                    </a:lnR>
-                    <a:lnT w="12700" cap="flat" cmpd="sng" algn="ctr">
-                      <a:solidFill>
-                        <a:srgbClr val="404040"/>
-                      </a:solidFill>
-                      <a:prstDash val="solid"/>
-                      <a:round/>
-                      <a:headEnd type="none" w="med" len="med"/>
-                      <a:tailEnd type="none" w="med" len="med"/>
-                    </a:lnT>
-                    <a:lnB w="6350" cap="flat" cmpd="sng" algn="ctr">
-                      <a:solidFill>
-                        <a:srgbClr val="BFBFBF"/>
-                      </a:solidFill>
-                      <a:prstDash val="solid"/>
-                      <a:round/>
-                      <a:headEnd type="none" w="med" len="med"/>
-                      <a:tailEnd type="none" w="med" len="med"/>
-                    </a:lnB>
-                  </a:tcPr>
-                </a:tc>
-                <a:tc>
-                  <a:txBody>
-                    <a:bodyPr/>
-                    <a:lstStyle/>
-                    <a:p>
-                      <a:pPr marL="0" indent="0" algn="ctr">
-                        <a:buNone/>
-                      </a:pPr>
-                      <a:r>
-                        <a:rPr lang="ja-JP" altLang="en-US" sz="1800" dirty="0">
-                          <a:solidFill>
-                            <a:srgbClr val="262626"/>
-                          </a:solidFill>
-                          <a:latin typeface="Meiryo" pitchFamily="34" charset="0"/>
-                          <a:ea typeface="Meiryo" pitchFamily="34" charset="-122"/>
-                          <a:cs typeface="Meiryo" pitchFamily="34" charset="-120"/>
-                        </a:rPr>
-                        <a:t>2023</a:t>
-                      </a:r>
-                      <a:endParaRPr lang="ja-JP" sz="1800" dirty="0">
-                        <a:latin typeface="Meiryo" charset="0"/>
-                        <a:ea typeface="Meiryo" charset="0"/>
-                        <a:cs typeface="Meiryo" charset="0"/>
-                      </a:endParaRPr>
-                    </a:p>
-                  </a:txBody>
-                  <a:tcPr marL="109728" marR="109728" marT="54864" marB="54864" anchor="ctr">
-                    <a:lnL w="0" cap="flat" cmpd="sng" algn="ctr">
-                      <a:noFill/>
-                    </a:lnL>
-                    <a:lnR w="0" cap="flat" cmpd="sng" algn="ctr">
-                      <a:noFill/>
-                    </a:lnR>
-                    <a:lnT w="12700" cap="flat" cmpd="sng" algn="ctr">
-                      <a:solidFill>
-                        <a:srgbClr val="404040"/>
-                      </a:solidFill>
-                      <a:prstDash val="solid"/>
-                      <a:round/>
-                      <a:headEnd type="none" w="med" len="med"/>
-                      <a:tailEnd type="none" w="med" len="med"/>
-                    </a:lnT>
-                    <a:lnB w="6350" cap="flat" cmpd="sng" algn="ctr">
-                      <a:solidFill>
-                        <a:srgbClr val="BFBFBF"/>
-                      </a:solidFill>
-                      <a:prstDash val="solid"/>
-                      <a:round/>
-                      <a:headEnd type="none" w="med" len="med"/>
-                      <a:tailEnd type="none" w="med" len="med"/>
-                    </a:lnB>
-                  </a:tcPr>
-                </a:tc>
-                <a:tc>
-                  <a:txBody>
-                    <a:bodyPr/>
-                    <a:lstStyle/>
-                    <a:p>
-                      <a:pPr marL="0" indent="0" algn="ctr">
-                        <a:buNone/>
-                      </a:pPr>
-                      <a:r>
-                        <a:rPr lang="ja-JP" altLang="en-US" sz="1800" dirty="0">
-                          <a:solidFill>
-                            <a:srgbClr val="262626"/>
-                          </a:solidFill>
-                          <a:latin typeface="Meiryo" pitchFamily="34" charset="0"/>
-                          <a:ea typeface="Meiryo" pitchFamily="34" charset="-122"/>
-                          <a:cs typeface="Meiryo" pitchFamily="34" charset="-120"/>
-                        </a:rPr>
-                        <a:t>Nature</a:t>
-                      </a:r>
-                      <a:endParaRPr lang="ja-JP" sz="1800" dirty="0">
-                        <a:latin typeface="Meiryo" charset="0"/>
-                        <a:ea typeface="Meiryo" charset="0"/>
-                        <a:cs typeface="Meiryo" charset="0"/>
-                      </a:endParaRPr>
-                    </a:p>
-                  </a:txBody>
-                  <a:tcPr marL="109728" marR="109728" marT="54864" marB="54864" anchor="ctr">
-                    <a:lnL w="0" cap="flat" cmpd="sng" algn="ctr">
-                      <a:noFill/>
-                    </a:lnL>
-                    <a:lnR w="0" cap="flat" cmpd="sng" algn="ctr">
-                      <a:noFill/>
-                    </a:lnR>
-                    <a:lnT w="12700" cap="flat" cmpd="sng" algn="ctr">
-                      <a:solidFill>
-                        <a:srgbClr val="404040"/>
-                      </a:solidFill>
-                      <a:prstDash val="solid"/>
-                      <a:round/>
-                      <a:headEnd type="none" w="med" len="med"/>
-                      <a:tailEnd type="none" w="med" len="med"/>
-                    </a:lnT>
-                    <a:lnB w="6350" cap="flat" cmpd="sng" algn="ctr">
-                      <a:solidFill>
-                        <a:srgbClr val="BFBFBF"/>
-                      </a:solidFill>
-                      <a:prstDash val="solid"/>
-                      <a:round/>
-                      <a:headEnd type="none" w="med" len="med"/>
-                      <a:tailEnd type="none" w="med" len="med"/>
-                    </a:lnB>
-                  </a:tcPr>
-                </a:tc>
-                <a:tc>
-                  <a:txBody>
-                    <a:bodyPr/>
-                    <a:lstStyle/>
-                    <a:p>
-                      <a:pPr marL="0" indent="0" algn="ctr">
-                        <a:buNone/>
-                      </a:pPr>
-                      <a:r>
-                        <a:rPr lang="ja-JP" altLang="en-US" sz="1800" dirty="0">
-                          <a:solidFill>
-                            <a:srgbClr val="262626"/>
-                          </a:solidFill>
-                          <a:latin typeface="Meiryo" pitchFamily="34" charset="0"/>
-                          <a:ea typeface="Meiryo" pitchFamily="34" charset="-122"/>
-                          <a:cs typeface="Meiryo" pitchFamily="34" charset="-120"/>
-                        </a:rPr>
-                        <a:t>981</a:t>
-                      </a:r>
-                      <a:endParaRPr lang="ja-JP" sz="1800" dirty="0">
-                        <a:latin typeface="Meiryo" charset="0"/>
-                        <a:ea typeface="Meiryo" charset="0"/>
-                        <a:cs typeface="Meiryo" charset="0"/>
-                      </a:endParaRPr>
-                    </a:p>
-                  </a:txBody>
-                  <a:tcPr marL="109728" marR="109728" marT="54864" marB="54864" anchor="ctr">
-                    <a:lnL w="0" cap="flat" cmpd="sng" algn="ctr">
-                      <a:noFill/>
-                    </a:lnL>
-                    <a:lnR w="0" cap="flat" cmpd="sng" algn="ctr">
-                      <a:noFill/>
-                    </a:lnR>
-                    <a:lnT w="12700" cap="flat" cmpd="sng" algn="ctr">
-                      <a:solidFill>
-                        <a:srgbClr val="404040"/>
-                      </a:solidFill>
-                      <a:prstDash val="solid"/>
-                      <a:round/>
-                      <a:headEnd type="none" w="med" len="med"/>
-                      <a:tailEnd type="none" w="med" len="med"/>
-                    </a:lnT>
-                    <a:lnB w="6350" cap="flat" cmpd="sng" algn="ctr">
-                      <a:solidFill>
-                        <a:srgbClr val="BFBFBF"/>
-                      </a:solidFill>
-                      <a:prstDash val="solid"/>
-                      <a:round/>
-                      <a:headEnd type="none" w="med" len="med"/>
-                      <a:tailEnd type="none" w="med" len="med"/>
-                    </a:lnB>
-                  </a:tcPr>
-                </a:tc>
-                <a:extLst>
-                  <a:ext uri="{0D108BD9-81ED-4DB2-BD59-A6C34878D82A}">
-                    <a16:rowId xmlns:a16="http://schemas.microsoft.com/office/drawing/2014/main" val="10001"/>
-                  </a:ext>
-                </a:extLst>
-              </a:tr>
-              <a:tr h="420624">
-                <a:tc>
-                  <a:txBody>
-                    <a:bodyPr/>
-                    <a:lstStyle/>
-                    <a:p>
-                      <a:pPr marL="0" indent="0" algn="l">
-                        <a:buNone/>
-                      </a:pPr>
-                      <a:r>
-                        <a:rPr lang="ja-JP" altLang="en-US" sz="1800" dirty="0">
-                          <a:solidFill>
-                            <a:srgbClr val="262626"/>
-                          </a:solidFill>
-                          <a:latin typeface="Meiryo" pitchFamily="34" charset="0"/>
-                          <a:ea typeface="Meiryo" pitchFamily="34" charset="-122"/>
-                          <a:cs typeface="Meiryo" pitchFamily="34" charset="-120"/>
-                        </a:rPr>
-                        <a:t>The AI Scientist</a:t>
-                      </a:r>
-                      <a:endParaRPr lang="ja-JP" sz="1800" dirty="0">
-                        <a:latin typeface="Meiryo" charset="0"/>
-                        <a:ea typeface="Meiryo" charset="0"/>
-                        <a:cs typeface="Meiryo" charset="0"/>
-                      </a:endParaRPr>
-                    </a:p>
-                  </a:txBody>
-                  <a:tcPr marL="109728" marR="109728" marT="54864" marB="54864" anchor="ctr">
-                    <a:lnL w="0" cap="flat" cmpd="sng" algn="ctr">
-                      <a:noFill/>
-                    </a:lnL>
-                    <a:lnR w="0" cap="flat" cmpd="sng" algn="ctr">
-                      <a:noFill/>
-                    </a:lnR>
-                    <a:lnT w="6350" cap="flat" cmpd="sng" algn="ctr">
-                      <a:solidFill>
-                        <a:srgbClr val="BFBFBF"/>
-                      </a:solidFill>
-                      <a:prstDash val="solid"/>
-                      <a:round/>
-                      <a:headEnd type="none" w="med" len="med"/>
-                      <a:tailEnd type="none" w="med" len="med"/>
-                    </a:lnT>
-                    <a:lnB w="6350" cap="flat" cmpd="sng" algn="ctr">
-                      <a:solidFill>
-                        <a:srgbClr val="BFBFBF"/>
-                      </a:solidFill>
-                      <a:prstDash val="solid"/>
-                      <a:round/>
-                      <a:headEnd type="none" w="med" len="med"/>
-                      <a:tailEnd type="none" w="med" len="med"/>
-                    </a:lnB>
-                  </a:tcPr>
-                </a:tc>
-                <a:tc>
-                  <a:txBody>
-                    <a:bodyPr/>
-                    <a:lstStyle/>
-                    <a:p>
-                      <a:pPr marL="0" indent="0" algn="ctr">
-                        <a:buNone/>
-                      </a:pPr>
-                      <a:r>
-                        <a:rPr lang="ja-JP" altLang="en-US" sz="1800" dirty="0">
-                          <a:solidFill>
-                            <a:srgbClr val="262626"/>
-                          </a:solidFill>
-                          <a:latin typeface="Meiryo" pitchFamily="34" charset="0"/>
-                          <a:ea typeface="Meiryo" pitchFamily="34" charset="-122"/>
-                          <a:cs typeface="Meiryo" pitchFamily="34" charset="-120"/>
-                        </a:rPr>
-                        <a:t>論文作成の自動化</a:t>
-                      </a:r>
-                      <a:endParaRPr lang="ja-JP" sz="1800" dirty="0">
-                        <a:latin typeface="Meiryo" charset="0"/>
-                        <a:ea typeface="Meiryo" charset="0"/>
-                        <a:cs typeface="Meiryo" charset="0"/>
-                      </a:endParaRPr>
-                    </a:p>
-                  </a:txBody>
-                  <a:tcPr marL="109728" marR="109728" marT="54864" marB="54864" anchor="ctr">
-                    <a:lnL w="0" cap="flat" cmpd="sng" algn="ctr">
-                      <a:noFill/>
-                    </a:lnL>
-                    <a:lnR w="0" cap="flat" cmpd="sng" algn="ctr">
-                      <a:noFill/>
-                    </a:lnR>
-                    <a:lnT w="6350" cap="flat" cmpd="sng" algn="ctr">
-                      <a:solidFill>
-                        <a:srgbClr val="BFBFBF"/>
-                      </a:solidFill>
-                      <a:prstDash val="solid"/>
-                      <a:round/>
-                      <a:headEnd type="none" w="med" len="med"/>
-                      <a:tailEnd type="none" w="med" len="med"/>
-                    </a:lnT>
-                    <a:lnB w="6350" cap="flat" cmpd="sng" algn="ctr">
-                      <a:solidFill>
-                        <a:srgbClr val="BFBFBF"/>
-                      </a:solidFill>
-                      <a:prstDash val="solid"/>
-                      <a:round/>
-                      <a:headEnd type="none" w="med" len="med"/>
-                      <a:tailEnd type="none" w="med" len="med"/>
-                    </a:lnB>
-                  </a:tcPr>
-                </a:tc>
-                <a:tc>
-                  <a:txBody>
-                    <a:bodyPr/>
-                    <a:lstStyle/>
-                    <a:p>
-                      <a:pPr marL="0" indent="0" algn="ctr">
-                        <a:buNone/>
-                      </a:pPr>
-                      <a:r>
-                        <a:rPr lang="ja-JP" altLang="en-US" sz="1800" dirty="0">
-                          <a:solidFill>
-                            <a:srgbClr val="262626"/>
-                          </a:solidFill>
-                          <a:latin typeface="Meiryo" pitchFamily="34" charset="0"/>
-                          <a:ea typeface="Meiryo" pitchFamily="34" charset="-122"/>
-                          <a:cs typeface="Meiryo" pitchFamily="34" charset="-120"/>
-                        </a:rPr>
-                        <a:t>2024</a:t>
-                      </a:r>
-                      <a:endParaRPr lang="ja-JP" sz="1800" dirty="0">
-                        <a:latin typeface="Meiryo" charset="0"/>
-                        <a:ea typeface="Meiryo" charset="0"/>
-                        <a:cs typeface="Meiryo" charset="0"/>
-                      </a:endParaRPr>
-                    </a:p>
-                  </a:txBody>
-                  <a:tcPr marL="109728" marR="109728" marT="54864" marB="54864" anchor="ctr">
-                    <a:lnL w="0" cap="flat" cmpd="sng" algn="ctr">
-                      <a:noFill/>
-                    </a:lnL>
-                    <a:lnR w="0" cap="flat" cmpd="sng" algn="ctr">
-                      <a:noFill/>
-                    </a:lnR>
-                    <a:lnT w="6350" cap="flat" cmpd="sng" algn="ctr">
-                      <a:solidFill>
-                        <a:srgbClr val="BFBFBF"/>
-                      </a:solidFill>
-                      <a:prstDash val="solid"/>
-                      <a:round/>
-                      <a:headEnd type="none" w="med" len="med"/>
-                      <a:tailEnd type="none" w="med" len="med"/>
-                    </a:lnT>
-                    <a:lnB w="6350" cap="flat" cmpd="sng" algn="ctr">
-                      <a:solidFill>
-                        <a:srgbClr val="BFBFBF"/>
-                      </a:solidFill>
-                      <a:prstDash val="solid"/>
-                      <a:round/>
-                      <a:headEnd type="none" w="med" len="med"/>
-                      <a:tailEnd type="none" w="med" len="med"/>
-                    </a:lnB>
-                  </a:tcPr>
-                </a:tc>
-                <a:tc>
-                  <a:txBody>
-                    <a:bodyPr/>
-                    <a:lstStyle/>
-                    <a:p>
-                      <a:pPr marL="0" indent="0" algn="ctr">
-                        <a:buNone/>
-                      </a:pPr>
-                      <a:r>
-                        <a:rPr lang="ja-JP" altLang="en-US" sz="1800" dirty="0">
-                          <a:solidFill>
-                            <a:srgbClr val="262626"/>
-                          </a:solidFill>
-                          <a:latin typeface="Meiryo" pitchFamily="34" charset="0"/>
-                          <a:ea typeface="Meiryo" pitchFamily="34" charset="-122"/>
-                          <a:cs typeface="Meiryo" pitchFamily="34" charset="-120"/>
-                        </a:rPr>
-                        <a:t>arXiv</a:t>
-                      </a:r>
-                      <a:endParaRPr lang="ja-JP" sz="1800" dirty="0">
-                        <a:latin typeface="Meiryo" charset="0"/>
-                        <a:ea typeface="Meiryo" charset="0"/>
-                        <a:cs typeface="Meiryo" charset="0"/>
-                      </a:endParaRPr>
-                    </a:p>
-                  </a:txBody>
-                  <a:tcPr marL="109728" marR="109728" marT="54864" marB="54864" anchor="ctr">
-                    <a:lnL w="0" cap="flat" cmpd="sng" algn="ctr">
-                      <a:noFill/>
-                    </a:lnL>
-                    <a:lnR w="0" cap="flat" cmpd="sng" algn="ctr">
-                      <a:noFill/>
-                    </a:lnR>
-                    <a:lnT w="6350" cap="flat" cmpd="sng" algn="ctr">
-                      <a:solidFill>
-                        <a:srgbClr val="BFBFBF"/>
-                      </a:solidFill>
-                      <a:prstDash val="solid"/>
-                      <a:round/>
-                      <a:headEnd type="none" w="med" len="med"/>
-                      <a:tailEnd type="none" w="med" len="med"/>
-                    </a:lnT>
-                    <a:lnB w="6350" cap="flat" cmpd="sng" algn="ctr">
-                      <a:solidFill>
-                        <a:srgbClr val="BFBFBF"/>
-                      </a:solidFill>
-                      <a:prstDash val="solid"/>
-                      <a:round/>
-                      <a:headEnd type="none" w="med" len="med"/>
-                      <a:tailEnd type="none" w="med" len="med"/>
-                    </a:lnB>
-                  </a:tcPr>
-                </a:tc>
-                <a:tc>
-                  <a:txBody>
-                    <a:bodyPr/>
-                    <a:lstStyle/>
-                    <a:p>
-                      <a:pPr marL="0" indent="0" algn="ctr">
-                        <a:buNone/>
-                      </a:pPr>
-                      <a:r>
-                        <a:rPr lang="ja-JP" altLang="en-US" sz="1800" dirty="0">
-                          <a:solidFill>
-                            <a:srgbClr val="262626"/>
-                          </a:solidFill>
-                          <a:latin typeface="Meiryo" pitchFamily="34" charset="0"/>
-                          <a:ea typeface="Meiryo" pitchFamily="34" charset="-122"/>
-                          <a:cs typeface="Meiryo" pitchFamily="34" charset="-120"/>
-                        </a:rPr>
-                        <a:t>114</a:t>
-                      </a:r>
-                      <a:endParaRPr lang="ja-JP" sz="1800" dirty="0">
-                        <a:latin typeface="Meiryo" charset="0"/>
-                        <a:ea typeface="Meiryo" charset="0"/>
-                        <a:cs typeface="Meiryo" charset="0"/>
-                      </a:endParaRPr>
-                    </a:p>
-                  </a:txBody>
-                  <a:tcPr marL="109728" marR="109728" marT="54864" marB="54864" anchor="ctr">
-                    <a:lnL w="0" cap="flat" cmpd="sng" algn="ctr">
-                      <a:noFill/>
-                    </a:lnL>
-                    <a:lnR w="0" cap="flat" cmpd="sng" algn="ctr">
-                      <a:noFill/>
-                    </a:lnR>
-                    <a:lnT w="6350" cap="flat" cmpd="sng" algn="ctr">
-                      <a:solidFill>
-                        <a:srgbClr val="BFBFBF"/>
-                      </a:solidFill>
-                      <a:prstDash val="solid"/>
-                      <a:round/>
-                      <a:headEnd type="none" w="med" len="med"/>
-                      <a:tailEnd type="none" w="med" len="med"/>
-                    </a:lnT>
-                    <a:lnB w="6350" cap="flat" cmpd="sng" algn="ctr">
-                      <a:solidFill>
-                        <a:srgbClr val="BFBFBF"/>
-                      </a:solidFill>
-                      <a:prstDash val="solid"/>
-                      <a:round/>
-                      <a:headEnd type="none" w="med" len="med"/>
-                      <a:tailEnd type="none" w="med" len="med"/>
-                    </a:lnB>
-                  </a:tcPr>
-                </a:tc>
-                <a:extLst>
-                  <a:ext uri="{0D108BD9-81ED-4DB2-BD59-A6C34878D82A}">
-                    <a16:rowId xmlns:a16="http://schemas.microsoft.com/office/drawing/2014/main" val="10002"/>
-                  </a:ext>
-                </a:extLst>
-              </a:tr>
-              <a:tr h="420624">
-                <a:tc>
-                  <a:txBody>
-                    <a:bodyPr/>
-                    <a:lstStyle/>
-                    <a:p>
-                      <a:pPr marL="0" indent="0" algn="l">
-                        <a:buNone/>
-                      </a:pPr>
-                      <a:r>
-                        <a:rPr lang="ja-JP" altLang="en-US" sz="1800" dirty="0">
-                          <a:solidFill>
-                            <a:srgbClr val="262626"/>
-                          </a:solidFill>
-                          <a:latin typeface="Meiryo" pitchFamily="34" charset="0"/>
-                          <a:ea typeface="Meiryo" pitchFamily="34" charset="-122"/>
-                          <a:cs typeface="Meiryo" pitchFamily="34" charset="-120"/>
-                        </a:rPr>
-                        <a:t>SciSciGPT</a:t>
-                      </a:r>
-                      <a:endParaRPr lang="ja-JP" sz="1800" dirty="0">
-                        <a:latin typeface="Meiryo" charset="0"/>
-                        <a:ea typeface="Meiryo" charset="0"/>
-                        <a:cs typeface="Meiryo" charset="0"/>
-                      </a:endParaRPr>
-                    </a:p>
-                  </a:txBody>
-                  <a:tcPr marL="109728" marR="109728" marT="54864" marB="54864" anchor="ctr">
-                    <a:lnL w="0" cap="flat" cmpd="sng" algn="ctr">
-                      <a:noFill/>
-                    </a:lnL>
-                    <a:lnR w="0" cap="flat" cmpd="sng" algn="ctr">
-                      <a:noFill/>
-                    </a:lnR>
-                    <a:lnT w="6350" cap="flat" cmpd="sng" algn="ctr">
-                      <a:solidFill>
-                        <a:srgbClr val="BFBFBF"/>
-                      </a:solidFill>
-                      <a:prstDash val="solid"/>
-                      <a:round/>
-                      <a:headEnd type="none" w="med" len="med"/>
-                      <a:tailEnd type="none" w="med" len="med"/>
-                    </a:lnT>
-                    <a:lnB w="19050" cap="flat" cmpd="sng" algn="ctr">
-                      <a:solidFill>
-                        <a:srgbClr val="404040"/>
-                      </a:solidFill>
-                      <a:prstDash val="solid"/>
-                      <a:round/>
-                      <a:headEnd type="none" w="med" len="med"/>
-                      <a:tailEnd type="none" w="med" len="med"/>
-                    </a:lnB>
-                  </a:tcPr>
-                </a:tc>
-                <a:tc>
-                  <a:txBody>
-                    <a:bodyPr/>
-                    <a:lstStyle/>
-                    <a:p>
-                      <a:pPr marL="0" indent="0" algn="ctr">
-                        <a:buNone/>
-                      </a:pPr>
-                      <a:r>
-                        <a:rPr lang="ja-JP" altLang="en-US" sz="1800" dirty="0">
-                          <a:solidFill>
-                            <a:srgbClr val="262626"/>
-                          </a:solidFill>
-                          <a:latin typeface="Meiryo" pitchFamily="34" charset="0"/>
-                          <a:ea typeface="Meiryo" pitchFamily="34" charset="-122"/>
-                          <a:cs typeface="Meiryo" pitchFamily="34" charset="-120"/>
-                        </a:rPr>
-                        <a:t>科学計量の分析</a:t>
-                      </a:r>
-                      <a:endParaRPr lang="ja-JP" sz="1800" dirty="0">
-                        <a:latin typeface="Meiryo" charset="0"/>
-                        <a:ea typeface="Meiryo" charset="0"/>
-                        <a:cs typeface="Meiryo" charset="0"/>
-                      </a:endParaRPr>
-                    </a:p>
-                  </a:txBody>
-                  <a:tcPr marL="109728" marR="109728" marT="54864" marB="54864" anchor="ctr">
-                    <a:lnL w="0" cap="flat" cmpd="sng" algn="ctr">
-                      <a:noFill/>
-                    </a:lnL>
-                    <a:lnR w="0" cap="flat" cmpd="sng" algn="ctr">
-                      <a:noFill/>
-                    </a:lnR>
-                    <a:lnT w="6350" cap="flat" cmpd="sng" algn="ctr">
-                      <a:solidFill>
-                        <a:srgbClr val="BFBFBF"/>
-                      </a:solidFill>
-                      <a:prstDash val="solid"/>
-                      <a:round/>
-                      <a:headEnd type="none" w="med" len="med"/>
-                      <a:tailEnd type="none" w="med" len="med"/>
-                    </a:lnT>
-                    <a:lnB w="19050" cap="flat" cmpd="sng" algn="ctr">
-                      <a:solidFill>
-                        <a:srgbClr val="404040"/>
-                      </a:solidFill>
-                      <a:prstDash val="solid"/>
-                      <a:round/>
-                      <a:headEnd type="none" w="med" len="med"/>
-                      <a:tailEnd type="none" w="med" len="med"/>
-                    </a:lnB>
-                  </a:tcPr>
-                </a:tc>
-                <a:tc>
-                  <a:txBody>
-                    <a:bodyPr/>
-                    <a:lstStyle/>
-                    <a:p>
-                      <a:pPr marL="0" indent="0" algn="ctr">
-                        <a:buNone/>
-                      </a:pPr>
-                      <a:r>
-                        <a:rPr lang="ja-JP" altLang="en-US" sz="1800" dirty="0">
-                          <a:solidFill>
-                            <a:srgbClr val="262626"/>
-                          </a:solidFill>
-                          <a:latin typeface="Meiryo" pitchFamily="34" charset="0"/>
-                          <a:ea typeface="Meiryo" pitchFamily="34" charset="-122"/>
-                          <a:cs typeface="Meiryo" pitchFamily="34" charset="-120"/>
-                        </a:rPr>
-                        <a:t>2025</a:t>
-                      </a:r>
-                      <a:endParaRPr lang="ja-JP" sz="1800" dirty="0">
-                        <a:latin typeface="Meiryo" charset="0"/>
-                        <a:ea typeface="Meiryo" charset="0"/>
-                        <a:cs typeface="Meiryo" charset="0"/>
-                      </a:endParaRPr>
-                    </a:p>
-                  </a:txBody>
-                  <a:tcPr marL="109728" marR="109728" marT="54864" marB="54864" anchor="ctr">
-                    <a:lnL w="0" cap="flat" cmpd="sng" algn="ctr">
-                      <a:noFill/>
-                    </a:lnL>
-                    <a:lnR w="0" cap="flat" cmpd="sng" algn="ctr">
-                      <a:noFill/>
-                    </a:lnR>
-                    <a:lnT w="6350" cap="flat" cmpd="sng" algn="ctr">
-                      <a:solidFill>
-                        <a:srgbClr val="BFBFBF"/>
-                      </a:solidFill>
-                      <a:prstDash val="solid"/>
-                      <a:round/>
-                      <a:headEnd type="none" w="med" len="med"/>
-                      <a:tailEnd type="none" w="med" len="med"/>
-                    </a:lnT>
-                    <a:lnB w="19050" cap="flat" cmpd="sng" algn="ctr">
-                      <a:solidFill>
-                        <a:srgbClr val="404040"/>
-                      </a:solidFill>
-                      <a:prstDash val="solid"/>
-                      <a:round/>
-                      <a:headEnd type="none" w="med" len="med"/>
-                      <a:tailEnd type="none" w="med" len="med"/>
-                    </a:lnB>
-                  </a:tcPr>
-                </a:tc>
-                <a:tc>
-                  <a:txBody>
-                    <a:bodyPr/>
-                    <a:lstStyle/>
-                    <a:p>
-                      <a:pPr marL="0" indent="0" algn="ctr">
-                        <a:buNone/>
-                      </a:pPr>
-                      <a:r>
-                        <a:rPr lang="ja-JP" altLang="en-US" sz="1800" dirty="0">
-                          <a:solidFill>
-                            <a:srgbClr val="262626"/>
-                          </a:solidFill>
-                          <a:latin typeface="Meiryo" pitchFamily="34" charset="0"/>
-                          <a:ea typeface="Meiryo" pitchFamily="34" charset="-122"/>
-                          <a:cs typeface="Meiryo" pitchFamily="34" charset="-120"/>
-                        </a:rPr>
-                        <a:t>Nat. Comput. Sci.</a:t>
-                      </a:r>
-                      <a:endParaRPr lang="ja-JP" sz="1800" dirty="0">
-                        <a:latin typeface="Meiryo" charset="0"/>
-                        <a:ea typeface="Meiryo" charset="0"/>
-                        <a:cs typeface="Meiryo" charset="0"/>
-                      </a:endParaRPr>
-                    </a:p>
-                  </a:txBody>
-                  <a:tcPr marL="109728" marR="109728" marT="54864" marB="54864" anchor="ctr">
-                    <a:lnL w="0" cap="flat" cmpd="sng" algn="ctr">
-                      <a:noFill/>
-                    </a:lnL>
-                    <a:lnR w="0" cap="flat" cmpd="sng" algn="ctr">
-                      <a:noFill/>
-                    </a:lnR>
-                    <a:lnT w="6350" cap="flat" cmpd="sng" algn="ctr">
-                      <a:solidFill>
-                        <a:srgbClr val="BFBFBF"/>
-                      </a:solidFill>
-                      <a:prstDash val="solid"/>
-                      <a:round/>
-                      <a:headEnd type="none" w="med" len="med"/>
-                      <a:tailEnd type="none" w="med" len="med"/>
-                    </a:lnT>
-                    <a:lnB w="19050" cap="flat" cmpd="sng" algn="ctr">
-                      <a:solidFill>
-                        <a:srgbClr val="404040"/>
-                      </a:solidFill>
-                      <a:prstDash val="solid"/>
-                      <a:round/>
-                      <a:headEnd type="none" w="med" len="med"/>
-                      <a:tailEnd type="none" w="med" len="med"/>
-                    </a:lnB>
-                  </a:tcPr>
-                </a:tc>
-                <a:tc>
-                  <a:txBody>
-                    <a:bodyPr/>
-                    <a:lstStyle/>
-                    <a:p>
-                      <a:pPr marL="0" indent="0" algn="ctr">
-                        <a:buNone/>
-                      </a:pPr>
-                      <a:r>
-                        <a:rPr lang="ja-JP" altLang="en-US" sz="1800" dirty="0">
-                          <a:solidFill>
-                            <a:srgbClr val="262626"/>
-                          </a:solidFill>
-                          <a:latin typeface="Meiryo" pitchFamily="34" charset="0"/>
-                          <a:ea typeface="Meiryo" pitchFamily="34" charset="-122"/>
-                          <a:cs typeface="Meiryo" pitchFamily="34" charset="-120"/>
-                        </a:rPr>
-                        <a:t>6</a:t>
-                      </a:r>
-                      <a:endParaRPr lang="ja-JP" sz="1800" dirty="0">
-                        <a:latin typeface="Meiryo" charset="0"/>
-                        <a:ea typeface="Meiryo" charset="0"/>
-                        <a:cs typeface="Meiryo" charset="0"/>
-                      </a:endParaRPr>
-                    </a:p>
-                  </a:txBody>
-                  <a:tcPr marL="109728" marR="109728" marT="54864" marB="54864" anchor="ctr">
-                    <a:lnL w="0" cap="flat" cmpd="sng" algn="ctr">
-                      <a:noFill/>
-                    </a:lnL>
-                    <a:lnR w="0" cap="flat" cmpd="sng" algn="ctr">
-                      <a:noFill/>
-                    </a:lnR>
-                    <a:lnT w="6350" cap="flat" cmpd="sng" algn="ctr">
-                      <a:solidFill>
-                        <a:srgbClr val="BFBFBF"/>
-                      </a:solidFill>
-                      <a:prstDash val="solid"/>
-                      <a:round/>
-                      <a:headEnd type="none" w="med" len="med"/>
-                      <a:tailEnd type="none" w="med" len="med"/>
-                    </a:lnT>
-                    <a:lnB w="19050" cap="flat" cmpd="sng" algn="ctr">
-                      <a:solidFill>
-                        <a:srgbClr val="404040"/>
-                      </a:solidFill>
-                      <a:prstDash val="solid"/>
-                      <a:round/>
-                      <a:headEnd type="none" w="med" len="med"/>
-                      <a:tailEnd type="none" w="med" len="med"/>
-                    </a:lnB>
-                  </a:tcPr>
-                </a:tc>
-                <a:extLst>
-                  <a:ext uri="{0D108BD9-81ED-4DB2-BD59-A6C34878D82A}">
-                    <a16:rowId xmlns:a16="http://schemas.microsoft.com/office/drawing/2014/main" val="10003"/>
-                  </a:ext>
-                </a:extLst>
-              </a:tr>
-            </a:tbl>
-          </a:graphicData>
-        </a:graphic>
-      </p:graphicFrame>
-      <p:sp>
-        <p:nvSpPr>
-          <p:cNvPr id="6" name="Text 3"/>
-          <p:cNvSpPr txBox="1"/>
-          <p:nvPr/>
-        </p:nvSpPr>
-        <p:spPr>
-          <a:xfrm>
-            <a:off x="548640" y="5303520"/>
-            <a:ext cx="11094415" cy="320040"/>
-          </a:xfrm>
-          <a:prstGeom prst="rect">
-            <a:avLst/>
-          </a:prstGeom>
-          <a:noFill/>
-          <a:ln/>
-        </p:spPr>
-        <p:txBody>
-          <a:bodyPr wrap="square" lIns="0" tIns="0" rIns="0" bIns="0" rtlCol="0" anchor="ctr"/>
-          <a:lstStyle/>
-          <a:p>
-            <a:pPr marL="0" indent="0">
-              <a:buNone/>
-            </a:pPr>
-            <a:r>
-              <a:rPr lang="ja-JP" altLang="en-US" sz="1400" dirty="0">
-                <a:solidFill>
-                  <a:srgbClr val="595959"/>
-                </a:solidFill>
-                <a:latin typeface="Meiryo" pitchFamily="34" charset="0"/>
-                <a:ea typeface="Meiryo" pitchFamily="34" charset="-122"/>
-                <a:cs typeface="Meiryo" pitchFamily="34" charset="-120"/>
-              </a:rPr>
-              <a:t>被引用数は OpenAlex による（2026年6月時点）</a:t>
-            </a:r>
-            <a:endParaRPr lang="ja-JP" sz="1400" dirty="0"/>
-          </a:p>
-        </p:txBody>
-      </p:sp>
-    </p:spTree>
-  </p:cSld>
-  <p:clrMapOvr>
-    <a:masterClrMapping/>
-  </p:clrMapOvr>
-</p:sld>
-</file>
-
-<file path=ppt/slides/slide14.xml><?xml version="1.0" encoding="utf-8"?>
-<p:sld xmlns:a="http://schemas.openxmlformats.org/drawingml/2006/main" xmlns:r="http://schemas.openxmlformats.org/officeDocument/2006/relationships" xmlns:p="http://schemas.openxmlformats.org/presentationml/2006/main" show="0">
-  <p:cSld name="Slide 12">
-    <p:bg>
-      <p:bgPr>
-        <a:solidFill>
-          <a:srgbClr val="FFFFFF"/>
-        </a:solidFill>
-        <a:effectLst/>
-      </p:bgPr>
-    </p:bg>
-    <p:spTree>
-      <p:nvGrpSpPr>
-        <p:cNvPr id="1" name=""/>
-        <p:cNvGrpSpPr/>
-        <p:nvPr/>
-      </p:nvGrpSpPr>
-      <p:grpSpPr>
-        <a:xfrm>
-          <a:off x="0" y="0"/>
-          <a:ext cx="0" cy="0"/>
-          <a:chOff x="0" y="0"/>
-          <a:chExt cx="0" cy="0"/>
-        </a:xfrm>
-      </p:grpSpPr>
-      <p:sp>
-        <p:nvSpPr>
-          <p:cNvPr id="2" name="Text 0"/>
-          <p:cNvSpPr txBox="1"/>
-          <p:nvPr/>
-        </p:nvSpPr>
-        <p:spPr>
-          <a:xfrm>
-            <a:off x="548640" y="365760"/>
-            <a:ext cx="11094415" cy="594360"/>
-          </a:xfrm>
-          <a:prstGeom prst="rect">
-            <a:avLst/>
-          </a:prstGeom>
-          <a:noFill/>
-          <a:ln/>
-        </p:spPr>
-        <p:txBody>
-          <a:bodyPr wrap="square" lIns="0" tIns="0" rIns="0" bIns="0" rtlCol="0" anchor="ctr"/>
-          <a:lstStyle/>
-          <a:p>
-            <a:pPr marL="0" indent="0">
-              <a:buNone/>
-            </a:pPr>
-            <a:r>
-              <a:rPr lang="ja-JP" altLang="en-US" sz="2600" b="1" dirty="0">
-                <a:solidFill>
-                  <a:srgbClr val="1F3864"/>
-                </a:solidFill>
-                <a:latin typeface="Meiryo" pitchFamily="34" charset="0"/>
-                <a:ea typeface="Meiryo" pitchFamily="34" charset="-122"/>
-                <a:cs typeface="Meiryo" pitchFamily="34" charset="-120"/>
-              </a:rPr>
-              <a:t>確認事項</a:t>
-            </a:r>
-            <a:endParaRPr lang="ja-JP" sz="2600" dirty="0"/>
-          </a:p>
-        </p:txBody>
-      </p:sp>
-      <p:sp>
-        <p:nvSpPr>
-          <p:cNvPr id="3" name="Text 1"/>
-          <p:cNvSpPr txBox="1"/>
-          <p:nvPr/>
-        </p:nvSpPr>
-        <p:spPr>
-          <a:xfrm>
-            <a:off x="11094415" y="6400800"/>
-            <a:ext cx="548640" cy="274320"/>
-          </a:xfrm>
-          <a:prstGeom prst="rect">
-            <a:avLst/>
-          </a:prstGeom>
-          <a:noFill/>
-          <a:ln/>
-        </p:spPr>
-        <p:txBody>
-          <a:bodyPr wrap="square" lIns="0" tIns="0" rIns="0" bIns="0" rtlCol="0" anchor="ctr"/>
-          <a:lstStyle/>
-          <a:p>
-            <a:pPr marL="0" indent="0" algn="r">
-              <a:buNone/>
-            </a:pPr>
-            <a:r>
-              <a:rPr lang="ja-JP" altLang="en-US" sz="1200" dirty="0">
-                <a:solidFill>
-                  <a:srgbClr val="7F7F7F"/>
-                </a:solidFill>
-                <a:latin typeface="Meiryo" pitchFamily="34" charset="0"/>
-                <a:ea typeface="Meiryo" pitchFamily="34" charset="-122"/>
-                <a:cs typeface="Meiryo" pitchFamily="34" charset="-120"/>
-              </a:rPr>
-              <a:t>12</a:t>
-            </a:r>
-            <a:endParaRPr lang="ja-JP" sz="1200" dirty="0"/>
-          </a:p>
-        </p:txBody>
-      </p:sp>
-      <p:sp>
-        <p:nvSpPr>
-          <p:cNvPr id="4" name="Text 2"/>
-          <p:cNvSpPr txBox="1"/>
-          <p:nvPr/>
-        </p:nvSpPr>
-        <p:spPr>
-          <a:xfrm>
-            <a:off x="548640" y="1234440"/>
-            <a:ext cx="11094415" cy="4937760"/>
-          </a:xfrm>
-          <a:prstGeom prst="rect">
-            <a:avLst/>
-          </a:prstGeom>
-          <a:noFill/>
-          <a:ln/>
-        </p:spPr>
-        <p:txBody>
-          <a:bodyPr wrap="square" lIns="0" tIns="0" rIns="0" bIns="0" rtlCol="0" anchor="t"/>
-          <a:lstStyle/>
-          <a:p>
-            <a:pPr marL="304800" indent="-304800">
-              <a:spcAft>
-                <a:spcPts val="1000"/>
-              </a:spcAft>
-              <a:buSzPct val="100000"/>
-              <a:buFont typeface="+mj-lt"/>
-              <a:buAutoNum type="arabicPeriod"/>
-            </a:pPr>
-            <a:r>
-              <a:rPr lang="ja-JP" altLang="en-US" sz="2000" dirty="0">
-                <a:solidFill>
-                  <a:srgbClr val="262626"/>
-                </a:solidFill>
-                <a:latin typeface="Meiryo" pitchFamily="34" charset="0"/>
-                <a:ea typeface="Meiryo" pitchFamily="34" charset="-122"/>
-                <a:cs typeface="Meiryo" pitchFamily="34" charset="-120"/>
-              </a:rPr>
-              <a:t>hot streak を、研究者ごとの論文の再収集を前提に進めてよいか</a:t>
-            </a:r>
-            <a:endParaRPr lang="ja-JP" sz="2000" dirty="0"/>
-          </a:p>
-          <a:p>
-            <a:pPr marL="304800" indent="-304800">
-              <a:spcAft>
-                <a:spcPts val="1000"/>
-              </a:spcAft>
-              <a:buSzPct val="100000"/>
-              <a:buFont typeface="+mj-lt"/>
-              <a:buAutoNum type="arabicPeriod"/>
-            </a:pPr>
-            <a:r>
-              <a:rPr lang="ja-JP" altLang="en-US" sz="2000" dirty="0">
-                <a:solidFill>
-                  <a:srgbClr val="262626"/>
-                </a:solidFill>
-                <a:latin typeface="Meiryo" pitchFamily="34" charset="0"/>
-                <a:ea typeface="Meiryo" pitchFamily="34" charset="-122"/>
-                <a:cs typeface="Meiryo" pitchFamily="34" charset="-120"/>
-              </a:rPr>
-              <a:t>対象期間：2000年以降でよいか（1990年代以前の62件はすべて AISIN IMRA 米国法人）</a:t>
-            </a:r>
-            <a:endParaRPr lang="ja-JP" sz="2000" dirty="0"/>
-          </a:p>
-          <a:p>
-            <a:pPr marL="304800" indent="-304800">
-              <a:spcAft>
-                <a:spcPts val="1000"/>
-              </a:spcAft>
-              <a:buSzPct val="100000"/>
-              <a:buFont typeface="+mj-lt"/>
-              <a:buAutoNum type="arabicPeriod"/>
-            </a:pPr>
-            <a:r>
-              <a:rPr lang="ja-JP" altLang="en-US" sz="2000" dirty="0">
-                <a:solidFill>
-                  <a:srgbClr val="262626"/>
-                </a:solidFill>
-                <a:latin typeface="Meiryo" pitchFamily="34" charset="0"/>
-                <a:ea typeface="Meiryo" pitchFamily="34" charset="-122"/>
-                <a:cs typeface="Meiryo" pitchFamily="34" charset="-120"/>
-              </a:rPr>
-              <a:t>対象組織：現在の4組織でよいか</a:t>
-            </a:r>
-            <a:endParaRPr lang="ja-JP" sz="2000" dirty="0"/>
-          </a:p>
-          <a:p>
-            <a:pPr marL="457200" lvl="1" indent="-228600">
-              <a:spcAft>
-                <a:spcPts val="1000"/>
-              </a:spcAft>
-              <a:buSzPct val="100000"/>
-              <a:buChar char="•"/>
-            </a:pPr>
-            <a:r>
-              <a:rPr lang="ja-JP" altLang="en-US" sz="1800" dirty="0">
-                <a:solidFill>
-                  <a:srgbClr val="262626"/>
-                </a:solidFill>
-                <a:latin typeface="Meiryo" pitchFamily="34" charset="0"/>
-                <a:ea typeface="Meiryo" pitchFamily="34" charset="-122"/>
-                <a:cs typeface="Meiryo" pitchFamily="34" charset="-120"/>
-              </a:rPr>
-              <a:t>デンソー、Toyota Research Institute などを加えるか</a:t>
-            </a:r>
-            <a:endParaRPr lang="ja-JP" sz="2000" dirty="0"/>
-          </a:p>
-          <a:p>
-            <a:pPr marL="457200" lvl="1" indent="-228600">
-              <a:spcAft>
-                <a:spcPts val="1000"/>
-              </a:spcAft>
-              <a:buSzPct val="100000"/>
-              <a:buChar char="•"/>
-            </a:pPr>
-            <a:r>
-              <a:rPr lang="ja-JP" altLang="en-US" sz="1800" dirty="0">
-                <a:solidFill>
-                  <a:srgbClr val="262626"/>
-                </a:solidFill>
-                <a:latin typeface="Meiryo" pitchFamily="34" charset="0"/>
-                <a:ea typeface="Meiryo" pitchFamily="34" charset="-122"/>
-                <a:cs typeface="Meiryo" pitchFamily="34" charset="-120"/>
-              </a:rPr>
-              <a:t>豊田工業大学は教育研究機関のため、除外を提案</a:t>
-            </a:r>
-            <a:endParaRPr lang="ja-JP" sz="2000" dirty="0"/>
-          </a:p>
-          <a:p>
-            <a:pPr marL="304800" indent="-304800">
-              <a:spcAft>
-                <a:spcPts val="1000"/>
-              </a:spcAft>
-              <a:buSzPct val="100000"/>
-              <a:buFont typeface="+mj-lt"/>
-              <a:buAutoNum type="arabicPeriod"/>
-            </a:pPr>
-            <a:r>
-              <a:rPr lang="ja-JP" altLang="en-US" sz="2000" dirty="0">
-                <a:solidFill>
-                  <a:srgbClr val="262626"/>
-                </a:solidFill>
-                <a:latin typeface="Meiryo" pitchFamily="34" charset="0"/>
-                <a:ea typeface="Meiryo" pitchFamily="34" charset="-122"/>
-                <a:cs typeface="Meiryo" pitchFamily="34" charset="-120"/>
-              </a:rPr>
-              <a:t>Sota Hayashi さんとの役割分担</a:t>
-            </a:r>
-            <a:endParaRPr lang="ja-JP" sz="2000" dirty="0"/>
-          </a:p>
-        </p:txBody>
-      </p:sp>
-    </p:spTree>
-  </p:cSld>
-  <p:clrMapOvr>
-    <a:masterClrMapping/>
-  </p:clrMapOvr>
-</p:sld>
-</file>
-
-<file path=ppt/slides/slide15.xml><?xml version="1.0" encoding="utf-8"?>
 <p:sld xmlns:a="http://schemas.openxmlformats.org/drawingml/2006/main" xmlns:r="http://schemas.openxmlformats.org/officeDocument/2006/relationships" xmlns:p="http://schemas.openxmlformats.org/presentationml/2006/main">
   <p:cSld name="Slide 14">
     <p:bg>
@@ -7828,7 +5506,7 @@
 </p:sld>
 </file>
 
-<file path=ppt/slides/slide16.xml><?xml version="1.0" encoding="utf-8"?>
+<file path=ppt/slides/slide13.xml><?xml version="1.0" encoding="utf-8"?>
 <p:sld xmlns:a="http://schemas.openxmlformats.org/drawingml/2006/main" xmlns:r="http://schemas.openxmlformats.org/officeDocument/2006/relationships" xmlns:p="http://schemas.openxmlformats.org/presentationml/2006/main">
   <p:cSld name="Slide 14">
     <p:bg>
@@ -8964,6 +6642,642 @@
 </p:sld>
 </file>
 
+<file path=ppt/slides/slide14.xml><?xml version="1.0" encoding="utf-8"?>
+<p:sld xmlns:a="http://schemas.openxmlformats.org/drawingml/2006/main" xmlns:p="http://schemas.openxmlformats.org/presentationml/2006/main" xmlns:r="http://schemas.openxmlformats.org/officeDocument/2006/relationships">
+  <p:cSld>
+    <p:spTree>
+      <p:nvGrpSpPr>
+        <p:cNvPr id="1" name=""/>
+        <p:cNvGrpSpPr/>
+        <p:nvPr/>
+      </p:nvGrpSpPr>
+      <p:grpSpPr/>
+      <p:sp>
+        <p:nvSpPr>
+          <p:cNvPr id="2" name="Text 0"/>
+          <p:cNvSpPr txBox="1"/>
+          <p:nvPr/>
+        </p:nvSpPr>
+        <p:spPr>
+          <a:xfrm>
+            <a:off x="548640" y="365760"/>
+            <a:ext cx="11094415" cy="594360"/>
+          </a:xfrm>
+          <a:prstGeom prst="rect">
+            <a:avLst/>
+          </a:prstGeom>
+          <a:noFill/>
+          <a:ln/>
+        </p:spPr>
+        <p:txBody>
+          <a:bodyPr wrap="square" lIns="0" tIns="0" rIns="0" bIns="0" rtlCol="0" anchor="ctr"/>
+          <a:lstStyle/>
+          <a:p>
+            <a:pPr marL="0" indent="0">
+              <a:buNone/>
+            </a:pPr>
+            <a:r>
+              <a:rPr lang="ja-JP" altLang="en-US" sz="2600" b="1" dirty="0">
+                <a:solidFill>
+                  <a:srgbClr val="1F3864"/>
+                </a:solidFill>
+                <a:latin typeface="Meiryo" pitchFamily="34" charset="0"/>
+                <a:ea typeface="Meiryo" pitchFamily="34" charset="-122"/>
+                <a:cs typeface="Meiryo" pitchFamily="34" charset="-120"/>
+              </a:rPr>
+              <a:t>2. 一般論文との比較（トヨタ系列全体）：順位の分布</a:t>
+            </a:r>
+            <a:endParaRPr lang="ja-JP" sz="2600" dirty="0"/>
+          </a:p>
+        </p:txBody>
+      </p:sp>
+      <p:sp>
+        <p:nvSpPr>
+          <p:cNvPr id="3" name="Text 1"/>
+          <p:cNvSpPr txBox="1"/>
+          <p:nvPr/>
+        </p:nvSpPr>
+        <p:spPr>
+          <a:xfrm>
+            <a:off x="548640" y="1005840"/>
+            <a:ext cx="11094415" cy="365760"/>
+          </a:xfrm>
+          <a:prstGeom prst="rect">
+            <a:avLst/>
+          </a:prstGeom>
+          <a:noFill/>
+          <a:ln/>
+        </p:spPr>
+        <p:txBody>
+          <a:bodyPr wrap="square" lIns="0" tIns="0" rIns="0" bIns="0" rtlCol="0" anchor="ctr"/>
+          <a:lstStyle/>
+          <a:p>
+            <a:pPr marL="0" indent="0">
+              <a:buNone/>
+            </a:pPr>
+            <a:r>
+              <a:rPr lang="ja-JP" altLang="en-US" sz="1600" dirty="0">
+                <a:solidFill>
+                  <a:srgbClr val="595959"/>
+                </a:solidFill>
+                <a:latin typeface="Meiryo" pitchFamily="34" charset="0"/>
+                <a:ea typeface="Meiryo" pitchFamily="34" charset="-122"/>
+                <a:cs typeface="Meiryo" pitchFamily="34" charset="-120"/>
+              </a:rPr>
+              <a:t>前ページの表の各マスを、中央値の代わりに順位の分布にしたもの（太字は前ページの表の中央値）</a:t>
+            </a:r>
+            <a:endParaRPr lang="ja-JP" sz="1600" dirty="0"/>
+          </a:p>
+        </p:txBody>
+      </p:sp>
+      <p:sp>
+        <p:nvSpPr>
+          <p:cNvPr id="4" name="Text 2"/>
+          <p:cNvSpPr txBox="1"/>
+          <p:nvPr/>
+        </p:nvSpPr>
+        <p:spPr>
+          <a:xfrm>
+            <a:off x="11094415" y="6400800"/>
+            <a:ext cx="548640" cy="274320"/>
+          </a:xfrm>
+          <a:prstGeom prst="rect">
+            <a:avLst/>
+          </a:prstGeom>
+          <a:noFill/>
+          <a:ln/>
+        </p:spPr>
+        <p:txBody>
+          <a:bodyPr wrap="square" lIns="0" tIns="0" rIns="0" bIns="0" rtlCol="0" anchor="ctr"/>
+          <a:lstStyle/>
+          <a:p>
+            <a:pPr marL="0" indent="0" algn="r">
+              <a:buNone/>
+            </a:pPr>
+            <a:r>
+              <a:rPr lang="ja-JP" altLang="en-US" sz="1200" dirty="0">
+                <a:solidFill>
+                  <a:srgbClr val="7F7F7F"/>
+                </a:solidFill>
+                <a:latin typeface="Meiryo" pitchFamily="34" charset="0"/>
+                <a:ea typeface="Meiryo" pitchFamily="34" charset="-122"/>
+                <a:cs typeface="Meiryo" pitchFamily="34" charset="-120"/>
+              </a:rPr>
+              <a:t>8</a:t>
+            </a:r>
+            <a:endParaRPr lang="ja-JP" sz="1200" dirty="0"/>
+          </a:p>
+        </p:txBody>
+      </p:sp>
+      <p:pic>
+        <p:nvPicPr>
+          <p:cNvPr id="5" name="Picture 4" descr="fig_slide7_rank_by_condition.png"/>
+          <p:cNvPicPr>
+            <a:picLocks noChangeAspect="1"/>
+          </p:cNvPicPr>
+          <p:nvPr/>
+        </p:nvPicPr>
+        <p:blipFill>
+          <a:blip r:embed="rId2"/>
+          <a:stretch>
+            <a:fillRect/>
+          </a:stretch>
+        </p:blipFill>
+        <p:spPr>
+          <a:xfrm>
+            <a:off x="1589853" y="1417320"/>
+            <a:ext cx="9009246" cy="4937760"/>
+          </a:xfrm>
+          <a:prstGeom prst="rect">
+            <a:avLst/>
+          </a:prstGeom>
+        </p:spPr>
+      </p:pic>
+    </p:spTree>
+  </p:cSld>
+  <p:clrMapOvr>
+    <a:masterClrMapping/>
+  </p:clrMapOvr>
+</p:sld>
+</file>
+
+<file path=ppt/slides/slide15.xml><?xml version="1.0" encoding="utf-8"?>
+<p:sld xmlns:a="http://schemas.openxmlformats.org/drawingml/2006/main" xmlns:p="http://schemas.openxmlformats.org/presentationml/2006/main" xmlns:r="http://schemas.openxmlformats.org/officeDocument/2006/relationships">
+  <p:cSld>
+    <p:spTree>
+      <p:nvGrpSpPr>
+        <p:cNvPr id="1" name=""/>
+        <p:cNvGrpSpPr/>
+        <p:nvPr/>
+      </p:nvGrpSpPr>
+      <p:grpSpPr/>
+      <p:sp>
+        <p:nvSpPr>
+          <p:cNvPr id="2" name="Text 0"/>
+          <p:cNvSpPr txBox="1"/>
+          <p:nvPr/>
+        </p:nvSpPr>
+        <p:spPr>
+          <a:xfrm>
+            <a:off x="548640" y="365760"/>
+            <a:ext cx="11094415" cy="594360"/>
+          </a:xfrm>
+          <a:prstGeom prst="rect">
+            <a:avLst/>
+          </a:prstGeom>
+          <a:noFill/>
+          <a:ln/>
+        </p:spPr>
+        <p:txBody>
+          <a:bodyPr wrap="square" lIns="0" tIns="0" rIns="0" bIns="0" rtlCol="0" anchor="ctr"/>
+          <a:lstStyle/>
+          <a:p>
+            <a:pPr marL="0" indent="0">
+              <a:buNone/>
+            </a:pPr>
+            <a:r>
+              <a:rPr lang="ja-JP" altLang="en-US" sz="2600" b="1" dirty="0">
+                <a:solidFill>
+                  <a:srgbClr val="1F3864"/>
+                </a:solidFill>
+                <a:latin typeface="Meiryo" pitchFamily="34" charset="0"/>
+                <a:ea typeface="Meiryo" pitchFamily="34" charset="-122"/>
+                <a:cs typeface="Meiryo" pitchFamily="34" charset="-120"/>
+              </a:rPr>
+              <a:t>2. 一般論文との比較（組織別）：順位の分布</a:t>
+            </a:r>
+            <a:endParaRPr lang="ja-JP" sz="2600" dirty="0"/>
+          </a:p>
+        </p:txBody>
+      </p:sp>
+      <p:sp>
+        <p:nvSpPr>
+          <p:cNvPr id="3" name="Text 1"/>
+          <p:cNvSpPr txBox="1"/>
+          <p:nvPr/>
+        </p:nvSpPr>
+        <p:spPr>
+          <a:xfrm>
+            <a:off x="548640" y="1005840"/>
+            <a:ext cx="11094415" cy="365760"/>
+          </a:xfrm>
+          <a:prstGeom prst="rect">
+            <a:avLst/>
+          </a:prstGeom>
+          <a:noFill/>
+          <a:ln/>
+        </p:spPr>
+        <p:txBody>
+          <a:bodyPr wrap="square" lIns="0" tIns="0" rIns="0" bIns="0" rtlCol="0" anchor="ctr"/>
+          <a:lstStyle/>
+          <a:p>
+            <a:pPr marL="0" indent="0">
+              <a:buNone/>
+            </a:pPr>
+            <a:r>
+              <a:rPr lang="ja-JP" altLang="en-US" sz="1600" dirty="0">
+                <a:solidFill>
+                  <a:srgbClr val="595959"/>
+                </a:solidFill>
+                <a:latin typeface="Meiryo" pitchFamily="34" charset="0"/>
+                <a:ea typeface="Meiryo" pitchFamily="34" charset="-122"/>
+                <a:cs typeface="Meiryo" pitchFamily="34" charset="-120"/>
+              </a:rPr>
+              <a:t>前ページの表の各マスを、中央値の代わりに順位の分布にしたもの（太字は前ページの表の中央値）</a:t>
+            </a:r>
+            <a:endParaRPr lang="ja-JP" sz="1600" dirty="0"/>
+          </a:p>
+        </p:txBody>
+      </p:sp>
+      <p:sp>
+        <p:nvSpPr>
+          <p:cNvPr id="4" name="Text 2"/>
+          <p:cNvSpPr txBox="1"/>
+          <p:nvPr/>
+        </p:nvSpPr>
+        <p:spPr>
+          <a:xfrm>
+            <a:off x="11094415" y="6400800"/>
+            <a:ext cx="548640" cy="274320"/>
+          </a:xfrm>
+          <a:prstGeom prst="rect">
+            <a:avLst/>
+          </a:prstGeom>
+          <a:noFill/>
+          <a:ln/>
+        </p:spPr>
+        <p:txBody>
+          <a:bodyPr wrap="square" lIns="0" tIns="0" rIns="0" bIns="0" rtlCol="0" anchor="ctr"/>
+          <a:lstStyle/>
+          <a:p>
+            <a:pPr marL="0" indent="0" algn="r">
+              <a:buNone/>
+            </a:pPr>
+            <a:r>
+              <a:rPr lang="ja-JP" altLang="en-US" sz="1200" dirty="0">
+                <a:solidFill>
+                  <a:srgbClr val="7F7F7F"/>
+                </a:solidFill>
+                <a:latin typeface="Meiryo" pitchFamily="34" charset="0"/>
+                <a:ea typeface="Meiryo" pitchFamily="34" charset="-122"/>
+                <a:cs typeface="Meiryo" pitchFamily="34" charset="-120"/>
+              </a:rPr>
+              <a:t>10</a:t>
+            </a:r>
+            <a:endParaRPr lang="ja-JP" sz="1200" dirty="0"/>
+          </a:p>
+        </p:txBody>
+      </p:sp>
+      <p:pic>
+        <p:nvPicPr>
+          <p:cNvPr id="5" name="Picture 4" descr="fig_slide8_rank_by_org.png"/>
+          <p:cNvPicPr>
+            <a:picLocks noChangeAspect="1"/>
+          </p:cNvPicPr>
+          <p:nvPr/>
+        </p:nvPicPr>
+        <p:blipFill>
+          <a:blip r:embed="rId2"/>
+          <a:stretch>
+            <a:fillRect/>
+          </a:stretch>
+        </p:blipFill>
+        <p:spPr>
+          <a:xfrm>
+            <a:off x="1589853" y="1417320"/>
+            <a:ext cx="9009246" cy="4937760"/>
+          </a:xfrm>
+          <a:prstGeom prst="rect">
+            <a:avLst/>
+          </a:prstGeom>
+        </p:spPr>
+      </p:pic>
+    </p:spTree>
+  </p:cSld>
+  <p:clrMapOvr>
+    <a:masterClrMapping/>
+  </p:clrMapOvr>
+</p:sld>
+</file>
+
+<file path=ppt/slides/slide16.xml><?xml version="1.0" encoding="utf-8"?>
+<p:sld xmlns:a="http://schemas.openxmlformats.org/drawingml/2006/main" xmlns:p="http://schemas.openxmlformats.org/presentationml/2006/main" xmlns:r="http://schemas.openxmlformats.org/officeDocument/2006/relationships">
+  <p:cSld>
+    <p:spTree>
+      <p:nvGrpSpPr>
+        <p:cNvPr id="1" name=""/>
+        <p:cNvGrpSpPr/>
+        <p:nvPr/>
+      </p:nvGrpSpPr>
+      <p:grpSpPr/>
+      <p:sp>
+        <p:nvSpPr>
+          <p:cNvPr id="2" name="Text 0"/>
+          <p:cNvSpPr txBox="1"/>
+          <p:nvPr/>
+        </p:nvSpPr>
+        <p:spPr>
+          <a:xfrm>
+            <a:off x="548640" y="365760"/>
+            <a:ext cx="11094415" cy="594360"/>
+          </a:xfrm>
+          <a:prstGeom prst="rect">
+            <a:avLst/>
+          </a:prstGeom>
+          <a:noFill/>
+          <a:ln/>
+        </p:spPr>
+        <p:txBody>
+          <a:bodyPr wrap="square" lIns="0" tIns="0" rIns="0" bIns="0" rtlCol="0" anchor="ctr"/>
+          <a:lstStyle/>
+          <a:p>
+            <a:pPr marL="0" indent="0">
+              <a:buNone/>
+            </a:pPr>
+            <a:r>
+              <a:rPr lang="ja-JP" altLang="en-US" sz="2600" b="1" dirty="0">
+                <a:solidFill>
+                  <a:srgbClr val="1F3864"/>
+                </a:solidFill>
+                <a:latin typeface="Meiryo" pitchFamily="34" charset="0"/>
+                <a:ea typeface="Meiryo" pitchFamily="34" charset="-122"/>
+                <a:cs typeface="Meiryo" pitchFamily="34" charset="-120"/>
+              </a:rPr>
+              <a:t>補足：チーム規模別の破壊性：順位の分布</a:t>
+            </a:r>
+            <a:endParaRPr lang="ja-JP" sz="2600" dirty="0"/>
+          </a:p>
+        </p:txBody>
+      </p:sp>
+      <p:sp>
+        <p:nvSpPr>
+          <p:cNvPr id="3" name="Text 1"/>
+          <p:cNvSpPr txBox="1"/>
+          <p:nvPr/>
+        </p:nvSpPr>
+        <p:spPr>
+          <a:xfrm>
+            <a:off x="548640" y="1005840"/>
+            <a:ext cx="11094415" cy="365760"/>
+          </a:xfrm>
+          <a:prstGeom prst="rect">
+            <a:avLst/>
+          </a:prstGeom>
+          <a:noFill/>
+          <a:ln/>
+        </p:spPr>
+        <p:txBody>
+          <a:bodyPr wrap="square" lIns="0" tIns="0" rIns="0" bIns="0" rtlCol="0" anchor="ctr"/>
+          <a:lstStyle/>
+          <a:p>
+            <a:pPr marL="0" indent="0">
+              <a:buNone/>
+            </a:pPr>
+            <a:r>
+              <a:rPr lang="ja-JP" altLang="en-US" sz="1600" dirty="0">
+                <a:solidFill>
+                  <a:srgbClr val="595959"/>
+                </a:solidFill>
+                <a:latin typeface="Meiryo" pitchFamily="34" charset="0"/>
+                <a:ea typeface="Meiryo" pitchFamily="34" charset="-122"/>
+                <a:cs typeface="Meiryo" pitchFamily="34" charset="-120"/>
+              </a:rPr>
+              <a:t>前ページの表の各マスを、中央値の代わりに順位の分布にしたもの（太字は前ページの表の中央値）</a:t>
+            </a:r>
+            <a:endParaRPr lang="ja-JP" sz="1600" dirty="0"/>
+          </a:p>
+        </p:txBody>
+      </p:sp>
+      <p:sp>
+        <p:nvSpPr>
+          <p:cNvPr id="4" name="Text 2"/>
+          <p:cNvSpPr txBox="1"/>
+          <p:nvPr/>
+        </p:nvSpPr>
+        <p:spPr>
+          <a:xfrm>
+            <a:off x="11094415" y="6400800"/>
+            <a:ext cx="548640" cy="274320"/>
+          </a:xfrm>
+          <a:prstGeom prst="rect">
+            <a:avLst/>
+          </a:prstGeom>
+          <a:noFill/>
+          <a:ln/>
+        </p:spPr>
+        <p:txBody>
+          <a:bodyPr wrap="square" lIns="0" tIns="0" rIns="0" bIns="0" rtlCol="0" anchor="ctr"/>
+          <a:lstStyle/>
+          <a:p>
+            <a:pPr marL="0" indent="0" algn="r">
+              <a:buNone/>
+            </a:pPr>
+            <a:r>
+              <a:rPr lang="ja-JP" altLang="en-US" sz="1200" dirty="0">
+                <a:solidFill>
+                  <a:srgbClr val="7F7F7F"/>
+                </a:solidFill>
+                <a:latin typeface="Meiryo" pitchFamily="34" charset="0"/>
+                <a:ea typeface="Meiryo" pitchFamily="34" charset="-122"/>
+                <a:cs typeface="Meiryo" pitchFamily="34" charset="-120"/>
+              </a:rPr>
+              <a:t>14</a:t>
+            </a:r>
+            <a:endParaRPr lang="ja-JP" sz="1200" dirty="0"/>
+          </a:p>
+        </p:txBody>
+      </p:sp>
+      <p:pic>
+        <p:nvPicPr>
+          <p:cNvPr id="5" name="Picture 4" descr="fig_slide11_disruption_by_team.png"/>
+          <p:cNvPicPr>
+            <a:picLocks noChangeAspect="1"/>
+          </p:cNvPicPr>
+          <p:nvPr/>
+        </p:nvPicPr>
+        <p:blipFill>
+          <a:blip r:embed="rId2"/>
+          <a:stretch>
+            <a:fillRect/>
+          </a:stretch>
+        </p:blipFill>
+        <p:spPr>
+          <a:xfrm>
+            <a:off x="1589853" y="1417320"/>
+            <a:ext cx="9009246" cy="4937760"/>
+          </a:xfrm>
+          <a:prstGeom prst="rect">
+            <a:avLst/>
+          </a:prstGeom>
+        </p:spPr>
+      </p:pic>
+    </p:spTree>
+  </p:cSld>
+  <p:clrMapOvr>
+    <a:masterClrMapping/>
+  </p:clrMapOvr>
+</p:sld>
+</file>
+
+<file path=ppt/slides/slide17.xml><?xml version="1.0" encoding="utf-8"?>
+<p:sld xmlns:a="http://schemas.openxmlformats.org/drawingml/2006/main" xmlns:p="http://schemas.openxmlformats.org/presentationml/2006/main" xmlns:r="http://schemas.openxmlformats.org/officeDocument/2006/relationships">
+  <p:cSld>
+    <p:spTree>
+      <p:nvGrpSpPr>
+        <p:cNvPr id="1" name=""/>
+        <p:cNvGrpSpPr/>
+        <p:nvPr/>
+      </p:nvGrpSpPr>
+      <p:grpSpPr/>
+      <p:sp>
+        <p:nvSpPr>
+          <p:cNvPr id="2" name="Text 0"/>
+          <p:cNvSpPr txBox="1"/>
+          <p:nvPr/>
+        </p:nvSpPr>
+        <p:spPr>
+          <a:xfrm>
+            <a:off x="548640" y="365760"/>
+            <a:ext cx="11094415" cy="594360"/>
+          </a:xfrm>
+          <a:prstGeom prst="rect">
+            <a:avLst/>
+          </a:prstGeom>
+          <a:noFill/>
+          <a:ln/>
+        </p:spPr>
+        <p:txBody>
+          <a:bodyPr wrap="square" lIns="0" tIns="0" rIns="0" bIns="0" rtlCol="0" anchor="ctr"/>
+          <a:lstStyle/>
+          <a:p>
+            <a:pPr marL="0" indent="0">
+              <a:buNone/>
+            </a:pPr>
+            <a:r>
+              <a:rPr lang="ja-JP" altLang="en-US" sz="2600" b="1" dirty="0">
+                <a:solidFill>
+                  <a:srgbClr val="1F3864"/>
+                </a:solidFill>
+                <a:latin typeface="Meiryo" pitchFamily="34" charset="0"/>
+                <a:ea typeface="Meiryo" pitchFamily="34" charset="-122"/>
+                <a:cs typeface="Meiryo" pitchFamily="34" charset="-120"/>
+              </a:rPr>
+              <a:t>補足：値そのものの分布</a:t>
+            </a:r>
+            <a:endParaRPr lang="ja-JP" sz="2600" dirty="0"/>
+          </a:p>
+        </p:txBody>
+      </p:sp>
+      <p:sp>
+        <p:nvSpPr>
+          <p:cNvPr id="3" name="Text 1"/>
+          <p:cNvSpPr txBox="1"/>
+          <p:nvPr/>
+        </p:nvSpPr>
+        <p:spPr>
+          <a:xfrm>
+            <a:off x="548640" y="1005840"/>
+            <a:ext cx="11094415" cy="365760"/>
+          </a:xfrm>
+          <a:prstGeom prst="rect">
+            <a:avLst/>
+          </a:prstGeom>
+          <a:noFill/>
+          <a:ln/>
+        </p:spPr>
+        <p:txBody>
+          <a:bodyPr wrap="square" lIns="0" tIns="0" rIns="0" bIns="0" rtlCol="0" anchor="ctr"/>
+          <a:lstStyle/>
+          <a:p>
+            <a:pPr marL="0" indent="0">
+              <a:buNone/>
+            </a:pPr>
+            <a:r>
+              <a:rPr lang="ja-JP" altLang="en-US" sz="1600" dirty="0">
+                <a:solidFill>
+                  <a:srgbClr val="595959"/>
+                </a:solidFill>
+                <a:latin typeface="Meiryo" pitchFamily="34" charset="0"/>
+                <a:ea typeface="Meiryo" pitchFamily="34" charset="-122"/>
+                <a:cs typeface="Meiryo" pitchFamily="34" charset="-120"/>
+              </a:rPr>
+              <a:t>順位にする前の SciSciNet の値を、トヨタの論文（塗り）と同じ分野・年の一般論文（線、分野・年の構成をトヨタに合わせて重み付け）で重ねたもの</a:t>
+            </a:r>
+            <a:endParaRPr lang="ja-JP" sz="1600" dirty="0"/>
+          </a:p>
+        </p:txBody>
+      </p:sp>
+      <p:sp>
+        <p:nvSpPr>
+          <p:cNvPr id="4" name="Text 2"/>
+          <p:cNvSpPr txBox="1"/>
+          <p:nvPr/>
+        </p:nvSpPr>
+        <p:spPr>
+          <a:xfrm>
+            <a:off x="11094415" y="6400800"/>
+            <a:ext cx="548640" cy="274320"/>
+          </a:xfrm>
+          <a:prstGeom prst="rect">
+            <a:avLst/>
+          </a:prstGeom>
+          <a:noFill/>
+          <a:ln/>
+        </p:spPr>
+        <p:txBody>
+          <a:bodyPr wrap="square" lIns="0" tIns="0" rIns="0" bIns="0" rtlCol="0" anchor="ctr"/>
+          <a:lstStyle/>
+          <a:p>
+            <a:pPr marL="0" indent="0" algn="r">
+              <a:buNone/>
+            </a:pPr>
+            <a:r>
+              <a:rPr lang="ja-JP" altLang="en-US" sz="1200" dirty="0">
+                <a:solidFill>
+                  <a:srgbClr val="7F7F7F"/>
+                </a:solidFill>
+                <a:latin typeface="Meiryo" pitchFamily="34" charset="0"/>
+                <a:ea typeface="Meiryo" pitchFamily="34" charset="-122"/>
+                <a:cs typeface="Meiryo" pitchFamily="34" charset="-120"/>
+              </a:rPr>
+              <a:t>17</a:t>
+            </a:r>
+            <a:endParaRPr lang="ja-JP" sz="1200" dirty="0"/>
+          </a:p>
+        </p:txBody>
+      </p:sp>
+      <p:pic>
+        <p:nvPicPr>
+          <p:cNvPr id="5" name="Picture 4" descr="fig_supp_values.png"/>
+          <p:cNvPicPr>
+            <a:picLocks noChangeAspect="1"/>
+          </p:cNvPicPr>
+          <p:nvPr/>
+        </p:nvPicPr>
+        <p:blipFill>
+          <a:blip r:embed="rId2"/>
+          <a:stretch>
+            <a:fillRect/>
+          </a:stretch>
+        </p:blipFill>
+        <p:spPr>
+          <a:xfrm>
+            <a:off x="1589853" y="1417320"/>
+            <a:ext cx="9009246" cy="4937760"/>
+          </a:xfrm>
+          <a:prstGeom prst="rect">
+            <a:avLst/>
+          </a:prstGeom>
+        </p:spPr>
+      </p:pic>
+    </p:spTree>
+  </p:cSld>
+  <p:clrMapOvr>
+    <a:masterClrMapping/>
+  </p:clrMapOvr>
+</p:sld>
+</file>
+
 <file path=ppt/slides/slide2.xml><?xml version="1.0" encoding="utf-8"?>
 <p:sld xmlns:a="http://schemas.openxmlformats.org/drawingml/2006/main" xmlns:r="http://schemas.openxmlformats.org/officeDocument/2006/relationships" xmlns:p="http://schemas.openxmlformats.org/presentationml/2006/main">
   <p:cSld name="Slide 2">
@@ -9103,49 +7417,7 @@
                 <a:ea typeface="Meiryo" pitchFamily="34" charset="-122"/>
                 <a:cs typeface="Meiryo" pitchFamily="34" charset="-120"/>
               </a:rPr>
-              <a:t>目的：</a:t>
-            </a:r>
-            <a:r>
-              <a:rPr lang="ja-JP" altLang="en-US" sz="2000" dirty="0">
-                <a:solidFill>
-                  <a:srgbClr val="262626"/>
-                </a:solidFill>
-                <a:latin typeface="Meiryo" pitchFamily="34" charset="0"/>
-                <a:ea typeface="Meiryo" pitchFamily="34" charset="-122"/>
-                <a:cs typeface="Meiryo" pitchFamily="34" charset="-120"/>
-              </a:rPr>
-              <a:t>トヨタ関連の論文について、新規性・破壊性の水準と、それを左右する要因を調べる</a:t>
-            </a:r>
-            <a:endParaRPr lang="ja-JP" sz="2000" dirty="0"/>
-          </a:p>
-          <a:p>
-            <a:pPr marL="0" indent="0">
-              <a:spcAft>
-                <a:spcPts val="600"/>
-              </a:spcAft>
-              <a:buNone/>
-            </a:pPr>
-            <a:r>
-              <a:rPr lang="ja-JP" altLang="en-US" sz="2000" b="1" dirty="0">
-                <a:solidFill>
-                  <a:srgbClr val="262626"/>
-                </a:solidFill>
-                <a:latin typeface="Meiryo" pitchFamily="34" charset="0"/>
-                <a:ea typeface="Meiryo" pitchFamily="34" charset="-122"/>
-                <a:cs typeface="Meiryo" pitchFamily="34" charset="-120"/>
-              </a:rPr>
-              <a:t>データ：</a:t>
-            </a:r>
-            <a:r>
-              <a:rPr lang="ja-JP" altLang="en-US" sz="2000" dirty="0">
-                <a:solidFill>
-                  <a:srgbClr val="262626"/>
-                </a:solidFill>
-                <a:latin typeface="Meiryo" pitchFamily="34" charset="0"/>
-                <a:ea typeface="Meiryo" pitchFamily="34" charset="-122"/>
-                <a:cs typeface="Meiryo" pitchFamily="34" charset="-120"/>
-              </a:rPr>
-              <a:t>トヨタ関連4組織の公式サイトから収集した論文 919件（OpenAlex で特定 860件）</a:t>
+              <a:t>2</a:t>
             </a:r>
             <a:endParaRPr lang="ja-JP" sz="2000" dirty="0"/>
           </a:p>
@@ -10713,60 +8985,7 @@
                 <a:ea typeface="Meiryo" pitchFamily="34" charset="-122"/>
                 <a:cs typeface="Meiryo" pitchFamily="34" charset="-120"/>
               </a:rPr>
-              <a:t>SciSciNet：約2.5億本の論文について、新規性・破壊性などの指標を計算して公開しているデータ（Northwestern 大学）</a:t>
-            </a:r>
-            <a:endParaRPr lang="ja-JP" sz="2000" dirty="0"/>
-          </a:p>
-          <a:p>
-            <a:pPr marL="228600" indent="-228600">
-              <a:spcAft>
-                <a:spcPts val="800"/>
-              </a:spcAft>
-              <a:buSzPct val="100000"/>
-              <a:buChar char="•"/>
-            </a:pPr>
-            <a:r>
-              <a:rPr lang="ja-JP" altLang="en-US" sz="2000" dirty="0">
-                <a:solidFill>
-                  <a:srgbClr val="262626"/>
-                </a:solidFill>
-                <a:latin typeface="Meiryo" pitchFamily="34" charset="0"/>
-                <a:ea typeface="Meiryo" pitchFamily="34" charset="-122"/>
-                <a:cs typeface="Meiryo" pitchFamily="34" charset="-120"/>
-              </a:rPr>
-              <a:t>一般論文と比べるには、比較対象にも同じ出典の値が必要なため、公開値を使用</a:t>
-            </a:r>
-            <a:endParaRPr lang="ja-JP" sz="2000" dirty="0"/>
-          </a:p>
-          <a:p>
-            <a:pPr marL="228600" indent="-228600">
-              <a:spcAft>
-                <a:spcPts val="800"/>
-              </a:spcAft>
-              <a:buSzPct val="100000"/>
-              <a:buChar char="•"/>
-            </a:pPr>
-            <a:r>
-              <a:rPr lang="ja-JP" altLang="en-US" sz="2000" dirty="0">
-                <a:solidFill>
-                  <a:srgbClr val="262626"/>
-                </a:solidFill>
-                <a:latin typeface="Meiryo" pitchFamily="34" charset="0"/>
-                <a:ea typeface="Meiryo" pitchFamily="34" charset="-122"/>
-                <a:cs typeface="Meiryo" pitchFamily="34" charset="-120"/>
-              </a:rPr>
-              <a:t>計算条件の一部が非公開のため、同じ指標を自前でも計算</a:t>
-            </a:r>
-            <a:r>
-              <a:rPr lang="ja-JP" altLang="en-US" sz="2000">
-                <a:solidFill>
-                  <a:srgbClr val="262626"/>
-                </a:solidFill>
-                <a:latin typeface="Meiryo" pitchFamily="34" charset="0"/>
-                <a:ea typeface="Meiryo" pitchFamily="34" charset="-122"/>
-                <a:cs typeface="Meiryo" pitchFamily="34" charset="-120"/>
-              </a:rPr>
-              <a:t>して確認</a:t>
+              <a:t>3</a:t>
             </a:r>
             <a:endParaRPr lang="ja-JP" sz="2000" dirty="0"/>
           </a:p>
@@ -12678,174 +10897,11 @@
                 <a:ea typeface="Meiryo" pitchFamily="34" charset="-122"/>
                 <a:cs typeface="Meiryo" pitchFamily="34" charset="-120"/>
               </a:rPr>
-              <a:t>組織は公式サイトへの掲載で特定</a:t>
+              <a:t>4</a:t>
             </a:r>
             <a:br>
               <a:rPr dirty="0"/>
             </a:br>
-            <a:r>
-              <a:rPr lang="ja-JP" altLang="en-US" sz="1800" dirty="0">
-                <a:solidFill>
-                  <a:srgbClr val="262626"/>
-                </a:solidFill>
-                <a:latin typeface="Meiryo" pitchFamily="34" charset="0"/>
-                <a:ea typeface="Meiryo" pitchFamily="34" charset="-122"/>
-                <a:cs typeface="Meiryo" pitchFamily="34" charset="-120"/>
-              </a:rPr>
-              <a:t>（OpenAlex の所属情報は誤りが多く、トヨタ所属を確認できるのは約半数）</a:t>
-            </a:r>
-            <a:endParaRPr lang="ja-JP" sz="1800" dirty="0"/>
-          </a:p>
-          <a:p>
-            <a:pPr marL="228600" indent="-228600">
-              <a:spcAft>
-                <a:spcPts val="800"/>
-              </a:spcAft>
-              <a:buSzPct val="100000"/>
-              <a:buChar char="•"/>
-            </a:pPr>
-            <a:r>
-              <a:rPr lang="ja-JP" altLang="en-US" sz="1800" dirty="0">
-                <a:solidFill>
-                  <a:srgbClr val="262626"/>
-                </a:solidFill>
-                <a:latin typeface="Meiryo" pitchFamily="34" charset="0"/>
-                <a:ea typeface="Meiryo" pitchFamily="34" charset="-122"/>
-                <a:cs typeface="Meiryo" pitchFamily="34" charset="-120"/>
-              </a:rPr>
-              <a:t>対象</a:t>
-            </a:r>
-            <a:r>
-              <a:rPr lang="ja-JP" altLang="en-US" sz="1800">
-                <a:solidFill>
-                  <a:srgbClr val="262626"/>
-                </a:solidFill>
-                <a:latin typeface="Meiryo" pitchFamily="34" charset="0"/>
-                <a:ea typeface="Meiryo" pitchFamily="34" charset="-122"/>
-                <a:cs typeface="Meiryo" pitchFamily="34" charset="-120"/>
-              </a:rPr>
-              <a:t>は2000年から</a:t>
-            </a:r>
-            <a:r>
-              <a:rPr lang="en-US" altLang="ja-JP" sz="1800" dirty="0">
-                <a:solidFill>
-                  <a:srgbClr val="262626"/>
-                </a:solidFill>
-                <a:latin typeface="Meiryo" pitchFamily="34" charset="0"/>
-                <a:ea typeface="Meiryo" pitchFamily="34" charset="-122"/>
-                <a:cs typeface="Meiryo" pitchFamily="34" charset="-120"/>
-              </a:rPr>
-              <a:t>2025</a:t>
-            </a:r>
-            <a:r>
-              <a:rPr lang="ja-JP" altLang="en-US" sz="1800">
-                <a:solidFill>
-                  <a:srgbClr val="262626"/>
-                </a:solidFill>
-                <a:latin typeface="Meiryo" pitchFamily="34" charset="0"/>
-                <a:ea typeface="Meiryo" pitchFamily="34" charset="-122"/>
-                <a:cs typeface="Meiryo" pitchFamily="34" charset="-120"/>
-              </a:rPr>
-              <a:t>年。</a:t>
-            </a:r>
-            <a:r>
-              <a:rPr lang="ja-JP" altLang="en-US" sz="1800" dirty="0">
-                <a:solidFill>
-                  <a:srgbClr val="262626"/>
-                </a:solidFill>
-                <a:latin typeface="Meiryo" pitchFamily="34" charset="0"/>
-                <a:ea typeface="Meiryo" pitchFamily="34" charset="-122"/>
-                <a:cs typeface="Meiryo" pitchFamily="34" charset="-120"/>
-              </a:rPr>
-              <a:t>2025年以降の</a:t>
-            </a:r>
-            <a:r>
-              <a:rPr lang="ja-JP" altLang="en-US" sz="1800">
-                <a:solidFill>
-                  <a:srgbClr val="262626"/>
-                </a:solidFill>
-                <a:latin typeface="Meiryo" pitchFamily="34" charset="0"/>
-                <a:ea typeface="Meiryo" pitchFamily="34" charset="-122"/>
-                <a:cs typeface="Meiryo" pitchFamily="34" charset="-120"/>
-              </a:rPr>
-              <a:t>論文は指標が欠損している</a:t>
-            </a:r>
-            <a:endParaRPr lang="ja-JP" sz="1800" dirty="0"/>
-          </a:p>
-          <a:p>
-            <a:pPr marL="228600" indent="-228600">
-              <a:spcAft>
-                <a:spcPts val="800"/>
-              </a:spcAft>
-              <a:buSzPct val="100000"/>
-              <a:buChar char="•"/>
-            </a:pPr>
-            <a:r>
-              <a:rPr lang="ja-JP" altLang="en-US" sz="1800">
-                <a:solidFill>
-                  <a:srgbClr val="262626"/>
-                </a:solidFill>
-                <a:latin typeface="Meiryo" pitchFamily="34" charset="0"/>
-                <a:ea typeface="Meiryo" pitchFamily="34" charset="-122"/>
-                <a:cs typeface="Meiryo" pitchFamily="34" charset="-120"/>
-              </a:rPr>
-              <a:t>↑に関して未来</a:t>
-            </a:r>
-            <a:r>
-              <a:rPr lang="ja-JP" altLang="en-US" sz="1800" dirty="0">
-                <a:solidFill>
-                  <a:srgbClr val="262626"/>
-                </a:solidFill>
-                <a:latin typeface="Meiryo" pitchFamily="34" charset="0"/>
-                <a:ea typeface="Meiryo" pitchFamily="34" charset="-122"/>
-                <a:cs typeface="Meiryo" pitchFamily="34" charset="-120"/>
-              </a:rPr>
-              <a:t>創成センターと AISIN IMRA（</a:t>
-            </a:r>
-            <a:r>
-              <a:rPr lang="ja-JP" altLang="en-US" sz="1800">
-                <a:solidFill>
-                  <a:srgbClr val="262626"/>
-                </a:solidFill>
-                <a:latin typeface="Meiryo" pitchFamily="34" charset="0"/>
-                <a:ea typeface="Meiryo" pitchFamily="34" charset="-122"/>
-                <a:cs typeface="Meiryo" pitchFamily="34" charset="-120"/>
-              </a:rPr>
-              <a:t>米国）</a:t>
-            </a:r>
-            <a:r>
-              <a:rPr lang="ja-JP" altLang="en-US">
-                <a:solidFill>
-                  <a:srgbClr val="262626"/>
-                </a:solidFill>
-                <a:latin typeface="Meiryo" pitchFamily="34" charset="0"/>
-                <a:ea typeface="Meiryo" pitchFamily="34" charset="-122"/>
-                <a:cs typeface="Meiryo" pitchFamily="34" charset="-120"/>
-              </a:rPr>
-              <a:t>は</a:t>
-            </a:r>
-            <a:r>
-              <a:rPr lang="ja-JP" altLang="en-US" sz="1800">
-                <a:solidFill>
-                  <a:srgbClr val="262626"/>
-                </a:solidFill>
-                <a:latin typeface="Meiryo" pitchFamily="34" charset="0"/>
-                <a:ea typeface="Meiryo" pitchFamily="34" charset="-122"/>
-                <a:cs typeface="Meiryo" pitchFamily="34" charset="-120"/>
-              </a:rPr>
-              <a:t>新規性</a:t>
-            </a:r>
-            <a:r>
-              <a:rPr lang="ja-JP" altLang="en-US" sz="1800" dirty="0">
-                <a:solidFill>
-                  <a:srgbClr val="262626"/>
-                </a:solidFill>
-                <a:latin typeface="Meiryo" pitchFamily="34" charset="0"/>
-                <a:ea typeface="Meiryo" pitchFamily="34" charset="-122"/>
-                <a:cs typeface="Meiryo" pitchFamily="34" charset="-120"/>
-              </a:rPr>
-              <a:t>の値が得られたのがサイト掲載の半分以下</a:t>
-            </a:r>
             <a:endParaRPr lang="ja-JP" sz="1800" dirty="0"/>
           </a:p>
         </p:txBody>
@@ -12994,7 +11050,7 @@
                 <a:ea typeface="Meiryo" pitchFamily="34" charset="-122"/>
                 <a:cs typeface="Meiryo" pitchFamily="34" charset="-120"/>
               </a:rPr>
-              <a:t>新規性（Uzzi et al. 2013）</a:t>
+              <a:t>5</a:t>
             </a:r>
             <a:endParaRPr lang="ja-JP" sz="2000" dirty="0"/>
           </a:p>
@@ -15611,7 +13667,7 @@
                 <a:ea typeface="Meiryo" pitchFamily="34" charset="-122"/>
                 <a:cs typeface="Meiryo" pitchFamily="34" charset="-120"/>
               </a:rPr>
-              <a:t>8</a:t>
+              <a:t>9</a:t>
             </a:r>
             <a:endParaRPr lang="ja-JP" sz="1200" dirty="0"/>
           </a:p>
@@ -17878,7 +15934,7 @@
                 <a:ea typeface="Meiryo" pitchFamily="34" charset="-122"/>
                 <a:cs typeface="Meiryo" pitchFamily="34" charset="-120"/>
               </a:rPr>
-              <a:t>9</a:t>
+              <a:t>11</a:t>
             </a:r>
             <a:endParaRPr lang="ja-JP" sz="1200" dirty="0"/>
           </a:p>
